--- a/docs/submission/DRIFT-pitch.pptx
+++ b/docs/submission/DRIFT-pitch.pptx
@@ -6,11 +6,15 @@
   </p:sldMasterIdLst>
   <p:sldIdLst>
     <p:sldId id="256" r:id="rId7"/>
-    <p:sldId id="257" r:id="rId8"/>
-    <p:sldId id="258" r:id="rId9"/>
-    <p:sldId id="259" r:id="rId10"/>
-    <p:sldId id="260" r:id="rId11"/>
+    <p:sldId id="257" r:id="rId9"/>
+    <p:sldId id="258" r:id="rId10"/>
+    <p:sldId id="259" r:id="rId11"/>
+    <p:sldId id="260" r:id="rId12"/>
     <p:sldId id="261" r:id="rId13"/>
+    <p:sldId id="262" r:id="rId14"/>
+    <p:sldId id="263" r:id="rId15"/>
+    <p:sldId id="264" r:id="rId16"/>
+    <p:sldId id="265" r:id="rId17"/>
   </p:sldIdLst>
   <p:sldSz cx="12191695" cy="6858000" type="screen4x3"/>
   <p:notesSz cx="6858000" cy="9144000"/>
@@ -507,7 +511,637 @@
           <a:lstStyle/>
           <a:p>
             <a:r>
-              <a:t>DRIFT's core (the quant engine, the cockpit and `MacroGuard.sol`) comes from the upstream DRIFT project, built for a Mantle hackathon track ("AI Trading &amp; Strategy", June 2026) and migrated to BNB Chain in `bcc-ukdw/seed-bnb` (commit `52671ce`, 29 Sep 2026). Dex Bennett's contribution in this fork: the MacroGuard transparency panel (`/dashboard/macroguard` and the public `/macroguard`), the read-only `/guard/state` API, contract reads straight from the browser over a public RPC (no engine needed), honest copy corrections, a self-owned MacroGuard deployment with an on-chain smoke test (30 Sep 2026), source verification on Sourcify, the judge-facing landing page and visual system, the PRD and the pitch deck.</a:t>
+              <a:t>DRIFT in one line: the trading bot's risk rules live in a public contract on BNB Chain, so anyone can check them.</a:t>
+            </a:r>
+          </a:p>
+        </p:txBody>
+      </p:sp>
+      <p:sp>
+        <p:nvSpPr>
+          <p:cNvPr id="4" name="Slide Number Placeholder 3"/>
+          <p:cNvSpPr>
+            <a:spLocks noGrp="1"/>
+          </p:cNvSpPr>
+          <p:nvPr>
+            <p:ph type="sldNum" idx="5" sz="quarter"/>
+          </p:nvPr>
+        </p:nvSpPr>
+        <p:spPr/>
+      </p:sp>
+    </p:spTree>
+  </p:cSld>
+  <p:clrMapOvr>
+    <a:masterClrMapping/>
+  </p:clrMapOvr>
+</p:notes>
+</file>
+
+<file path=ppt/notesSlides/notesSlide10.xml><?xml version="1.0" encoding="utf-8"?>
+<p:notes xmlns:a="http://schemas.openxmlformats.org/drawingml/2006/main" xmlns:p="http://schemas.openxmlformats.org/presentationml/2006/main" xmlns:r="http://schemas.openxmlformats.org/officeDocument/2006/relationships">
+  <p:cSld>
+    <p:spTree>
+      <p:nvGrpSpPr>
+        <p:cNvPr id="1" name=""/>
+        <p:cNvGrpSpPr/>
+        <p:nvPr/>
+      </p:nvGrpSpPr>
+      <p:grpSpPr>
+        <a:xfrm>
+          <a:off x="0" y="0"/>
+          <a:ext cx="0" cy="0"/>
+          <a:chOff x="0" y="0"/>
+          <a:chExt cx="0" cy="0"/>
+        </a:xfrm>
+      </p:grpSpPr>
+      <p:sp>
+        <p:nvSpPr>
+          <p:cNvPr id="2" name="Slide Image Placeholder 1"/>
+          <p:cNvSpPr>
+            <a:spLocks noGrp="1"/>
+          </p:cNvSpPr>
+          <p:nvPr>
+            <p:ph type="sldImg" idx="2"/>
+          </p:nvPr>
+        </p:nvSpPr>
+        <p:spPr/>
+      </p:sp>
+      <p:sp>
+        <p:nvSpPr>
+          <p:cNvPr id="3" name="Notes Placeholder 2"/>
+          <p:cNvSpPr>
+            <a:spLocks noGrp="1"/>
+          </p:cNvSpPr>
+          <p:nvPr>
+            <p:ph type="body" idx="3" sz="quarter"/>
+          </p:nvPr>
+        </p:nvSpPr>
+        <p:spPr/>
+        <p:txBody>
+          <a:bodyPr/>
+          <a:lstStyle/>
+          <a:p>
+            <a:r>
+              <a:t>Roadmap items are not built yet. The links are live today.</a:t>
+            </a:r>
+          </a:p>
+        </p:txBody>
+      </p:sp>
+      <p:sp>
+        <p:nvSpPr>
+          <p:cNvPr id="4" name="Slide Number Placeholder 3"/>
+          <p:cNvSpPr>
+            <a:spLocks noGrp="1"/>
+          </p:cNvSpPr>
+          <p:nvPr>
+            <p:ph type="sldNum" idx="5" sz="quarter"/>
+          </p:nvPr>
+        </p:nvSpPr>
+        <p:spPr/>
+      </p:sp>
+    </p:spTree>
+  </p:cSld>
+  <p:clrMapOvr>
+    <a:masterClrMapping/>
+  </p:clrMapOvr>
+</p:notes>
+</file>
+
+<file path=ppt/notesSlides/notesSlide2.xml><?xml version="1.0" encoding="utf-8"?>
+<p:notes xmlns:a="http://schemas.openxmlformats.org/drawingml/2006/main" xmlns:p="http://schemas.openxmlformats.org/presentationml/2006/main" xmlns:r="http://schemas.openxmlformats.org/officeDocument/2006/relationships">
+  <p:cSld>
+    <p:spTree>
+      <p:nvGrpSpPr>
+        <p:cNvPr id="1" name=""/>
+        <p:cNvGrpSpPr/>
+        <p:nvPr/>
+      </p:nvGrpSpPr>
+      <p:grpSpPr>
+        <a:xfrm>
+          <a:off x="0" y="0"/>
+          <a:ext cx="0" cy="0"/>
+          <a:chOff x="0" y="0"/>
+          <a:chExt cx="0" cy="0"/>
+        </a:xfrm>
+      </p:grpSpPr>
+      <p:sp>
+        <p:nvSpPr>
+          <p:cNvPr id="2" name="Slide Image Placeholder 1"/>
+          <p:cNvSpPr>
+            <a:spLocks noGrp="1"/>
+          </p:cNvSpPr>
+          <p:nvPr>
+            <p:ph type="sldImg" idx="2"/>
+          </p:nvPr>
+        </p:nvSpPr>
+        <p:spPr/>
+      </p:sp>
+      <p:sp>
+        <p:nvSpPr>
+          <p:cNvPr id="3" name="Notes Placeholder 2"/>
+          <p:cNvSpPr>
+            <a:spLocks noGrp="1"/>
+          </p:cNvSpPr>
+          <p:nvPr>
+            <p:ph type="body" idx="3" sz="quarter"/>
+          </p:nvPr>
+        </p:nvSpPr>
+        <p:spPr/>
+        <p:txBody>
+          <a:bodyPr/>
+          <a:lstStyle/>
+          <a:p>
+            <a:r>
+              <a:t>Bots ask for trust. DRIFT replaces the promise with a public rule and a public record.</a:t>
+            </a:r>
+          </a:p>
+        </p:txBody>
+      </p:sp>
+      <p:sp>
+        <p:nvSpPr>
+          <p:cNvPr id="4" name="Slide Number Placeholder 3"/>
+          <p:cNvSpPr>
+            <a:spLocks noGrp="1"/>
+          </p:cNvSpPr>
+          <p:nvPr>
+            <p:ph type="sldNum" idx="5" sz="quarter"/>
+          </p:nvPr>
+        </p:nvSpPr>
+        <p:spPr/>
+      </p:sp>
+    </p:spTree>
+  </p:cSld>
+  <p:clrMapOvr>
+    <a:masterClrMapping/>
+  </p:clrMapOvr>
+</p:notes>
+</file>
+
+<file path=ppt/notesSlides/notesSlide3.xml><?xml version="1.0" encoding="utf-8"?>
+<p:notes xmlns:a="http://schemas.openxmlformats.org/drawingml/2006/main" xmlns:p="http://schemas.openxmlformats.org/presentationml/2006/main" xmlns:r="http://schemas.openxmlformats.org/officeDocument/2006/relationships">
+  <p:cSld>
+    <p:spTree>
+      <p:nvGrpSpPr>
+        <p:cNvPr id="1" name=""/>
+        <p:cNvGrpSpPr/>
+        <p:nvPr/>
+      </p:nvGrpSpPr>
+      <p:grpSpPr>
+        <a:xfrm>
+          <a:off x="0" y="0"/>
+          <a:ext cx="0" cy="0"/>
+          <a:chOff x="0" y="0"/>
+          <a:chExt cx="0" cy="0"/>
+        </a:xfrm>
+      </p:grpSpPr>
+      <p:sp>
+        <p:nvSpPr>
+          <p:cNvPr id="2" name="Slide Image Placeholder 1"/>
+          <p:cNvSpPr>
+            <a:spLocks noGrp="1"/>
+          </p:cNvSpPr>
+          <p:nvPr>
+            <p:ph type="sldImg" idx="2"/>
+          </p:nvPr>
+        </p:nvSpPr>
+        <p:spPr/>
+      </p:sp>
+      <p:sp>
+        <p:nvSpPr>
+          <p:cNvPr id="3" name="Notes Placeholder 2"/>
+          <p:cNvSpPr>
+            <a:spLocks noGrp="1"/>
+          </p:cNvSpPr>
+          <p:nvPr>
+            <p:ph type="body" idx="3" sz="quarter"/>
+          </p:nvPr>
+        </p:nvSpPr>
+        <p:spPr/>
+        <p:txBody>
+          <a:bodyPr/>
+          <a:lstStyle/>
+          <a:p>
+            <a:r>
+              <a:t>Everything on this slide is a hypothesis: no user interviews or market sizing have been done yet. The point is the shape of the value: proof of discipline, not proof of profit.</a:t>
+            </a:r>
+          </a:p>
+        </p:txBody>
+      </p:sp>
+      <p:sp>
+        <p:nvSpPr>
+          <p:cNvPr id="4" name="Slide Number Placeholder 3"/>
+          <p:cNvSpPr>
+            <a:spLocks noGrp="1"/>
+          </p:cNvSpPr>
+          <p:nvPr>
+            <p:ph type="sldNum" idx="5" sz="quarter"/>
+          </p:nvPr>
+        </p:nvSpPr>
+        <p:spPr/>
+      </p:sp>
+    </p:spTree>
+  </p:cSld>
+  <p:clrMapOvr>
+    <a:masterClrMapping/>
+  </p:clrMapOvr>
+</p:notes>
+</file>
+
+<file path=ppt/notesSlides/notesSlide4.xml><?xml version="1.0" encoding="utf-8"?>
+<p:notes xmlns:a="http://schemas.openxmlformats.org/drawingml/2006/main" xmlns:p="http://schemas.openxmlformats.org/presentationml/2006/main" xmlns:r="http://schemas.openxmlformats.org/officeDocument/2006/relationships">
+  <p:cSld>
+    <p:spTree>
+      <p:nvGrpSpPr>
+        <p:cNvPr id="1" name=""/>
+        <p:cNvGrpSpPr/>
+        <p:nvPr/>
+      </p:nvGrpSpPr>
+      <p:grpSpPr>
+        <a:xfrm>
+          <a:off x="0" y="0"/>
+          <a:ext cx="0" cy="0"/>
+          <a:chOff x="0" y="0"/>
+          <a:chExt cx="0" cy="0"/>
+        </a:xfrm>
+      </p:grpSpPr>
+      <p:sp>
+        <p:nvSpPr>
+          <p:cNvPr id="2" name="Slide Image Placeholder 1"/>
+          <p:cNvSpPr>
+            <a:spLocks noGrp="1"/>
+          </p:cNvSpPr>
+          <p:nvPr>
+            <p:ph type="sldImg" idx="2"/>
+          </p:nvPr>
+        </p:nvSpPr>
+        <p:spPr/>
+      </p:sp>
+      <p:sp>
+        <p:nvSpPr>
+          <p:cNvPr id="3" name="Notes Placeholder 2"/>
+          <p:cNvSpPr>
+            <a:spLocks noGrp="1"/>
+          </p:cNvSpPr>
+          <p:nvPr>
+            <p:ph type="body" idx="3" sz="quarter"/>
+          </p:nvPr>
+        </p:nvSpPr>
+        <p:spPr/>
+        <p:txBody>
+          <a:bodyPr/>
+          <a:lstStyle/>
+          <a:p>
+            <a:r>
+              <a:t>Four steps: signal off-chain, ask the gate, trade on the exchange, record on-chain.</a:t>
+            </a:r>
+          </a:p>
+        </p:txBody>
+      </p:sp>
+      <p:sp>
+        <p:nvSpPr>
+          <p:cNvPr id="4" name="Slide Number Placeholder 3"/>
+          <p:cNvSpPr>
+            <a:spLocks noGrp="1"/>
+          </p:cNvSpPr>
+          <p:nvPr>
+            <p:ph type="sldNum" idx="5" sz="quarter"/>
+          </p:nvPr>
+        </p:nvSpPr>
+        <p:spPr/>
+      </p:sp>
+    </p:spTree>
+  </p:cSld>
+  <p:clrMapOvr>
+    <a:masterClrMapping/>
+  </p:clrMapOvr>
+</p:notes>
+</file>
+
+<file path=ppt/notesSlides/notesSlide5.xml><?xml version="1.0" encoding="utf-8"?>
+<p:notes xmlns:a="http://schemas.openxmlformats.org/drawingml/2006/main" xmlns:p="http://schemas.openxmlformats.org/presentationml/2006/main" xmlns:r="http://schemas.openxmlformats.org/officeDocument/2006/relationships">
+  <p:cSld>
+    <p:spTree>
+      <p:nvGrpSpPr>
+        <p:cNvPr id="1" name=""/>
+        <p:cNvGrpSpPr/>
+        <p:nvPr/>
+      </p:nvGrpSpPr>
+      <p:grpSpPr>
+        <a:xfrm>
+          <a:off x="0" y="0"/>
+          <a:ext cx="0" cy="0"/>
+          <a:chOff x="0" y="0"/>
+          <a:chExt cx="0" cy="0"/>
+        </a:xfrm>
+      </p:grpSpPr>
+      <p:sp>
+        <p:nvSpPr>
+          <p:cNvPr id="2" name="Slide Image Placeholder 1"/>
+          <p:cNvSpPr>
+            <a:spLocks noGrp="1"/>
+          </p:cNvSpPr>
+          <p:nvPr>
+            <p:ph type="sldImg" idx="2"/>
+          </p:nvPr>
+        </p:nvSpPr>
+        <p:spPr/>
+      </p:sp>
+      <p:sp>
+        <p:nvSpPr>
+          <p:cNvPr id="3" name="Notes Placeholder 2"/>
+          <p:cNvSpPr>
+            <a:spLocks noGrp="1"/>
+          </p:cNvSpPr>
+          <p:nvPr>
+            <p:ph type="body" idx="3" sz="quarter"/>
+          </p:nvPr>
+        </p:nvSpPr>
+        <p:spPr/>
+        <p:txBody>
+          <a:bodyPr/>
+          <a:lstStyle/>
+          <a:p>
+            <a:r>
+              <a:t>Public, no login, no wallet. Left: the live state read from BNB Chain in the browser. Right: ask the contract a what-if; it answers through eth_call, nothing is signed.</a:t>
+            </a:r>
+          </a:p>
+        </p:txBody>
+      </p:sp>
+      <p:sp>
+        <p:nvSpPr>
+          <p:cNvPr id="4" name="Slide Number Placeholder 3"/>
+          <p:cNvSpPr>
+            <a:spLocks noGrp="1"/>
+          </p:cNvSpPr>
+          <p:nvPr>
+            <p:ph type="sldNum" idx="5" sz="quarter"/>
+          </p:nvPr>
+        </p:nvSpPr>
+        <p:spPr/>
+      </p:sp>
+    </p:spTree>
+  </p:cSld>
+  <p:clrMapOvr>
+    <a:masterClrMapping/>
+  </p:clrMapOvr>
+</p:notes>
+</file>
+
+<file path=ppt/notesSlides/notesSlide6.xml><?xml version="1.0" encoding="utf-8"?>
+<p:notes xmlns:a="http://schemas.openxmlformats.org/drawingml/2006/main" xmlns:p="http://schemas.openxmlformats.org/presentationml/2006/main" xmlns:r="http://schemas.openxmlformats.org/officeDocument/2006/relationships">
+  <p:cSld>
+    <p:spTree>
+      <p:nvGrpSpPr>
+        <p:cNvPr id="1" name=""/>
+        <p:cNvGrpSpPr/>
+        <p:nvPr/>
+      </p:nvGrpSpPr>
+      <p:grpSpPr>
+        <a:xfrm>
+          <a:off x="0" y="0"/>
+          <a:ext cx="0" cy="0"/>
+          <a:chOff x="0" y="0"/>
+          <a:chExt cx="0" cy="0"/>
+        </a:xfrm>
+      </p:grpSpPr>
+      <p:sp>
+        <p:nvSpPr>
+          <p:cNvPr id="2" name="Slide Image Placeholder 1"/>
+          <p:cNvSpPr>
+            <a:spLocks noGrp="1"/>
+          </p:cNvSpPr>
+          <p:nvPr>
+            <p:ph type="sldImg" idx="2"/>
+          </p:nvPr>
+        </p:nvSpPr>
+        <p:spPr/>
+      </p:sp>
+      <p:sp>
+        <p:nvSpPr>
+          <p:cNvPr id="3" name="Notes Placeholder 2"/>
+          <p:cNvSpPr>
+            <a:spLocks noGrp="1"/>
+          </p:cNvSpPr>
+          <p:nvPr>
+            <p:ph type="body" idx="3" sz="quarter"/>
+          </p:nvPr>
+        </p:nvSpPr>
+        <p:spPr/>
+        <p:txBody>
+          <a:bodyPr/>
+          <a:lstStyle/>
+          <a:p>
+            <a:r>
+              <a:t>Smoke test on 30 Sep 2026. At step 3 nobody pressed a button: the rule fired inside the contract when the reported drawdown crossed 20%. Honest limit: the drawdown was reported by the agent.</a:t>
+            </a:r>
+          </a:p>
+        </p:txBody>
+      </p:sp>
+      <p:sp>
+        <p:nvSpPr>
+          <p:cNvPr id="4" name="Slide Number Placeholder 3"/>
+          <p:cNvSpPr>
+            <a:spLocks noGrp="1"/>
+          </p:cNvSpPr>
+          <p:nvPr>
+            <p:ph type="sldNum" idx="5" sz="quarter"/>
+          </p:nvPr>
+        </p:nvSpPr>
+        <p:spPr/>
+      </p:sp>
+    </p:spTree>
+  </p:cSld>
+  <p:clrMapOvr>
+    <a:masterClrMapping/>
+  </p:clrMapOvr>
+</p:notes>
+</file>
+
+<file path=ppt/notesSlides/notesSlide7.xml><?xml version="1.0" encoding="utf-8"?>
+<p:notes xmlns:a="http://schemas.openxmlformats.org/drawingml/2006/main" xmlns:p="http://schemas.openxmlformats.org/presentationml/2006/main" xmlns:r="http://schemas.openxmlformats.org/officeDocument/2006/relationships">
+  <p:cSld>
+    <p:spTree>
+      <p:nvGrpSpPr>
+        <p:cNvPr id="1" name=""/>
+        <p:cNvGrpSpPr/>
+        <p:nvPr/>
+      </p:nvGrpSpPr>
+      <p:grpSpPr>
+        <a:xfrm>
+          <a:off x="0" y="0"/>
+          <a:ext cx="0" cy="0"/>
+          <a:chOff x="0" y="0"/>
+          <a:chExt cx="0" cy="0"/>
+        </a:xfrm>
+      </p:grpSpPr>
+      <p:sp>
+        <p:nvSpPr>
+          <p:cNvPr id="2" name="Slide Image Placeholder 1"/>
+          <p:cNvSpPr>
+            <a:spLocks noGrp="1"/>
+          </p:cNvSpPr>
+          <p:nvPr>
+            <p:ph type="sldImg" idx="2"/>
+          </p:nvPr>
+        </p:nvSpPr>
+        <p:spPr/>
+      </p:sp>
+      <p:sp>
+        <p:nvSpPr>
+          <p:cNvPr id="3" name="Notes Placeholder 2"/>
+          <p:cNvSpPr>
+            <a:spLocks noGrp="1"/>
+          </p:cNvSpPr>
+          <p:nvPr>
+            <p:ph type="body" idx="3" sz="quarter"/>
+          </p:nvPr>
+        </p:nvSpPr>
+        <p:spPr/>
+        <p:txBody>
+          <a:bodyPr/>
+          <a:lstStyle/>
+          <a:p>
+            <a:r>
+              <a:t>Costs come from our own receipts on BSC Testnet at the observed 0.1 gwei; they are not a mainnet quote. The panel reads the chain from the browser because the public RPCs allow it.</a:t>
+            </a:r>
+          </a:p>
+        </p:txBody>
+      </p:sp>
+      <p:sp>
+        <p:nvSpPr>
+          <p:cNvPr id="4" name="Slide Number Placeholder 3"/>
+          <p:cNvSpPr>
+            <a:spLocks noGrp="1"/>
+          </p:cNvSpPr>
+          <p:nvPr>
+            <p:ph type="sldNum" idx="5" sz="quarter"/>
+          </p:nvPr>
+        </p:nvSpPr>
+        <p:spPr/>
+      </p:sp>
+    </p:spTree>
+  </p:cSld>
+  <p:clrMapOvr>
+    <a:masterClrMapping/>
+  </p:clrMapOvr>
+</p:notes>
+</file>
+
+<file path=ppt/notesSlides/notesSlide8.xml><?xml version="1.0" encoding="utf-8"?>
+<p:notes xmlns:a="http://schemas.openxmlformats.org/drawingml/2006/main" xmlns:p="http://schemas.openxmlformats.org/presentationml/2006/main" xmlns:r="http://schemas.openxmlformats.org/officeDocument/2006/relationships">
+  <p:cSld>
+    <p:spTree>
+      <p:nvGrpSpPr>
+        <p:cNvPr id="1" name=""/>
+        <p:cNvGrpSpPr/>
+        <p:nvPr/>
+      </p:nvGrpSpPr>
+      <p:grpSpPr>
+        <a:xfrm>
+          <a:off x="0" y="0"/>
+          <a:ext cx="0" cy="0"/>
+          <a:chOff x="0" y="0"/>
+          <a:chExt cx="0" cy="0"/>
+        </a:xfrm>
+      </p:grpSpPr>
+      <p:sp>
+        <p:nvSpPr>
+          <p:cNvPr id="2" name="Slide Image Placeholder 1"/>
+          <p:cNvSpPr>
+            <a:spLocks noGrp="1"/>
+          </p:cNvSpPr>
+          <p:nvPr>
+            <p:ph type="sldImg" idx="2"/>
+          </p:nvPr>
+        </p:nvSpPr>
+        <p:spPr/>
+      </p:sp>
+      <p:sp>
+        <p:nvSpPr>
+          <p:cNvPr id="3" name="Notes Placeholder 2"/>
+          <p:cNvSpPr>
+            <a:spLocks noGrp="1"/>
+          </p:cNvSpPr>
+          <p:nvPr>
+            <p:ph type="body" idx="3" sz="quarter"/>
+          </p:nvPr>
+        </p:nvSpPr>
+        <p:spPr/>
+        <p:txBody>
+          <a:bodyPr/>
+          <a:lstStyle/>
+          <a:p>
+            <a:r>
+              <a:t>Numbers from real runs on 3 Oct 2026. CI is set up and runs after the next push; not claimed green yet.</a:t>
+            </a:r>
+          </a:p>
+        </p:txBody>
+      </p:sp>
+      <p:sp>
+        <p:nvSpPr>
+          <p:cNvPr id="4" name="Slide Number Placeholder 3"/>
+          <p:cNvSpPr>
+            <a:spLocks noGrp="1"/>
+          </p:cNvSpPr>
+          <p:nvPr>
+            <p:ph type="sldNum" idx="5" sz="quarter"/>
+          </p:nvPr>
+        </p:nvSpPr>
+        <p:spPr/>
+      </p:sp>
+    </p:spTree>
+  </p:cSld>
+  <p:clrMapOvr>
+    <a:masterClrMapping/>
+  </p:clrMapOvr>
+</p:notes>
+</file>
+
+<file path=ppt/notesSlides/notesSlide9.xml><?xml version="1.0" encoding="utf-8"?>
+<p:notes xmlns:a="http://schemas.openxmlformats.org/drawingml/2006/main" xmlns:p="http://schemas.openxmlformats.org/presentationml/2006/main" xmlns:r="http://schemas.openxmlformats.org/officeDocument/2006/relationships">
+  <p:cSld>
+    <p:spTree>
+      <p:nvGrpSpPr>
+        <p:cNvPr id="1" name=""/>
+        <p:cNvGrpSpPr/>
+        <p:nvPr/>
+      </p:nvGrpSpPr>
+      <p:grpSpPr>
+        <a:xfrm>
+          <a:off x="0" y="0"/>
+          <a:ext cx="0" cy="0"/>
+          <a:chOff x="0" y="0"/>
+          <a:chExt cx="0" cy="0"/>
+        </a:xfrm>
+      </p:grpSpPr>
+      <p:sp>
+        <p:nvSpPr>
+          <p:cNvPr id="2" name="Slide Image Placeholder 1"/>
+          <p:cNvSpPr>
+            <a:spLocks noGrp="1"/>
+          </p:cNvSpPr>
+          <p:nvPr>
+            <p:ph type="sldImg" idx="2"/>
+          </p:nvPr>
+        </p:nvSpPr>
+        <p:spPr/>
+      </p:sp>
+      <p:sp>
+        <p:nvSpPr>
+          <p:cNvPr id="3" name="Notes Placeholder 2"/>
+          <p:cNvSpPr>
+            <a:spLocks noGrp="1"/>
+          </p:cNvSpPr>
+          <p:nvPr>
+            <p:ph type="body" idx="3" sz="quarter"/>
+          </p:nvPr>
+        </p:nvSpPr>
+        <p:spPr/>
+        <p:txBody>
+          <a:bodyPr/>
+          <a:lstStyle/>
+          <a:p>
+            <a:r>
+              <a:t>DRIFT's core (the quant engine, the cockpit and `MacroGuard.sol`) comes from the upstream DRIFT project, built for a Mantle hackathon track ("AI Trading &amp; Strategy", June 2026) and migrated to BNB Chain in `bcc-ukdw/seed-bnb` (commit `52671ce`, 29 Sep 2026). Dex Bennett's contribution in this fork: the MacroGuard transparency panel (`/dashboard/macroguard` and the public `/macroguard`), the read-only `/guard/state` API, contract reads straight from the browser over a public RPC (no engine needed), an "Ask the contract" what-if that simulates `recordDecision` with `eth_call` (nothing signed), a labelled Binance public-data fallback for the engine, honest copy corrections, a self-owned MacroGuard deployment with an on-chain smoke test (30 Sep 2026), source verification on Sourcify, contract fuzz and invariant tests, an offline engine test suite, CI, a threat model, the judge-facing landing page and visual system, the PRD and the pitch deck.</a:t>
             </a:r>
           </a:p>
         </p:txBody>
@@ -3538,12 +4172,15 @@
           <a:noFill/>
         </p:spPr>
         <p:txBody>
-          <a:bodyPr wrap="none">
+          <a:bodyPr wrap="square">
             <a:spAutoFit/>
           </a:bodyPr>
           <a:lstStyle/>
           <a:p>
             <a:pPr>
+              <a:spcAft>
+                <a:spcPts val="2100"/>
+              </a:spcAft>
               <a:defRPr sz="6000" b="1">
                 <a:solidFill>
                   <a:srgbClr val="F0B90B"/>
@@ -3574,12 +4211,15 @@
           <a:noFill/>
         </p:spPr>
         <p:txBody>
-          <a:bodyPr wrap="none">
+          <a:bodyPr wrap="square">
             <a:spAutoFit/>
           </a:bodyPr>
           <a:lstStyle/>
           <a:p>
             <a:pPr>
+              <a:spcAft>
+                <a:spcPts val="1189"/>
+              </a:spcAft>
               <a:defRPr sz="3400" b="1">
                 <a:solidFill>
                   <a:srgbClr val="F4F5F8"/>
@@ -3610,12 +4250,15 @@
           <a:noFill/>
         </p:spPr>
         <p:txBody>
-          <a:bodyPr wrap="none">
+          <a:bodyPr wrap="square">
             <a:spAutoFit/>
           </a:bodyPr>
           <a:lstStyle/>
           <a:p>
             <a:pPr>
+              <a:spcAft>
+                <a:spcPts val="769"/>
+              </a:spcAft>
               <a:defRPr sz="2200" b="0">
                 <a:solidFill>
                   <a:srgbClr val="A6ABB8"/>
@@ -3637,7 +4280,7 @@
         </p:nvSpPr>
         <p:spPr>
           <a:xfrm>
-            <a:off x="640080" y="4846320"/>
+            <a:off x="640080" y="4206240"/>
             <a:ext cx="10881360" cy="457200"/>
           </a:xfrm>
           <a:prstGeom prst="rect">
@@ -3646,21 +4289,24 @@
           <a:noFill/>
         </p:spPr>
         <p:txBody>
-          <a:bodyPr wrap="none">
+          <a:bodyPr wrap="square">
             <a:spAutoFit/>
           </a:bodyPr>
           <a:lstStyle/>
           <a:p>
             <a:pPr>
-              <a:defRPr sz="1600" b="0">
-                <a:solidFill>
-                  <a:srgbClr val="F0B90B"/>
-                </a:solidFill>
-                <a:latin typeface="Calibri"/>
-              </a:defRPr>
-            </a:pPr>
-            <a:r>
-              <a:t>Dex contract: 0x8b09ebB85Be8Ed55Bb5132d29eABc567c42aa83D</a:t>
+              <a:spcAft>
+                <a:spcPts val="630"/>
+              </a:spcAft>
+              <a:defRPr sz="1800" b="0">
+                <a:solidFill>
+                  <a:srgbClr val="F4F5F8"/>
+                </a:solidFill>
+                <a:latin typeface="Calibri"/>
+              </a:defRPr>
+            </a:pPr>
+            <a:r>
+              <a:t>Live: drift-macroguard.vercel.app/macroguard</a:t>
             </a:r>
           </a:p>
         </p:txBody>
@@ -3673,6 +4319,45 @@
         </p:nvSpPr>
         <p:spPr>
           <a:xfrm>
+            <a:off x="640080" y="4754880"/>
+            <a:ext cx="10881360" cy="457200"/>
+          </a:xfrm>
+          <a:prstGeom prst="rect">
+            <a:avLst/>
+          </a:prstGeom>
+          <a:noFill/>
+        </p:spPr>
+        <p:txBody>
+          <a:bodyPr wrap="square">
+            <a:spAutoFit/>
+          </a:bodyPr>
+          <a:lstStyle/>
+          <a:p>
+            <a:pPr>
+              <a:spcAft>
+                <a:spcPts val="560"/>
+              </a:spcAft>
+              <a:defRPr sz="1600" b="0">
+                <a:solidFill>
+                  <a:srgbClr val="F0B90B"/>
+                </a:solidFill>
+                <a:latin typeface="Calibri"/>
+              </a:defRPr>
+            </a:pPr>
+            <a:r>
+              <a:t>Dex contract (BSC Testnet): 0x8b09ebB85Be8Ed55Bb5132d29eABc567c42aa83D</a:t>
+            </a:r>
+          </a:p>
+        </p:txBody>
+      </p:sp>
+      <p:sp>
+        <p:nvSpPr>
+          <p:cNvPr id="7" name="TextBox 6"/>
+          <p:cNvSpPr txBox="1"/>
+          <p:nvPr/>
+        </p:nvSpPr>
+        <p:spPr>
+          <a:xfrm>
             <a:off x="640080" y="5852160"/>
             <a:ext cx="10881360" cy="457200"/>
           </a:xfrm>
@@ -3682,12 +4367,15 @@
           <a:noFill/>
         </p:spPr>
         <p:txBody>
-          <a:bodyPr wrap="none">
+          <a:bodyPr wrap="square">
             <a:spAutoFit/>
           </a:bodyPr>
           <a:lstStyle/>
           <a:p>
             <a:pPr>
+              <a:spcAft>
+                <a:spcPts val="630"/>
+              </a:spcAft>
               <a:defRPr sz="1800" b="0">
                 <a:solidFill>
                   <a:srgbClr val="A6ABB8"/>
@@ -3696,7 +4384,356 @@
               </a:defRPr>
             </a:pPr>
             <a:r>
-              <a:t>BSC Testnet · Indonesia Web3 Hackathon 2026 · Dex Bennett</a:t>
+              <a:t>Indonesia Web3 Hackathon 2026 · Dex Bennett</a:t>
+            </a:r>
+          </a:p>
+        </p:txBody>
+      </p:sp>
+    </p:spTree>
+  </p:cSld>
+  <p:clrMapOvr>
+    <a:masterClrMapping/>
+  </p:clrMapOvr>
+</p:sld>
+</file>
+
+<file path=ppt/slides/slide10.xml><?xml version="1.0" encoding="utf-8"?>
+<p:sld xmlns:a="http://schemas.openxmlformats.org/drawingml/2006/main" xmlns:p="http://schemas.openxmlformats.org/presentationml/2006/main" xmlns:r="http://schemas.openxmlformats.org/officeDocument/2006/relationships">
+  <p:cSld>
+    <p:bg>
+      <p:bgPr>
+        <a:solidFill>
+          <a:srgbClr val="0B0C0F"/>
+        </a:solidFill>
+        <a:effectLst/>
+      </p:bgPr>
+    </p:bg>
+    <p:spTree>
+      <p:nvGrpSpPr>
+        <p:cNvPr id="1" name=""/>
+        <p:cNvGrpSpPr/>
+        <p:nvPr/>
+      </p:nvGrpSpPr>
+      <p:grpSpPr/>
+      <p:sp>
+        <p:nvSpPr>
+          <p:cNvPr id="2" name="TextBox 1"/>
+          <p:cNvSpPr txBox="1"/>
+          <p:nvPr/>
+        </p:nvSpPr>
+        <p:spPr>
+          <a:xfrm>
+            <a:off x="640080" y="365760"/>
+            <a:ext cx="10881360" cy="822960"/>
+          </a:xfrm>
+          <a:prstGeom prst="rect">
+            <a:avLst/>
+          </a:prstGeom>
+          <a:noFill/>
+        </p:spPr>
+        <p:txBody>
+          <a:bodyPr wrap="square">
+            <a:spAutoFit/>
+          </a:bodyPr>
+          <a:lstStyle/>
+          <a:p>
+            <a:pPr>
+              <a:spcAft>
+                <a:spcPts val="1260"/>
+              </a:spcAft>
+              <a:defRPr sz="3600" b="1">
+                <a:solidFill>
+                  <a:srgbClr val="F4F5F8"/>
+                </a:solidFill>
+                <a:latin typeface="Calibri"/>
+              </a:defRPr>
+            </a:pPr>
+            <a:r>
+              <a:t>Roadmap</a:t>
+            </a:r>
+          </a:p>
+        </p:txBody>
+      </p:sp>
+      <p:sp>
+        <p:nvSpPr>
+          <p:cNvPr id="3" name="TextBox 2"/>
+          <p:cNvSpPr txBox="1"/>
+          <p:nvPr/>
+        </p:nvSpPr>
+        <p:spPr>
+          <a:xfrm>
+            <a:off x="640080" y="1188720"/>
+            <a:ext cx="10881360" cy="457200"/>
+          </a:xfrm>
+          <a:prstGeom prst="rect">
+            <a:avLst/>
+          </a:prstGeom>
+          <a:noFill/>
+        </p:spPr>
+        <p:txBody>
+          <a:bodyPr wrap="square">
+            <a:spAutoFit/>
+          </a:bodyPr>
+          <a:lstStyle/>
+          <a:p>
+            <a:pPr>
+              <a:spcAft>
+                <a:spcPts val="525"/>
+              </a:spcAft>
+              <a:defRPr sz="1500" b="1">
+                <a:solidFill>
+                  <a:srgbClr val="E5BD71"/>
+                </a:solidFill>
+                <a:latin typeface="Calibri"/>
+              </a:defRPr>
+            </a:pPr>
+            <a:r>
+              <a:t>Not built yet; listed in order of trust gained per step</a:t>
+            </a:r>
+          </a:p>
+        </p:txBody>
+      </p:sp>
+      <p:sp>
+        <p:nvSpPr>
+          <p:cNvPr id="4" name="TextBox 3"/>
+          <p:cNvSpPr txBox="1"/>
+          <p:nvPr/>
+        </p:nvSpPr>
+        <p:spPr>
+          <a:xfrm>
+            <a:off x="640080" y="1828800"/>
+            <a:ext cx="5669280" cy="3840480"/>
+          </a:xfrm>
+          <a:prstGeom prst="rect">
+            <a:avLst/>
+          </a:prstGeom>
+          <a:noFill/>
+        </p:spPr>
+        <p:txBody>
+          <a:bodyPr wrap="square">
+            <a:spAutoFit/>
+          </a:bodyPr>
+          <a:lstStyle/>
+          <a:p>
+            <a:pPr>
+              <a:spcAft>
+                <a:spcPts val="630"/>
+              </a:spcAft>
+              <a:defRPr sz="1800" b="0">
+                <a:solidFill>
+                  <a:srgbClr val="F4F5F8"/>
+                </a:solidFill>
+                <a:latin typeface="Calibri"/>
+              </a:defRPr>
+            </a:pPr>
+            <a:r>
+              <a:t>Resume through a multisig or timelock</a:t>
+            </a:r>
+          </a:p>
+          <a:p>
+            <a:pPr>
+              <a:spcAft>
+                <a:spcPts val="630"/>
+              </a:spcAft>
+              <a:defRPr sz="1800" b="0">
+                <a:solidFill>
+                  <a:srgbClr val="F4F5F8"/>
+                </a:solidFill>
+                <a:latin typeface="Calibri"/>
+              </a:defRPr>
+            </a:pPr>
+            <a:r>
+              <a:t>Fail-closed mode for the runner</a:t>
+            </a:r>
+          </a:p>
+          <a:p>
+            <a:pPr>
+              <a:spcAft>
+                <a:spcPts val="630"/>
+              </a:spcAft>
+              <a:defRPr sz="1800" b="0">
+                <a:solidFill>
+                  <a:srgbClr val="F4F5F8"/>
+                </a:solidFill>
+                <a:latin typeface="Calibri"/>
+              </a:defRPr>
+            </a:pPr>
+            <a:r>
+              <a:t>Signed regime verdicts (EIP-712) with an input hash</a:t>
+            </a:r>
+          </a:p>
+          <a:p>
+            <a:pPr>
+              <a:spcAft>
+                <a:spcPts val="630"/>
+              </a:spcAft>
+              <a:defRPr sz="1800" b="0">
+                <a:solidFill>
+                  <a:srgbClr val="F4F5F8"/>
+                </a:solidFill>
+                <a:latin typeface="Calibri"/>
+              </a:defRPr>
+            </a:pPr>
+            <a:r>
+              <a:t>Attested equity, so the drawdown is not self-reported</a:t>
+            </a:r>
+          </a:p>
+          <a:p>
+            <a:pPr>
+              <a:spcAft>
+                <a:spcPts val="630"/>
+              </a:spcAft>
+              <a:defRPr sz="1800" b="0">
+                <a:solidFill>
+                  <a:srgbClr val="F4F5F8"/>
+                </a:solidFill>
+                <a:latin typeface="Calibri"/>
+              </a:defRPr>
+            </a:pPr>
+            <a:r>
+              <a:t>Record the raw signal plus a veto flag</a:t>
+            </a:r>
+          </a:p>
+          <a:p>
+            <a:pPr>
+              <a:spcAft>
+                <a:spcPts val="630"/>
+              </a:spcAft>
+              <a:defRPr sz="1800" b="0">
+                <a:solidFill>
+                  <a:srgbClr val="F4F5F8"/>
+                </a:solidFill>
+                <a:latin typeface="Calibri"/>
+              </a:defRPr>
+            </a:pPr>
+            <a:r>
+              <a:t>Agent identity (ERC-8004), then mainnet after an audit</a:t>
+            </a:r>
+          </a:p>
+        </p:txBody>
+      </p:sp>
+      <p:sp>
+        <p:nvSpPr>
+          <p:cNvPr id="5" name="TextBox 4"/>
+          <p:cNvSpPr txBox="1"/>
+          <p:nvPr/>
+        </p:nvSpPr>
+        <p:spPr>
+          <a:xfrm>
+            <a:off x="6766560" y="1828800"/>
+            <a:ext cx="4754880" cy="548640"/>
+          </a:xfrm>
+          <a:prstGeom prst="rect">
+            <a:avLst/>
+          </a:prstGeom>
+          <a:noFill/>
+        </p:spPr>
+        <p:txBody>
+          <a:bodyPr wrap="square">
+            <a:spAutoFit/>
+          </a:bodyPr>
+          <a:lstStyle/>
+          <a:p>
+            <a:pPr>
+              <a:spcAft>
+                <a:spcPts val="839"/>
+              </a:spcAft>
+              <a:defRPr sz="2400" b="1">
+                <a:solidFill>
+                  <a:srgbClr val="F0B90B"/>
+                </a:solidFill>
+                <a:latin typeface="Calibri"/>
+              </a:defRPr>
+            </a:pPr>
+            <a:r>
+              <a:t>Check it yourself</a:t>
+            </a:r>
+          </a:p>
+        </p:txBody>
+      </p:sp>
+      <p:sp>
+        <p:nvSpPr>
+          <p:cNvPr id="6" name="TextBox 5"/>
+          <p:cNvSpPr txBox="1"/>
+          <p:nvPr/>
+        </p:nvSpPr>
+        <p:spPr>
+          <a:xfrm>
+            <a:off x="6766560" y="2560320"/>
+            <a:ext cx="4754880" cy="2743200"/>
+          </a:xfrm>
+          <a:prstGeom prst="rect">
+            <a:avLst/>
+          </a:prstGeom>
+          <a:noFill/>
+        </p:spPr>
+        <p:txBody>
+          <a:bodyPr wrap="square">
+            <a:spAutoFit/>
+          </a:bodyPr>
+          <a:lstStyle/>
+          <a:p>
+            <a:pPr>
+              <a:spcAft>
+                <a:spcPts val="560"/>
+              </a:spcAft>
+              <a:defRPr sz="1600" b="0">
+                <a:solidFill>
+                  <a:srgbClr val="F4F5F8"/>
+                </a:solidFill>
+                <a:latin typeface="Calibri"/>
+              </a:defRPr>
+            </a:pPr>
+            <a:r>
+              <a:t>drift-macroguard.vercel.app/macroguard</a:t>
+            </a:r>
+          </a:p>
+          <a:p>
+            <a:pPr>
+              <a:spcAft>
+                <a:spcPts val="560"/>
+              </a:spcAft>
+              <a:defRPr sz="1600" b="0">
+                <a:solidFill>
+                  <a:srgbClr val="F4F5F8"/>
+                </a:solidFill>
+                <a:latin typeface="Calibri"/>
+              </a:defRPr>
+            </a:pPr>
+            <a:r>
+              <a:t>github.com/Stylenecy/seed-bnb/tree/dex/drift/drift</a:t>
+            </a:r>
+          </a:p>
+          <a:p>
+            <a:pPr>
+              <a:spcAft>
+                <a:spcPts val="560"/>
+              </a:spcAft>
+              <a:defRPr sz="1600" b="0">
+                <a:solidFill>
+                  <a:srgbClr val="F4F5F8"/>
+                </a:solidFill>
+                <a:latin typeface="Calibri"/>
+              </a:defRPr>
+            </a:pPr>
+            <a:r>
+              <a:t>BscScan: 0x8b09ebB8…2aa83D</a:t>
+            </a:r>
+          </a:p>
+          <a:p>
+            <a:pPr>
+              <a:spcAft>
+                <a:spcPts val="560"/>
+              </a:spcAft>
+              <a:defRPr sz="1600" b="0">
+                <a:solidFill>
+                  <a:srgbClr val="F4F5F8"/>
+                </a:solidFill>
+                <a:latin typeface="Calibri"/>
+              </a:defRPr>
+            </a:pPr>
+            <a:r>
+              <a:t>Sourcify: repo.sourcify.dev/97/…</a:t>
             </a:r>
           </a:p>
         </p:txBody>
@@ -3744,13 +4781,16 @@
           <a:noFill/>
         </p:spPr>
         <p:txBody>
-          <a:bodyPr wrap="none">
+          <a:bodyPr wrap="square">
             <a:spAutoFit/>
           </a:bodyPr>
           <a:lstStyle/>
           <a:p>
             <a:pPr>
-              <a:defRPr sz="4000" b="1">
+              <a:spcAft>
+                <a:spcPts val="1260"/>
+              </a:spcAft>
+              <a:defRPr sz="3600" b="1">
                 <a:solidFill>
                   <a:srgbClr val="F4F5F8"/>
                 </a:solidFill>
@@ -3780,12 +4820,15 @@
           <a:noFill/>
         </p:spPr>
         <p:txBody>
-          <a:bodyPr wrap="none">
+          <a:bodyPr wrap="square">
             <a:spAutoFit/>
           </a:bodyPr>
           <a:lstStyle/>
           <a:p>
             <a:pPr>
+              <a:spcAft>
+                <a:spcPts val="839"/>
+              </a:spcAft>
               <a:defRPr sz="2400" b="0">
                 <a:solidFill>
                   <a:srgbClr val="F4F5F8"/>
@@ -3796,7 +4839,19 @@
             <a:r>
               <a:t>Trading bots ask users to trust risk rules nobody can see.</a:t>
             </a:r>
-            <a:br/>
+          </a:p>
+          <a:p>
+            <a:pPr>
+              <a:spcAft>
+                <a:spcPts val="839"/>
+              </a:spcAft>
+              <a:defRPr sz="2400" b="0">
+                <a:solidFill>
+                  <a:srgbClr val="F4F5F8"/>
+                </a:solidFill>
+                <a:latin typeface="Calibri"/>
+              </a:defRPr>
+            </a:pPr>
             <a:r>
               <a:t>Settings change silently; off-chain decision logs can be rewritten.</a:t>
             </a:r>
@@ -3820,12 +4875,15 @@
           <a:noFill/>
         </p:spPr>
         <p:txBody>
-          <a:bodyPr wrap="none">
+          <a:bodyPr wrap="square">
             <a:spAutoFit/>
           </a:bodyPr>
           <a:lstStyle/>
           <a:p>
             <a:pPr>
+              <a:spcAft>
+                <a:spcPts val="979"/>
+              </a:spcAft>
               <a:defRPr sz="2800" b="1">
                 <a:solidFill>
                   <a:srgbClr val="F0B90B"/>
@@ -3856,12 +4914,15 @@
           <a:noFill/>
         </p:spPr>
         <p:txBody>
-          <a:bodyPr wrap="none">
+          <a:bodyPr wrap="square">
             <a:spAutoFit/>
           </a:bodyPr>
           <a:lstStyle/>
           <a:p>
             <a:pPr>
+              <a:spcAft>
+                <a:spcPts val="839"/>
+              </a:spcAft>
               <a:defRPr sz="2400" b="0">
                 <a:solidFill>
                   <a:srgbClr val="F4F5F8"/>
@@ -3872,7 +4933,19 @@
             <a:r>
               <a:t>Anyone can check what DRIFT's bot is allowed to do right now,</a:t>
             </a:r>
-            <a:br/>
+          </a:p>
+          <a:p>
+            <a:pPr>
+              <a:spcAft>
+                <a:spcPts val="839"/>
+              </a:spcAft>
+              <a:defRPr sz="2400" b="0">
+                <a:solidFill>
+                  <a:srgbClr val="F4F5F8"/>
+                </a:solidFill>
+                <a:latin typeface="Calibri"/>
+              </a:defRPr>
+            </a:pPr>
             <a:r>
               <a:t>and every recorded decision is public on BscScan.</a:t>
             </a:r>
@@ -3922,13 +4995,16 @@
           <a:noFill/>
         </p:spPr>
         <p:txBody>
-          <a:bodyPr wrap="none">
+          <a:bodyPr wrap="square">
             <a:spAutoFit/>
           </a:bodyPr>
           <a:lstStyle/>
           <a:p>
             <a:pPr>
-              <a:defRPr sz="4000" b="1">
+              <a:spcAft>
+                <a:spcPts val="1260"/>
+              </a:spcAft>
+              <a:defRPr sz="3600" b="1">
                 <a:solidFill>
                   <a:srgbClr val="F4F5F8"/>
                 </a:solidFill>
@@ -3936,7 +5012,7 @@
               </a:defRPr>
             </a:pPr>
             <a:r>
-              <a:t>How DRIFT works</a:t>
+              <a:t>Who needs it, and how it could pay</a:t>
             </a:r>
           </a:p>
         </p:txBody>
@@ -3949,8 +5025,8 @@
         </p:nvSpPr>
         <p:spPr>
           <a:xfrm>
-            <a:off x="640080" y="1554480"/>
-            <a:ext cx="4754880" cy="640080"/>
+            <a:off x="640080" y="1234440"/>
+            <a:ext cx="10881360" cy="457200"/>
           </a:xfrm>
           <a:prstGeom prst="rect">
             <a:avLst/>
@@ -3958,21 +5034,24 @@
           <a:noFill/>
         </p:spPr>
         <p:txBody>
-          <a:bodyPr wrap="none">
+          <a:bodyPr wrap="square">
             <a:spAutoFit/>
           </a:bodyPr>
           <a:lstStyle/>
           <a:p>
             <a:pPr>
-              <a:defRPr sz="2600" b="1">
-                <a:solidFill>
-                  <a:srgbClr val="AEB9F4"/>
-                </a:solidFill>
-                <a:latin typeface="Calibri"/>
-              </a:defRPr>
-            </a:pPr>
-            <a:r>
-              <a:t>Off-chain: Python engine</a:t>
+              <a:spcAft>
+                <a:spcPts val="525"/>
+              </a:spcAft>
+              <a:defRPr sz="1500" b="1">
+                <a:solidFill>
+                  <a:srgbClr val="E5BD71"/>
+                </a:solidFill>
+                <a:latin typeface="Calibri"/>
+              </a:defRPr>
+            </a:pPr>
+            <a:r>
+              <a:t>HYPOTHESIS: not yet validated with users; no market figures claimed</a:t>
             </a:r>
           </a:p>
         </p:txBody>
@@ -3985,8 +5064,8 @@
         </p:nvSpPr>
         <p:spPr>
           <a:xfrm>
-            <a:off x="640080" y="2286000"/>
-            <a:ext cx="5029200" cy="1371600"/>
+            <a:off x="640080" y="1828800"/>
+            <a:ext cx="5120640" cy="548640"/>
           </a:xfrm>
           <a:prstGeom prst="rect">
             <a:avLst/>
@@ -3994,25 +5073,24 @@
           <a:noFill/>
         </p:spPr>
         <p:txBody>
-          <a:bodyPr wrap="none">
+          <a:bodyPr wrap="square">
             <a:spAutoFit/>
           </a:bodyPr>
           <a:lstStyle/>
           <a:p>
             <a:pPr>
-              <a:defRPr sz="2000" b="0">
-                <a:solidFill>
-                  <a:srgbClr val="F4F5F8"/>
-                </a:solidFill>
-                <a:latin typeface="Calibri"/>
-              </a:defRPr>
-            </a:pPr>
-            <a:r>
-              <a:t>Four strategies · point-in-time backtests</a:t>
-            </a:r>
-            <a:br/>
-            <a:r>
-              <a:t>Local drawdown stop · Bybit testnet execution</a:t>
+              <a:spcAft>
+                <a:spcPts val="839"/>
+              </a:spcAft>
+              <a:defRPr sz="2400" b="1">
+                <a:solidFill>
+                  <a:srgbClr val="AEB9F4"/>
+                </a:solidFill>
+                <a:latin typeface="Calibri"/>
+              </a:defRPr>
+            </a:pPr>
+            <a:r>
+              <a:t>Who needs it</a:t>
             </a:r>
           </a:p>
         </p:txBody>
@@ -4025,8 +5103,8 @@
         </p:nvSpPr>
         <p:spPr>
           <a:xfrm>
-            <a:off x="5669280" y="2103120"/>
-            <a:ext cx="731520" cy="914400"/>
+            <a:off x="640080" y="2468880"/>
+            <a:ext cx="5120640" cy="3291840"/>
           </a:xfrm>
           <a:prstGeom prst="rect">
             <a:avLst/>
@@ -4034,21 +5112,56 @@
           <a:noFill/>
         </p:spPr>
         <p:txBody>
-          <a:bodyPr wrap="none">
+          <a:bodyPr wrap="square">
             <a:spAutoFit/>
           </a:bodyPr>
           <a:lstStyle/>
           <a:p>
             <a:pPr>
-              <a:defRPr sz="4400" b="0">
-                <a:solidFill>
-                  <a:srgbClr val="A6ABB8"/>
-                </a:solidFill>
-                <a:latin typeface="Calibri"/>
-              </a:defRPr>
-            </a:pPr>
-            <a:r>
-              <a:t>→</a:t>
+              <a:spcAft>
+                <a:spcPts val="630"/>
+              </a:spcAft>
+              <a:defRPr sz="1800" b="0">
+                <a:solidFill>
+                  <a:srgbClr val="F4F5F8"/>
+                </a:solidFill>
+                <a:latin typeface="Calibri"/>
+              </a:defRPr>
+            </a:pPr>
+            <a:r>
+              <a:t>Retail traders who follow or rent bots: proof that the risk stop is real</a:t>
+            </a:r>
+          </a:p>
+          <a:p>
+            <a:pPr>
+              <a:spcAft>
+                <a:spcPts val="630"/>
+              </a:spcAft>
+              <a:defRPr sz="1800" b="0">
+                <a:solidFill>
+                  <a:srgbClr val="F4F5F8"/>
+                </a:solidFill>
+                <a:latin typeface="Calibri"/>
+              </a:defRPr>
+            </a:pPr>
+            <a:r>
+              <a:t>Bot builders and signal sellers: a record of discipline a screenshot cannot fake</a:t>
+            </a:r>
+          </a:p>
+          <a:p>
+            <a:pPr>
+              <a:spcAft>
+                <a:spcPts val="630"/>
+              </a:spcAft>
+              <a:defRPr sz="1800" b="0">
+                <a:solidFill>
+                  <a:srgbClr val="F4F5F8"/>
+                </a:solidFill>
+                <a:latin typeface="Calibri"/>
+              </a:defRPr>
+            </a:pPr>
+            <a:r>
+              <a:t>Communities and auditors: check a bot's rules without trusting its operator</a:t>
             </a:r>
           </a:p>
         </p:txBody>
@@ -4061,8 +5174,8 @@
         </p:nvSpPr>
         <p:spPr>
           <a:xfrm>
-            <a:off x="6492240" y="1554480"/>
-            <a:ext cx="5029200" cy="822960"/>
+            <a:off x="6309360" y="1828800"/>
+            <a:ext cx="5212080" cy="548640"/>
           </a:xfrm>
           <a:prstGeom prst="rect">
             <a:avLst/>
@@ -4070,13 +5183,16 @@
           <a:noFill/>
         </p:spPr>
         <p:txBody>
-          <a:bodyPr wrap="none">
+          <a:bodyPr wrap="square">
             <a:spAutoFit/>
           </a:bodyPr>
           <a:lstStyle/>
           <a:p>
             <a:pPr>
-              <a:defRPr sz="2600" b="1">
+              <a:spcAft>
+                <a:spcPts val="839"/>
+              </a:spcAft>
+              <a:defRPr sz="2400" b="1">
                 <a:solidFill>
                   <a:srgbClr val="F0B90B"/>
                 </a:solidFill>
@@ -4084,7 +5200,7 @@
               </a:defRPr>
             </a:pPr>
             <a:r>
-              <a:t>On-chain: MacroGuard (BSC Testnet)</a:t>
+              <a:t>How it could pay</a:t>
             </a:r>
           </a:p>
         </p:txBody>
@@ -4097,8 +5213,8 @@
         </p:nvSpPr>
         <p:spPr>
           <a:xfrm>
-            <a:off x="6492240" y="2377440"/>
-            <a:ext cx="5029200" cy="1371600"/>
+            <a:off x="6309360" y="2468880"/>
+            <a:ext cx="5212080" cy="3291840"/>
           </a:xfrm>
           <a:prstGeom prst="rect">
             <a:avLst/>
@@ -4106,13 +5222,16 @@
           <a:noFill/>
         </p:spPr>
         <p:txBody>
-          <a:bodyPr wrap="none">
+          <a:bodyPr wrap="square">
             <a:spAutoFit/>
           </a:bodyPr>
           <a:lstStyle/>
           <a:p>
             <a:pPr>
-              <a:defRPr sz="2000" b="0">
+              <a:spcAft>
+                <a:spcPts val="630"/>
+              </a:spcAft>
+              <a:defRPr sz="1800" b="0">
                 <a:solidFill>
                   <a:srgbClr val="F4F5F8"/>
                 </a:solidFill>
@@ -4120,47 +5239,39 @@
               </a:defRPr>
             </a:pPr>
             <a:r>
-              <a:t>allowed(signal) · regime · 20% drawdown halt</a:t>
-            </a:r>
-            <a:br/>
-            <a:r>
-              <a:t>recordDecision → public receipt</a:t>
-            </a:r>
-          </a:p>
-        </p:txBody>
-      </p:sp>
-      <p:sp>
-        <p:nvSpPr>
-          <p:cNvPr id="8" name="TextBox 7"/>
-          <p:cNvSpPr txBox="1"/>
-          <p:nvPr/>
-        </p:nvSpPr>
-        <p:spPr>
-          <a:xfrm>
-            <a:off x="640080" y="4389120"/>
-            <a:ext cx="10881360" cy="1097280"/>
-          </a:xfrm>
-          <a:prstGeom prst="rect">
-            <a:avLst/>
-          </a:prstGeom>
-          <a:noFill/>
-        </p:spPr>
-        <p:txBody>
-          <a:bodyPr wrap="none">
-            <a:spAutoFit/>
-          </a:bodyPr>
-          <a:lstStyle/>
-          <a:p>
-            <a:pPr>
-              <a:defRPr sz="2200" b="0">
-                <a:solidFill>
-                  <a:srgbClr val="A6ABB8"/>
-                </a:solidFill>
-                <a:latin typeface="Calibri"/>
-              </a:defRPr>
-            </a:pPr>
-            <a:r>
-              <a:t>The runner checks the public contract before orders. The contract does not control Bybit directly.</a:t>
+              <a:t>A risk gate per bot: its own MacroGuard plus a public panel, as a monthly service</a:t>
+            </a:r>
+          </a:p>
+          <a:p>
+            <a:pPr>
+              <a:spcAft>
+                <a:spcPts val="630"/>
+              </a:spcAft>
+              <a:defRPr sz="1800" b="0">
+                <a:solidFill>
+                  <a:srgbClr val="F4F5F8"/>
+                </a:solidFill>
+                <a:latin typeface="Calibri"/>
+              </a:defRPr>
+            </a:pPr>
+            <a:r>
+              <a:t>The panel link as a trust badge for strategy sellers</a:t>
+            </a:r>
+          </a:p>
+          <a:p>
+            <a:pPr>
+              <a:spcAft>
+                <a:spcPts val="630"/>
+              </a:spcAft>
+              <a:defRPr sz="1800" b="0">
+                <a:solidFill>
+                  <a:srgbClr val="F4F5F8"/>
+                </a:solidFill>
+                <a:latin typeface="Calibri"/>
+              </a:defRPr>
+            </a:pPr>
+            <a:r>
+              <a:t>No custody and no performance fee; on-chain cost per decision stays tiny (next slides)</a:t>
             </a:r>
           </a:p>
         </p:txBody>
@@ -4199,8 +5310,8 @@
         </p:nvSpPr>
         <p:spPr>
           <a:xfrm>
-            <a:off x="640080" y="274320"/>
-            <a:ext cx="10881360" cy="731520"/>
+            <a:off x="640080" y="365760"/>
+            <a:ext cx="10881360" cy="822960"/>
           </a:xfrm>
           <a:prstGeom prst="rect">
             <a:avLst/>
@@ -4208,13 +5319,16 @@
           <a:noFill/>
         </p:spPr>
         <p:txBody>
-          <a:bodyPr wrap="none">
+          <a:bodyPr wrap="square">
             <a:spAutoFit/>
           </a:bodyPr>
           <a:lstStyle/>
           <a:p>
             <a:pPr>
-              <a:defRPr sz="3000" b="1">
+              <a:spcAft>
+                <a:spcPts val="1260"/>
+              </a:spcAft>
+              <a:defRPr sz="3600" b="1">
                 <a:solidFill>
                   <a:srgbClr val="F4F5F8"/>
                 </a:solidFill>
@@ -4222,35 +5336,50 @@
               </a:defRPr>
             </a:pPr>
             <a:r>
-              <a:t>The MacroGuard panel — public, no login, no wallet</a:t>
-            </a:r>
-          </a:p>
-        </p:txBody>
-      </p:sp>
-      <p:pic>
-        <p:nvPicPr>
-          <p:cNvPr id="3" name="Picture 2" descr="public-guard-desktop.png"/>
-          <p:cNvPicPr>
-            <a:picLocks noChangeAspect="1"/>
-          </p:cNvPicPr>
+              <a:t>How DRIFT works</a:t>
+            </a:r>
+          </a:p>
+        </p:txBody>
+      </p:sp>
+      <p:sp>
+        <p:nvSpPr>
+          <p:cNvPr id="3" name="TextBox 2"/>
+          <p:cNvSpPr txBox="1"/>
           <p:nvPr/>
-        </p:nvPicPr>
-        <p:blipFill>
-          <a:blip r:embed="rId2"/>
-          <a:stretch>
-            <a:fillRect/>
-          </a:stretch>
-        </p:blipFill>
-        <p:spPr>
-          <a:xfrm>
-            <a:off x="640080" y="1097280"/>
-            <a:ext cx="6949440" cy="4343400"/>
-          </a:xfrm>
-          <a:prstGeom prst="rect">
-            <a:avLst/>
-          </a:prstGeom>
-        </p:spPr>
-      </p:pic>
+        </p:nvSpPr>
+        <p:spPr>
+          <a:xfrm>
+            <a:off x="640080" y="1463040"/>
+            <a:ext cx="2926080" cy="548640"/>
+          </a:xfrm>
+          <a:prstGeom prst="rect">
+            <a:avLst/>
+          </a:prstGeom>
+          <a:noFill/>
+        </p:spPr>
+        <p:txBody>
+          <a:bodyPr wrap="square">
+            <a:spAutoFit/>
+          </a:bodyPr>
+          <a:lstStyle/>
+          <a:p>
+            <a:pPr>
+              <a:spcAft>
+                <a:spcPts val="839"/>
+              </a:spcAft>
+              <a:defRPr sz="2400" b="1">
+                <a:solidFill>
+                  <a:srgbClr val="AEB9F4"/>
+                </a:solidFill>
+                <a:latin typeface="Calibri"/>
+              </a:defRPr>
+            </a:pPr>
+            <a:r>
+              <a:t>1  Signal</a:t>
+            </a:r>
+          </a:p>
+        </p:txBody>
+      </p:sp>
       <p:sp>
         <p:nvSpPr>
           <p:cNvPr id="4" name="TextBox 3"/>
@@ -4259,8 +5388,8 @@
         </p:nvSpPr>
         <p:spPr>
           <a:xfrm>
-            <a:off x="7863840" y="1188720"/>
-            <a:ext cx="3840480" cy="4389120"/>
+            <a:off x="3657600" y="1508760"/>
+            <a:ext cx="7863840" cy="822960"/>
           </a:xfrm>
           <a:prstGeom prst="rect">
             <a:avLst/>
@@ -4268,13 +5397,16 @@
           <a:noFill/>
         </p:spPr>
         <p:txBody>
-          <a:bodyPr wrap="none">
+          <a:bodyPr wrap="square">
             <a:spAutoFit/>
           </a:bodyPr>
           <a:lstStyle/>
           <a:p>
             <a:pPr>
-              <a:defRPr sz="1700" b="0">
+              <a:spcAft>
+                <a:spcPts val="700"/>
+              </a:spcAft>
+              <a:defRPr sz="2000" b="0">
                 <a:solidFill>
                   <a:srgbClr val="F4F5F8"/>
                 </a:solidFill>
@@ -4282,27 +5414,280 @@
               </a:defRPr>
             </a:pPr>
             <a:r>
-              <a:t>Live regime and halt state</a:t>
-            </a:r>
-            <a:br/>
-            <a:br/>
-            <a:r>
-              <a:t>Long / Short / Flat verdict with the reason</a:t>
-            </a:r>
-            <a:br/>
-            <a:br/>
-            <a:r>
-              <a:t>Contract, agent and threshold, each linked to BscScan</a:t>
-            </a:r>
-            <a:br/>
-            <a:br/>
-            <a:r>
-              <a:t>Dated trail of verified receipts</a:t>
-            </a:r>
-            <a:br/>
-            <a:br/>
-            <a:r>
-              <a:t>Honest offline state when the engine or RPC is down</a:t>
+              <a:t>Python engine: four strategies, point-in-time, no look-ahead</a:t>
+            </a:r>
+          </a:p>
+        </p:txBody>
+      </p:sp>
+      <p:sp>
+        <p:nvSpPr>
+          <p:cNvPr id="5" name="TextBox 4"/>
+          <p:cNvSpPr txBox="1"/>
+          <p:nvPr/>
+        </p:nvSpPr>
+        <p:spPr>
+          <a:xfrm>
+            <a:off x="640080" y="2514600"/>
+            <a:ext cx="2926080" cy="548640"/>
+          </a:xfrm>
+          <a:prstGeom prst="rect">
+            <a:avLst/>
+          </a:prstGeom>
+          <a:noFill/>
+        </p:spPr>
+        <p:txBody>
+          <a:bodyPr wrap="square">
+            <a:spAutoFit/>
+          </a:bodyPr>
+          <a:lstStyle/>
+          <a:p>
+            <a:pPr>
+              <a:spcAft>
+                <a:spcPts val="839"/>
+              </a:spcAft>
+              <a:defRPr sz="2400" b="1">
+                <a:solidFill>
+                  <a:srgbClr val="F0B90B"/>
+                </a:solidFill>
+                <a:latin typeface="Calibri"/>
+              </a:defRPr>
+            </a:pPr>
+            <a:r>
+              <a:t>2  Ask the gate</a:t>
+            </a:r>
+          </a:p>
+        </p:txBody>
+      </p:sp>
+      <p:sp>
+        <p:nvSpPr>
+          <p:cNvPr id="6" name="TextBox 5"/>
+          <p:cNvSpPr txBox="1"/>
+          <p:nvPr/>
+        </p:nvSpPr>
+        <p:spPr>
+          <a:xfrm>
+            <a:off x="3657600" y="2560320"/>
+            <a:ext cx="7863840" cy="822960"/>
+          </a:xfrm>
+          <a:prstGeom prst="rect">
+            <a:avLst/>
+          </a:prstGeom>
+          <a:noFill/>
+        </p:spPr>
+        <p:txBody>
+          <a:bodyPr wrap="square">
+            <a:spAutoFit/>
+          </a:bodyPr>
+          <a:lstStyle/>
+          <a:p>
+            <a:pPr>
+              <a:spcAft>
+                <a:spcPts val="700"/>
+              </a:spcAft>
+              <a:defRPr sz="2000" b="0">
+                <a:solidFill>
+                  <a:srgbClr val="F4F5F8"/>
+                </a:solidFill>
+                <a:latin typeface="Calibri"/>
+              </a:defRPr>
+            </a:pPr>
+            <a:r>
+              <a:t>MacroGuard.allowed(signal) on BSC Testnet: regime + 20% halt</a:t>
+            </a:r>
+          </a:p>
+        </p:txBody>
+      </p:sp>
+      <p:sp>
+        <p:nvSpPr>
+          <p:cNvPr id="7" name="TextBox 6"/>
+          <p:cNvSpPr txBox="1"/>
+          <p:nvPr/>
+        </p:nvSpPr>
+        <p:spPr>
+          <a:xfrm>
+            <a:off x="640080" y="3566160"/>
+            <a:ext cx="2926080" cy="548640"/>
+          </a:xfrm>
+          <a:prstGeom prst="rect">
+            <a:avLst/>
+          </a:prstGeom>
+          <a:noFill/>
+        </p:spPr>
+        <p:txBody>
+          <a:bodyPr wrap="square">
+            <a:spAutoFit/>
+          </a:bodyPr>
+          <a:lstStyle/>
+          <a:p>
+            <a:pPr>
+              <a:spcAft>
+                <a:spcPts val="839"/>
+              </a:spcAft>
+              <a:defRPr sz="2400" b="1">
+                <a:solidFill>
+                  <a:srgbClr val="AEB9F4"/>
+                </a:solidFill>
+                <a:latin typeface="Calibri"/>
+              </a:defRPr>
+            </a:pPr>
+            <a:r>
+              <a:t>3  Trade</a:t>
+            </a:r>
+          </a:p>
+        </p:txBody>
+      </p:sp>
+      <p:sp>
+        <p:nvSpPr>
+          <p:cNvPr id="8" name="TextBox 7"/>
+          <p:cNvSpPr txBox="1"/>
+          <p:nvPr/>
+        </p:nvSpPr>
+        <p:spPr>
+          <a:xfrm>
+            <a:off x="3657600" y="3611879"/>
+            <a:ext cx="7863840" cy="822960"/>
+          </a:xfrm>
+          <a:prstGeom prst="rect">
+            <a:avLst/>
+          </a:prstGeom>
+          <a:noFill/>
+        </p:spPr>
+        <p:txBody>
+          <a:bodyPr wrap="square">
+            <a:spAutoFit/>
+          </a:bodyPr>
+          <a:lstStyle/>
+          <a:p>
+            <a:pPr>
+              <a:spcAft>
+                <a:spcPts val="700"/>
+              </a:spcAft>
+              <a:defRPr sz="2000" b="0">
+                <a:solidFill>
+                  <a:srgbClr val="F4F5F8"/>
+                </a:solidFill>
+                <a:latin typeface="Calibri"/>
+              </a:defRPr>
+            </a:pPr>
+            <a:r>
+              <a:t>Runner places the order on Bybit testnet (vetoed signals go Flat)</a:t>
+            </a:r>
+          </a:p>
+        </p:txBody>
+      </p:sp>
+      <p:sp>
+        <p:nvSpPr>
+          <p:cNvPr id="9" name="TextBox 8"/>
+          <p:cNvSpPr txBox="1"/>
+          <p:nvPr/>
+        </p:nvSpPr>
+        <p:spPr>
+          <a:xfrm>
+            <a:off x="640080" y="4617720"/>
+            <a:ext cx="2926080" cy="548640"/>
+          </a:xfrm>
+          <a:prstGeom prst="rect">
+            <a:avLst/>
+          </a:prstGeom>
+          <a:noFill/>
+        </p:spPr>
+        <p:txBody>
+          <a:bodyPr wrap="square">
+            <a:spAutoFit/>
+          </a:bodyPr>
+          <a:lstStyle/>
+          <a:p>
+            <a:pPr>
+              <a:spcAft>
+                <a:spcPts val="839"/>
+              </a:spcAft>
+              <a:defRPr sz="2400" b="1">
+                <a:solidFill>
+                  <a:srgbClr val="F0B90B"/>
+                </a:solidFill>
+                <a:latin typeface="Calibri"/>
+              </a:defRPr>
+            </a:pPr>
+            <a:r>
+              <a:t>4  Record</a:t>
+            </a:r>
+          </a:p>
+        </p:txBody>
+      </p:sp>
+      <p:sp>
+        <p:nvSpPr>
+          <p:cNvPr id="10" name="TextBox 9"/>
+          <p:cNvSpPr txBox="1"/>
+          <p:nvPr/>
+        </p:nvSpPr>
+        <p:spPr>
+          <a:xfrm>
+            <a:off x="3657600" y="4663440"/>
+            <a:ext cx="7863840" cy="822960"/>
+          </a:xfrm>
+          <a:prstGeom prst="rect">
+            <a:avLst/>
+          </a:prstGeom>
+          <a:noFill/>
+        </p:spPr>
+        <p:txBody>
+          <a:bodyPr wrap="square">
+            <a:spAutoFit/>
+          </a:bodyPr>
+          <a:lstStyle/>
+          <a:p>
+            <a:pPr>
+              <a:spcAft>
+                <a:spcPts val="700"/>
+              </a:spcAft>
+              <a:defRPr sz="2000" b="0">
+                <a:solidFill>
+                  <a:srgbClr val="F4F5F8"/>
+                </a:solidFill>
+                <a:latin typeface="Calibri"/>
+              </a:defRPr>
+            </a:pPr>
+            <a:r>
+              <a:t>recordDecision(...) leaves a public receipt; a breach halts the contract</a:t>
+            </a:r>
+          </a:p>
+        </p:txBody>
+      </p:sp>
+      <p:sp>
+        <p:nvSpPr>
+          <p:cNvPr id="11" name="TextBox 10"/>
+          <p:cNvSpPr txBox="1"/>
+          <p:nvPr/>
+        </p:nvSpPr>
+        <p:spPr>
+          <a:xfrm>
+            <a:off x="640080" y="5760720"/>
+            <a:ext cx="10881360" cy="548640"/>
+          </a:xfrm>
+          <a:prstGeom prst="rect">
+            <a:avLst/>
+          </a:prstGeom>
+          <a:noFill/>
+        </p:spPr>
+        <p:txBody>
+          <a:bodyPr wrap="square">
+            <a:spAutoFit/>
+          </a:bodyPr>
+          <a:lstStyle/>
+          <a:p>
+            <a:pPr>
+              <a:spcAft>
+                <a:spcPts val="630"/>
+              </a:spcAft>
+              <a:defRPr sz="1800" b="0">
+                <a:solidFill>
+                  <a:srgbClr val="A6ABB8"/>
+                </a:solidFill>
+                <a:latin typeface="Calibri"/>
+              </a:defRPr>
+            </a:pPr>
+            <a:r>
+              <a:t>The contract never executes orders; it is the public rule and the public record.</a:t>
             </a:r>
           </a:p>
         </p:txBody>
@@ -4350,13 +5735,16 @@
           <a:noFill/>
         </p:spPr>
         <p:txBody>
-          <a:bodyPr wrap="none">
+          <a:bodyPr wrap="square">
             <a:spAutoFit/>
           </a:bodyPr>
           <a:lstStyle/>
           <a:p>
             <a:pPr>
-              <a:defRPr sz="4000" b="1">
+              <a:spcAft>
+                <a:spcPts val="1260"/>
+              </a:spcAft>
+              <a:defRPr sz="3600" b="1">
                 <a:solidFill>
                   <a:srgbClr val="F4F5F8"/>
                 </a:solidFill>
@@ -4364,95 +5752,59 @@
               </a:defRPr>
             </a:pPr>
             <a:r>
-              <a:t>What Dex added</a:t>
-            </a:r>
-          </a:p>
-        </p:txBody>
-      </p:sp>
-      <p:sp>
-        <p:nvSpPr>
-          <p:cNvPr id="3" name="TextBox 2"/>
-          <p:cNvSpPr txBox="1"/>
+              <a:t>The panel, and asking the contract</a:t>
+            </a:r>
+          </a:p>
+        </p:txBody>
+      </p:sp>
+      <p:pic>
+        <p:nvPicPr>
+          <p:cNvPr id="3" name="Picture 2" descr="public-guard-desktop.png"/>
+          <p:cNvPicPr>
+            <a:picLocks noChangeAspect="1"/>
+          </p:cNvPicPr>
           <p:nvPr/>
-        </p:nvSpPr>
-        <p:spPr>
-          <a:xfrm>
-            <a:off x="640080" y="1463040"/>
-            <a:ext cx="4754880" cy="640080"/>
-          </a:xfrm>
-          <a:prstGeom prst="rect">
-            <a:avLst/>
-          </a:prstGeom>
-          <a:noFill/>
-        </p:spPr>
-        <p:txBody>
-          <a:bodyPr wrap="none">
-            <a:spAutoFit/>
-          </a:bodyPr>
-          <a:lstStyle/>
-          <a:p>
-            <a:pPr>
-              <a:defRPr sz="2400" b="1">
-                <a:solidFill>
-                  <a:srgbClr val="A6ABB8"/>
-                </a:solidFill>
-                <a:latin typeface="Calibri"/>
-              </a:defRPr>
-            </a:pPr>
-            <a:r>
-              <a:t>Upstream DRIFT project</a:t>
-            </a:r>
-          </a:p>
-        </p:txBody>
-      </p:sp>
-      <p:sp>
-        <p:nvSpPr>
-          <p:cNvPr id="4" name="TextBox 3"/>
-          <p:cNvSpPr txBox="1"/>
+        </p:nvPicPr>
+        <p:blipFill>
+          <a:blip r:embed="rId3"/>
+          <a:stretch>
+            <a:fillRect/>
+          </a:stretch>
+        </p:blipFill>
+        <p:spPr>
+          <a:xfrm>
+            <a:off x="457200" y="1280160"/>
+            <a:ext cx="5577840" cy="3486150"/>
+          </a:xfrm>
+          <a:prstGeom prst="rect">
+            <a:avLst/>
+          </a:prstGeom>
+        </p:spPr>
+      </p:pic>
+      <p:pic>
+        <p:nvPicPr>
+          <p:cNvPr id="4" name="Picture 3" descr="ask-contract-desktop.png"/>
+          <p:cNvPicPr>
+            <a:picLocks noChangeAspect="1"/>
+          </p:cNvPicPr>
           <p:nvPr/>
-        </p:nvSpPr>
-        <p:spPr>
-          <a:xfrm>
-            <a:off x="640080" y="2194560"/>
-            <a:ext cx="5029200" cy="2560320"/>
-          </a:xfrm>
-          <a:prstGeom prst="rect">
-            <a:avLst/>
-          </a:prstGeom>
-          <a:noFill/>
-        </p:spPr>
-        <p:txBody>
-          <a:bodyPr wrap="none">
-            <a:spAutoFit/>
-          </a:bodyPr>
-          <a:lstStyle/>
-          <a:p>
-            <a:pPr>
-              <a:defRPr sz="2000" b="0">
-                <a:solidFill>
-                  <a:srgbClr val="F4F5F8"/>
-                </a:solidFill>
-                <a:latin typeface="Calibri"/>
-              </a:defRPr>
-            </a:pPr>
-            <a:r>
-              <a:t>Quant engine, cockpit and MacroGuard.sol</a:t>
-            </a:r>
-            <a:br/>
-            <a:r>
-              <a:t>Built for a Mantle hackathon track (June 2026)</a:t>
-            </a:r>
-            <a:br/>
-            <a:r>
-              <a:t>Migrated to BNB Chain in bcc-ukdw/seed-bnb</a:t>
-            </a:r>
-            <a:br/>
-            <a:r>
-              <a:t>(commit 52671ce, 29 Sep 2026)</a:t>
-            </a:r>
-          </a:p>
-        </p:txBody>
-      </p:sp>
+        </p:nvPicPr>
+        <p:blipFill>
+          <a:blip r:embed="rId4"/>
+          <a:stretch>
+            <a:fillRect/>
+          </a:stretch>
+        </p:blipFill>
+        <p:spPr>
+          <a:xfrm>
+            <a:off x="6217920" y="1280160"/>
+            <a:ext cx="5486400" cy="2704427"/>
+          </a:xfrm>
+          <a:prstGeom prst="rect">
+            <a:avLst/>
+          </a:prstGeom>
+        </p:spPr>
+      </p:pic>
       <p:sp>
         <p:nvSpPr>
           <p:cNvPr id="5" name="TextBox 4"/>
@@ -4461,8 +5813,8 @@
         </p:nvSpPr>
         <p:spPr>
           <a:xfrm>
-            <a:off x="6309360" y="1463040"/>
-            <a:ext cx="5212080" cy="640080"/>
+            <a:off x="457200" y="4937760"/>
+            <a:ext cx="5577840" cy="1280160"/>
           </a:xfrm>
           <a:prstGeom prst="rect">
             <a:avLst/>
@@ -4470,21 +5822,40 @@
           <a:noFill/>
         </p:spPr>
         <p:txBody>
-          <a:bodyPr wrap="none">
+          <a:bodyPr wrap="square">
             <a:spAutoFit/>
           </a:bodyPr>
           <a:lstStyle/>
           <a:p>
             <a:pPr>
-              <a:defRPr sz="2400" b="1">
-                <a:solidFill>
-                  <a:srgbClr val="F0B90B"/>
-                </a:solidFill>
-                <a:latin typeface="Calibri"/>
-              </a:defRPr>
-            </a:pPr>
-            <a:r>
-              <a:t>Dex work</a:t>
+              <a:spcAft>
+                <a:spcPts val="560"/>
+              </a:spcAft>
+              <a:defRPr sz="1600" b="0">
+                <a:solidFill>
+                  <a:srgbClr val="A6ABB8"/>
+                </a:solidFill>
+                <a:latin typeface="Calibri"/>
+              </a:defRPr>
+            </a:pPr>
+            <a:r>
+              <a:t>Live regime, halt, 20% line and decisions,</a:t>
+            </a:r>
+          </a:p>
+          <a:p>
+            <a:pPr>
+              <a:spcAft>
+                <a:spcPts val="560"/>
+              </a:spcAft>
+              <a:defRPr sz="1600" b="0">
+                <a:solidFill>
+                  <a:srgbClr val="A6ABB8"/>
+                </a:solidFill>
+                <a:latin typeface="Calibri"/>
+              </a:defRPr>
+            </a:pPr>
+            <a:r>
+              <a:t>read from BSC Testnet at a named block</a:t>
             </a:r>
           </a:p>
         </p:txBody>
@@ -4497,8 +5868,8 @@
         </p:nvSpPr>
         <p:spPr>
           <a:xfrm>
-            <a:off x="6309360" y="2194560"/>
-            <a:ext cx="5212080" cy="2926080"/>
+            <a:off x="6217920" y="4937760"/>
+            <a:ext cx="5486400" cy="1280160"/>
           </a:xfrm>
           <a:prstGeom prst="rect">
             <a:avLst/>
@@ -4506,77 +5877,40 @@
           <a:noFill/>
         </p:spPr>
         <p:txBody>
-          <a:bodyPr wrap="none">
+          <a:bodyPr wrap="square">
             <a:spAutoFit/>
           </a:bodyPr>
           <a:lstStyle/>
           <a:p>
             <a:pPr>
-              <a:defRPr sz="2000" b="0">
-                <a:solidFill>
-                  <a:srgbClr val="F4F5F8"/>
-                </a:solidFill>
-                <a:latin typeface="Calibri"/>
-              </a:defRPr>
-            </a:pPr>
-            <a:r>
-              <a:t>Own BSC Testnet deploy (receipt status 1)</a:t>
-            </a:r>
-            <a:br/>
-            <a:r>
-              <a:t>Smoke test: RiskOff / halt / resume / Neutral</a:t>
-            </a:r>
-            <a:br/>
-            <a:r>
-              <a:t>Source verified on Sourcify (exact match)</a:t>
-            </a:r>
-            <a:br/>
-            <a:r>
-              <a:t>Read-only /guard/state API</a:t>
-            </a:r>
-            <a:br/>
-            <a:r>
-              <a:t>Transparency panel + public /macroguard</a:t>
-            </a:r>
-            <a:br/>
-            <a:r>
-              <a:t>Judge-facing landing and visual system</a:t>
-            </a:r>
-          </a:p>
-        </p:txBody>
-      </p:sp>
-      <p:sp>
-        <p:nvSpPr>
-          <p:cNvPr id="7" name="TextBox 6"/>
-          <p:cNvSpPr txBox="1"/>
-          <p:nvPr/>
-        </p:nvSpPr>
-        <p:spPr>
-          <a:xfrm>
-            <a:off x="640080" y="5394960"/>
-            <a:ext cx="10881360" cy="457200"/>
-          </a:xfrm>
-          <a:prstGeom prst="rect">
-            <a:avLst/>
-          </a:prstGeom>
-          <a:noFill/>
-        </p:spPr>
-        <p:txBody>
-          <a:bodyPr wrap="none">
-            <a:spAutoFit/>
-          </a:bodyPr>
-          <a:lstStyle/>
-          <a:p>
-            <a:pPr>
-              <a:defRPr sz="1800" b="0">
-                <a:solidFill>
-                  <a:srgbClr val="AEB9F4"/>
-                </a:solidFill>
-                <a:latin typeface="Calibri"/>
-              </a:defRPr>
-            </a:pPr>
-            <a:r>
-              <a:t>Code: github.com/Stylenecy/seed-bnb/tree/dex/drift</a:t>
+              <a:spcAft>
+                <a:spcPts val="560"/>
+              </a:spcAft>
+              <a:defRPr sz="1600" b="0">
+                <a:solidFill>
+                  <a:srgbClr val="A6ABB8"/>
+                </a:solidFill>
+                <a:latin typeface="Calibri"/>
+              </a:defRPr>
+            </a:pPr>
+            <a:r>
+              <a:t>Long at −25%: Blocked, answered by the live contract</a:t>
+            </a:r>
+          </a:p>
+          <a:p>
+            <a:pPr>
+              <a:spcAft>
+                <a:spcPts val="560"/>
+              </a:spcAft>
+              <a:defRPr sz="1600" b="0">
+                <a:solidFill>
+                  <a:srgbClr val="A6ABB8"/>
+                </a:solidFill>
+                <a:latin typeface="Calibri"/>
+              </a:defRPr>
+            </a:pPr>
+            <a:r>
+              <a:t>via eth_call from the agent address (simulation)</a:t>
             </a:r>
           </a:p>
         </p:txBody>
@@ -4624,13 +5958,16 @@
           <a:noFill/>
         </p:spPr>
         <p:txBody>
-          <a:bodyPr wrap="none">
+          <a:bodyPr wrap="square">
             <a:spAutoFit/>
           </a:bodyPr>
           <a:lstStyle/>
           <a:p>
             <a:pPr>
-              <a:defRPr sz="4000" b="1">
+              <a:spcAft>
+                <a:spcPts val="1260"/>
+              </a:spcAft>
+              <a:defRPr sz="3600" b="1">
                 <a:solidFill>
                   <a:srgbClr val="F4F5F8"/>
                 </a:solidFill>
@@ -4638,7 +5975,1071 @@
               </a:defRPr>
             </a:pPr>
             <a:r>
-              <a:t>Evidence and current limits</a:t>
+              <a:t>−25% recorded: the contract halted itself</a:t>
+            </a:r>
+          </a:p>
+        </p:txBody>
+      </p:sp>
+      <p:sp>
+        <p:nvSpPr>
+          <p:cNvPr id="3" name="Rectangle 2"/>
+          <p:cNvSpPr/>
+          <p:nvPr/>
+        </p:nvSpPr>
+        <p:spPr>
+          <a:xfrm>
+            <a:off x="822960" y="1874519"/>
+            <a:ext cx="7010400" cy="201168"/>
+          </a:xfrm>
+          <a:prstGeom prst="rect">
+            <a:avLst/>
+          </a:prstGeom>
+          <a:solidFill>
+            <a:srgbClr val="1F4D3B"/>
+          </a:solidFill>
+          <a:ln>
+            <a:noFill/>
+          </a:ln>
+        </p:spPr>
+        <p:style>
+          <a:lnRef idx="1">
+            <a:schemeClr val="accent1"/>
+          </a:lnRef>
+          <a:fillRef idx="3">
+            <a:schemeClr val="accent1"/>
+          </a:fillRef>
+          <a:effectRef idx="2">
+            <a:schemeClr val="accent1"/>
+          </a:effectRef>
+          <a:fontRef idx="minor">
+            <a:schemeClr val="lt1"/>
+          </a:fontRef>
+        </p:style>
+        <p:txBody>
+          <a:bodyPr rtlCol="0" anchor="ctr"/>
+          <a:lstStyle/>
+          <a:p>
+            <a:pPr algn="ctr"/>
+          </a:p>
+        </p:txBody>
+      </p:sp>
+      <p:sp>
+        <p:nvSpPr>
+          <p:cNvPr id="4" name="Rectangle 3"/>
+          <p:cNvSpPr/>
+          <p:nvPr/>
+        </p:nvSpPr>
+        <p:spPr>
+          <a:xfrm>
+            <a:off x="7833360" y="1874519"/>
+            <a:ext cx="3505200" cy="201168"/>
+          </a:xfrm>
+          <a:prstGeom prst="rect">
+            <a:avLst/>
+          </a:prstGeom>
+          <a:solidFill>
+            <a:srgbClr val="5A232D"/>
+          </a:solidFill>
+          <a:ln>
+            <a:noFill/>
+          </a:ln>
+        </p:spPr>
+        <p:style>
+          <a:lnRef idx="1">
+            <a:schemeClr val="accent1"/>
+          </a:lnRef>
+          <a:fillRef idx="3">
+            <a:schemeClr val="accent1"/>
+          </a:fillRef>
+          <a:effectRef idx="2">
+            <a:schemeClr val="accent1"/>
+          </a:effectRef>
+          <a:fontRef idx="minor">
+            <a:schemeClr val="lt1"/>
+          </a:fontRef>
+        </p:style>
+        <p:txBody>
+          <a:bodyPr rtlCol="0" anchor="ctr"/>
+          <a:lstStyle/>
+          <a:p>
+            <a:pPr algn="ctr"/>
+          </a:p>
+        </p:txBody>
+      </p:sp>
+      <p:sp>
+        <p:nvSpPr>
+          <p:cNvPr id="5" name="Rectangle 4"/>
+          <p:cNvSpPr/>
+          <p:nvPr/>
+        </p:nvSpPr>
+        <p:spPr>
+          <a:xfrm>
+            <a:off x="7815072" y="1645919"/>
+            <a:ext cx="45720" cy="658368"/>
+          </a:xfrm>
+          <a:prstGeom prst="rect">
+            <a:avLst/>
+          </a:prstGeom>
+          <a:solidFill>
+            <a:srgbClr val="F0B90B"/>
+          </a:solidFill>
+          <a:ln>
+            <a:noFill/>
+          </a:ln>
+        </p:spPr>
+        <p:style>
+          <a:lnRef idx="1">
+            <a:schemeClr val="accent1"/>
+          </a:lnRef>
+          <a:fillRef idx="3">
+            <a:schemeClr val="accent1"/>
+          </a:fillRef>
+          <a:effectRef idx="2">
+            <a:schemeClr val="accent1"/>
+          </a:effectRef>
+          <a:fontRef idx="minor">
+            <a:schemeClr val="lt1"/>
+          </a:fontRef>
+        </p:style>
+        <p:txBody>
+          <a:bodyPr rtlCol="0" anchor="ctr"/>
+          <a:lstStyle/>
+          <a:p>
+            <a:pPr algn="ctr"/>
+          </a:p>
+        </p:txBody>
+      </p:sp>
+      <p:sp>
+        <p:nvSpPr>
+          <p:cNvPr id="6" name="Oval 5"/>
+          <p:cNvSpPr/>
+          <p:nvPr/>
+        </p:nvSpPr>
+        <p:spPr>
+          <a:xfrm>
+            <a:off x="1018032" y="1819655"/>
+            <a:ext cx="310896" cy="310896"/>
+          </a:xfrm>
+          <a:prstGeom prst="ellipse">
+            <a:avLst/>
+          </a:prstGeom>
+          <a:solidFill>
+            <a:srgbClr val="78D5AB"/>
+          </a:solidFill>
+          <a:ln>
+            <a:noFill/>
+          </a:ln>
+        </p:spPr>
+        <p:style>
+          <a:lnRef idx="1">
+            <a:schemeClr val="accent1"/>
+          </a:lnRef>
+          <a:fillRef idx="3">
+            <a:schemeClr val="accent1"/>
+          </a:fillRef>
+          <a:effectRef idx="2">
+            <a:schemeClr val="accent1"/>
+          </a:effectRef>
+          <a:fontRef idx="minor">
+            <a:schemeClr val="lt1"/>
+          </a:fontRef>
+        </p:style>
+        <p:txBody>
+          <a:bodyPr rtlCol="0" anchor="ctr"/>
+          <a:lstStyle/>
+          <a:p>
+            <a:pPr algn="ctr"/>
+          </a:p>
+        </p:txBody>
+      </p:sp>
+      <p:sp>
+        <p:nvSpPr>
+          <p:cNvPr id="7" name="Oval 6"/>
+          <p:cNvSpPr/>
+          <p:nvPr/>
+        </p:nvSpPr>
+        <p:spPr>
+          <a:xfrm>
+            <a:off x="9430512" y="1819655"/>
+            <a:ext cx="310896" cy="310896"/>
+          </a:xfrm>
+          <a:prstGeom prst="ellipse">
+            <a:avLst/>
+          </a:prstGeom>
+          <a:solidFill>
+            <a:srgbClr val="FB7185"/>
+          </a:solidFill>
+          <a:ln>
+            <a:noFill/>
+          </a:ln>
+        </p:spPr>
+        <p:style>
+          <a:lnRef idx="1">
+            <a:schemeClr val="accent1"/>
+          </a:lnRef>
+          <a:fillRef idx="3">
+            <a:schemeClr val="accent1"/>
+          </a:fillRef>
+          <a:effectRef idx="2">
+            <a:schemeClr val="accent1"/>
+          </a:effectRef>
+          <a:fontRef idx="minor">
+            <a:schemeClr val="lt1"/>
+          </a:fontRef>
+        </p:style>
+        <p:txBody>
+          <a:bodyPr rtlCol="0" anchor="ctr"/>
+          <a:lstStyle/>
+          <a:p>
+            <a:pPr algn="ctr"/>
+          </a:p>
+        </p:txBody>
+      </p:sp>
+      <p:sp>
+        <p:nvSpPr>
+          <p:cNvPr id="8" name="TextBox 7"/>
+          <p:cNvSpPr txBox="1"/>
+          <p:nvPr/>
+        </p:nvSpPr>
+        <p:spPr>
+          <a:xfrm>
+            <a:off x="7010399" y="1188719"/>
+            <a:ext cx="2011680" cy="365760"/>
+          </a:xfrm>
+          <a:prstGeom prst="rect">
+            <a:avLst/>
+          </a:prstGeom>
+          <a:noFill/>
+        </p:spPr>
+        <p:txBody>
+          <a:bodyPr wrap="square">
+            <a:spAutoFit/>
+          </a:bodyPr>
+          <a:lstStyle/>
+          <a:p>
+            <a:pPr>
+              <a:spcAft>
+                <a:spcPts val="489"/>
+              </a:spcAft>
+              <a:defRPr sz="1400" b="1">
+                <a:solidFill>
+                  <a:srgbClr val="F0B90B"/>
+                </a:solidFill>
+                <a:latin typeface="Calibri"/>
+              </a:defRPr>
+            </a:pPr>
+            <a:r>
+              <a:t>halt line 20%</a:t>
+            </a:r>
+          </a:p>
+        </p:txBody>
+      </p:sp>
+      <p:sp>
+        <p:nvSpPr>
+          <p:cNvPr id="9" name="TextBox 8"/>
+          <p:cNvSpPr txBox="1"/>
+          <p:nvPr/>
+        </p:nvSpPr>
+        <p:spPr>
+          <a:xfrm>
+            <a:off x="731520" y="2194560"/>
+            <a:ext cx="2743200" cy="365760"/>
+          </a:xfrm>
+          <a:prstGeom prst="rect">
+            <a:avLst/>
+          </a:prstGeom>
+          <a:noFill/>
+        </p:spPr>
+        <p:txBody>
+          <a:bodyPr wrap="square">
+            <a:spAutoFit/>
+          </a:bodyPr>
+          <a:lstStyle/>
+          <a:p>
+            <a:pPr>
+              <a:spcAft>
+                <a:spcPts val="489"/>
+              </a:spcAft>
+              <a:defRPr sz="1400" b="0">
+                <a:solidFill>
+                  <a:srgbClr val="78D5AB"/>
+                </a:solidFill>
+                <a:latin typeface="Calibri"/>
+              </a:defRPr>
+            </a:pPr>
+            <a:r>
+              <a:t>−1%: kept running</a:t>
+            </a:r>
+          </a:p>
+        </p:txBody>
+      </p:sp>
+      <p:sp>
+        <p:nvSpPr>
+          <p:cNvPr id="10" name="TextBox 9"/>
+          <p:cNvSpPr txBox="1"/>
+          <p:nvPr/>
+        </p:nvSpPr>
+        <p:spPr>
+          <a:xfrm>
+            <a:off x="8122920" y="2194560"/>
+            <a:ext cx="3108960" cy="365760"/>
+          </a:xfrm>
+          <a:prstGeom prst="rect">
+            <a:avLst/>
+          </a:prstGeom>
+          <a:noFill/>
+        </p:spPr>
+        <p:txBody>
+          <a:bodyPr wrap="square">
+            <a:spAutoFit/>
+          </a:bodyPr>
+          <a:lstStyle/>
+          <a:p>
+            <a:pPr>
+              <a:spcAft>
+                <a:spcPts val="489"/>
+              </a:spcAft>
+              <a:defRPr sz="1400" b="0">
+                <a:solidFill>
+                  <a:srgbClr val="FB7185"/>
+                </a:solidFill>
+                <a:latin typeface="Calibri"/>
+              </a:defRPr>
+            </a:pPr>
+            <a:r>
+              <a:t>−25%: halted itself</a:t>
+            </a:r>
+          </a:p>
+        </p:txBody>
+      </p:sp>
+      <p:sp>
+        <p:nvSpPr>
+          <p:cNvPr id="11" name="TextBox 10"/>
+          <p:cNvSpPr txBox="1"/>
+          <p:nvPr/>
+        </p:nvSpPr>
+        <p:spPr>
+          <a:xfrm>
+            <a:off x="731520" y="2880360"/>
+            <a:ext cx="2103120" cy="457200"/>
+          </a:xfrm>
+          <a:prstGeom prst="rect">
+            <a:avLst/>
+          </a:prstGeom>
+          <a:noFill/>
+        </p:spPr>
+        <p:txBody>
+          <a:bodyPr wrap="square">
+            <a:spAutoFit/>
+          </a:bodyPr>
+          <a:lstStyle/>
+          <a:p>
+            <a:pPr>
+              <a:spcAft>
+                <a:spcPts val="594"/>
+              </a:spcAft>
+              <a:defRPr sz="1700" b="0">
+                <a:solidFill>
+                  <a:srgbClr val="F0B90B"/>
+                </a:solidFill>
+                <a:latin typeface="Calibri"/>
+              </a:defRPr>
+            </a:pPr>
+            <a:r>
+              <a:t>#134,042,196</a:t>
+            </a:r>
+          </a:p>
+        </p:txBody>
+      </p:sp>
+      <p:sp>
+        <p:nvSpPr>
+          <p:cNvPr id="12" name="TextBox 11"/>
+          <p:cNvSpPr txBox="1"/>
+          <p:nvPr/>
+        </p:nvSpPr>
+        <p:spPr>
+          <a:xfrm>
+            <a:off x="2926080" y="2880360"/>
+            <a:ext cx="4206240" cy="457200"/>
+          </a:xfrm>
+          <a:prstGeom prst="rect">
+            <a:avLst/>
+          </a:prstGeom>
+          <a:noFill/>
+        </p:spPr>
+        <p:txBody>
+          <a:bodyPr wrap="square">
+            <a:spAutoFit/>
+          </a:bodyPr>
+          <a:lstStyle/>
+          <a:p>
+            <a:pPr>
+              <a:spcAft>
+                <a:spcPts val="594"/>
+              </a:spcAft>
+              <a:defRPr sz="1700" b="0">
+                <a:solidFill>
+                  <a:srgbClr val="F4F5F8"/>
+                </a:solidFill>
+                <a:latin typeface="Calibri"/>
+              </a:defRPr>
+            </a:pPr>
+            <a:r>
+              <a:t>setRegime(RiskOff)</a:t>
+            </a:r>
+          </a:p>
+        </p:txBody>
+      </p:sp>
+      <p:sp>
+        <p:nvSpPr>
+          <p:cNvPr id="13" name="TextBox 12"/>
+          <p:cNvSpPr txBox="1"/>
+          <p:nvPr/>
+        </p:nvSpPr>
+        <p:spPr>
+          <a:xfrm>
+            <a:off x="7223760" y="2880360"/>
+            <a:ext cx="4389120" cy="457200"/>
+          </a:xfrm>
+          <a:prstGeom prst="rect">
+            <a:avLst/>
+          </a:prstGeom>
+          <a:noFill/>
+        </p:spPr>
+        <p:txBody>
+          <a:bodyPr wrap="square">
+            <a:spAutoFit/>
+          </a:bodyPr>
+          <a:lstStyle/>
+          <a:p>
+            <a:pPr>
+              <a:spcAft>
+                <a:spcPts val="594"/>
+              </a:spcAft>
+              <a:defRPr sz="1700" b="0">
+                <a:solidFill>
+                  <a:srgbClr val="A6ABB8"/>
+                </a:solidFill>
+                <a:latin typeface="Calibri"/>
+              </a:defRPr>
+            </a:pPr>
+            <a:r>
+              <a:t>Long blocked; Short and Flat open</a:t>
+            </a:r>
+          </a:p>
+        </p:txBody>
+      </p:sp>
+      <p:sp>
+        <p:nvSpPr>
+          <p:cNvPr id="14" name="TextBox 13"/>
+          <p:cNvSpPr txBox="1"/>
+          <p:nvPr/>
+        </p:nvSpPr>
+        <p:spPr>
+          <a:xfrm>
+            <a:off x="731520" y="3502152"/>
+            <a:ext cx="2103120" cy="457200"/>
+          </a:xfrm>
+          <a:prstGeom prst="rect">
+            <a:avLst/>
+          </a:prstGeom>
+          <a:noFill/>
+        </p:spPr>
+        <p:txBody>
+          <a:bodyPr wrap="square">
+            <a:spAutoFit/>
+          </a:bodyPr>
+          <a:lstStyle/>
+          <a:p>
+            <a:pPr>
+              <a:spcAft>
+                <a:spcPts val="594"/>
+              </a:spcAft>
+              <a:defRPr sz="1700" b="0">
+                <a:solidFill>
+                  <a:srgbClr val="F0B90B"/>
+                </a:solidFill>
+                <a:latin typeface="Calibri"/>
+              </a:defRPr>
+            </a:pPr>
+            <a:r>
+              <a:t>#134,042,256</a:t>
+            </a:r>
+          </a:p>
+        </p:txBody>
+      </p:sp>
+      <p:sp>
+        <p:nvSpPr>
+          <p:cNvPr id="15" name="TextBox 14"/>
+          <p:cNvSpPr txBox="1"/>
+          <p:nvPr/>
+        </p:nvSpPr>
+        <p:spPr>
+          <a:xfrm>
+            <a:off x="2926080" y="3502152"/>
+            <a:ext cx="4206240" cy="457200"/>
+          </a:xfrm>
+          <a:prstGeom prst="rect">
+            <a:avLst/>
+          </a:prstGeom>
+          <a:noFill/>
+        </p:spPr>
+        <p:txBody>
+          <a:bodyPr wrap="square">
+            <a:spAutoFit/>
+          </a:bodyPr>
+          <a:lstStyle/>
+          <a:p>
+            <a:pPr>
+              <a:spcAft>
+                <a:spcPts val="594"/>
+              </a:spcAft>
+              <a:defRPr sz="1700" b="0">
+                <a:solidFill>
+                  <a:srgbClr val="F4F5F8"/>
+                </a:solidFill>
+                <a:latin typeface="Calibri"/>
+              </a:defRPr>
+            </a:pPr>
+            <a:r>
+              <a:t>recordDecision(BNB, Short, −1%)</a:t>
+            </a:r>
+          </a:p>
+        </p:txBody>
+      </p:sp>
+      <p:sp>
+        <p:nvSpPr>
+          <p:cNvPr id="16" name="TextBox 15"/>
+          <p:cNvSpPr txBox="1"/>
+          <p:nvPr/>
+        </p:nvSpPr>
+        <p:spPr>
+          <a:xfrm>
+            <a:off x="7223760" y="3502152"/>
+            <a:ext cx="4389120" cy="457200"/>
+          </a:xfrm>
+          <a:prstGeom prst="rect">
+            <a:avLst/>
+          </a:prstGeom>
+          <a:noFill/>
+        </p:spPr>
+        <p:txBody>
+          <a:bodyPr wrap="square">
+            <a:spAutoFit/>
+          </a:bodyPr>
+          <a:lstStyle/>
+          <a:p>
+            <a:pPr>
+              <a:spcAft>
+                <a:spcPts val="594"/>
+              </a:spcAft>
+              <a:defRPr sz="1700" b="0">
+                <a:solidFill>
+                  <a:srgbClr val="78D5AB"/>
+                </a:solidFill>
+                <a:latin typeface="Calibri"/>
+              </a:defRPr>
+            </a:pPr>
+            <a:r>
+              <a:t>Decision #1, inside the line</a:t>
+            </a:r>
+          </a:p>
+        </p:txBody>
+      </p:sp>
+      <p:sp>
+        <p:nvSpPr>
+          <p:cNvPr id="17" name="Rectangle 16"/>
+          <p:cNvSpPr/>
+          <p:nvPr/>
+        </p:nvSpPr>
+        <p:spPr>
+          <a:xfrm>
+            <a:off x="548640" y="4078224"/>
+            <a:ext cx="11064240" cy="585216"/>
+          </a:xfrm>
+          <a:prstGeom prst="rect">
+            <a:avLst/>
+          </a:prstGeom>
+          <a:solidFill>
+            <a:srgbClr val="16171B"/>
+          </a:solidFill>
+          <a:ln>
+            <a:noFill/>
+          </a:ln>
+        </p:spPr>
+        <p:style>
+          <a:lnRef idx="1">
+            <a:schemeClr val="accent1"/>
+          </a:lnRef>
+          <a:fillRef idx="3">
+            <a:schemeClr val="accent1"/>
+          </a:fillRef>
+          <a:effectRef idx="2">
+            <a:schemeClr val="accent1"/>
+          </a:effectRef>
+          <a:fontRef idx="minor">
+            <a:schemeClr val="lt1"/>
+          </a:fontRef>
+        </p:style>
+        <p:txBody>
+          <a:bodyPr rtlCol="0" anchor="ctr"/>
+          <a:lstStyle/>
+          <a:p>
+            <a:pPr algn="ctr"/>
+          </a:p>
+        </p:txBody>
+      </p:sp>
+      <p:sp>
+        <p:nvSpPr>
+          <p:cNvPr id="18" name="TextBox 17"/>
+          <p:cNvSpPr txBox="1"/>
+          <p:nvPr/>
+        </p:nvSpPr>
+        <p:spPr>
+          <a:xfrm>
+            <a:off x="731520" y="4123944"/>
+            <a:ext cx="2103120" cy="457200"/>
+          </a:xfrm>
+          <a:prstGeom prst="rect">
+            <a:avLst/>
+          </a:prstGeom>
+          <a:noFill/>
+        </p:spPr>
+        <p:txBody>
+          <a:bodyPr wrap="square">
+            <a:spAutoFit/>
+          </a:bodyPr>
+          <a:lstStyle/>
+          <a:p>
+            <a:pPr>
+              <a:spcAft>
+                <a:spcPts val="594"/>
+              </a:spcAft>
+              <a:defRPr sz="1700" b="0">
+                <a:solidFill>
+                  <a:srgbClr val="F0B90B"/>
+                </a:solidFill>
+                <a:latin typeface="Calibri"/>
+              </a:defRPr>
+            </a:pPr>
+            <a:r>
+              <a:t>#134,042,283</a:t>
+            </a:r>
+          </a:p>
+        </p:txBody>
+      </p:sp>
+      <p:sp>
+        <p:nvSpPr>
+          <p:cNvPr id="19" name="TextBox 18"/>
+          <p:cNvSpPr txBox="1"/>
+          <p:nvPr/>
+        </p:nvSpPr>
+        <p:spPr>
+          <a:xfrm>
+            <a:off x="2926080" y="4123944"/>
+            <a:ext cx="4206240" cy="457200"/>
+          </a:xfrm>
+          <a:prstGeom prst="rect">
+            <a:avLst/>
+          </a:prstGeom>
+          <a:noFill/>
+        </p:spPr>
+        <p:txBody>
+          <a:bodyPr wrap="square">
+            <a:spAutoFit/>
+          </a:bodyPr>
+          <a:lstStyle/>
+          <a:p>
+            <a:pPr>
+              <a:spcAft>
+                <a:spcPts val="594"/>
+              </a:spcAft>
+              <a:defRPr sz="1700" b="1">
+                <a:solidFill>
+                  <a:srgbClr val="F4F5F8"/>
+                </a:solidFill>
+                <a:latin typeface="Calibri"/>
+              </a:defRPr>
+            </a:pPr>
+            <a:r>
+              <a:t>recordDecision(BNB, Short, −25%)</a:t>
+            </a:r>
+          </a:p>
+        </p:txBody>
+      </p:sp>
+      <p:sp>
+        <p:nvSpPr>
+          <p:cNvPr id="20" name="TextBox 19"/>
+          <p:cNvSpPr txBox="1"/>
+          <p:nvPr/>
+        </p:nvSpPr>
+        <p:spPr>
+          <a:xfrm>
+            <a:off x="7223760" y="4123944"/>
+            <a:ext cx="4389120" cy="457200"/>
+          </a:xfrm>
+          <a:prstGeom prst="rect">
+            <a:avLst/>
+          </a:prstGeom>
+          <a:noFill/>
+        </p:spPr>
+        <p:txBody>
+          <a:bodyPr wrap="square">
+            <a:spAutoFit/>
+          </a:bodyPr>
+          <a:lstStyle/>
+          <a:p>
+            <a:pPr>
+              <a:spcAft>
+                <a:spcPts val="594"/>
+              </a:spcAft>
+              <a:defRPr sz="1700" b="0">
+                <a:solidFill>
+                  <a:srgbClr val="FB7185"/>
+                </a:solidFill>
+                <a:latin typeface="Calibri"/>
+              </a:defRPr>
+            </a:pPr>
+            <a:r>
+              <a:t>Halted event: only Flat allowed</a:t>
+            </a:r>
+          </a:p>
+        </p:txBody>
+      </p:sp>
+      <p:sp>
+        <p:nvSpPr>
+          <p:cNvPr id="21" name="TextBox 20"/>
+          <p:cNvSpPr txBox="1"/>
+          <p:nvPr/>
+        </p:nvSpPr>
+        <p:spPr>
+          <a:xfrm>
+            <a:off x="731520" y="4745736"/>
+            <a:ext cx="2103120" cy="457200"/>
+          </a:xfrm>
+          <a:prstGeom prst="rect">
+            <a:avLst/>
+          </a:prstGeom>
+          <a:noFill/>
+        </p:spPr>
+        <p:txBody>
+          <a:bodyPr wrap="square">
+            <a:spAutoFit/>
+          </a:bodyPr>
+          <a:lstStyle/>
+          <a:p>
+            <a:pPr>
+              <a:spcAft>
+                <a:spcPts val="594"/>
+              </a:spcAft>
+              <a:defRPr sz="1700" b="0">
+                <a:solidFill>
+                  <a:srgbClr val="F0B90B"/>
+                </a:solidFill>
+                <a:latin typeface="Calibri"/>
+              </a:defRPr>
+            </a:pPr>
+            <a:r>
+              <a:t>#134,042,318</a:t>
+            </a:r>
+          </a:p>
+        </p:txBody>
+      </p:sp>
+      <p:sp>
+        <p:nvSpPr>
+          <p:cNvPr id="22" name="TextBox 21"/>
+          <p:cNvSpPr txBox="1"/>
+          <p:nvPr/>
+        </p:nvSpPr>
+        <p:spPr>
+          <a:xfrm>
+            <a:off x="2926080" y="4745736"/>
+            <a:ext cx="4206240" cy="457200"/>
+          </a:xfrm>
+          <a:prstGeom prst="rect">
+            <a:avLst/>
+          </a:prstGeom>
+          <a:noFill/>
+        </p:spPr>
+        <p:txBody>
+          <a:bodyPr wrap="square">
+            <a:spAutoFit/>
+          </a:bodyPr>
+          <a:lstStyle/>
+          <a:p>
+            <a:pPr>
+              <a:spcAft>
+                <a:spcPts val="594"/>
+              </a:spcAft>
+              <a:defRPr sz="1700" b="0">
+                <a:solidFill>
+                  <a:srgbClr val="F4F5F8"/>
+                </a:solidFill>
+                <a:latin typeface="Calibri"/>
+              </a:defRPr>
+            </a:pPr>
+            <a:r>
+              <a:t>resume()</a:t>
+            </a:r>
+          </a:p>
+        </p:txBody>
+      </p:sp>
+      <p:sp>
+        <p:nvSpPr>
+          <p:cNvPr id="23" name="TextBox 22"/>
+          <p:cNvSpPr txBox="1"/>
+          <p:nvPr/>
+        </p:nvSpPr>
+        <p:spPr>
+          <a:xfrm>
+            <a:off x="7223760" y="4745736"/>
+            <a:ext cx="4389120" cy="457200"/>
+          </a:xfrm>
+          <a:prstGeom prst="rect">
+            <a:avLst/>
+          </a:prstGeom>
+          <a:noFill/>
+        </p:spPr>
+        <p:txBody>
+          <a:bodyPr wrap="square">
+            <a:spAutoFit/>
+          </a:bodyPr>
+          <a:lstStyle/>
+          <a:p>
+            <a:pPr>
+              <a:spcAft>
+                <a:spcPts val="594"/>
+              </a:spcAft>
+              <a:defRPr sz="1700" b="0">
+                <a:solidFill>
+                  <a:srgbClr val="A6ABB8"/>
+                </a:solidFill>
+                <a:latin typeface="Calibri"/>
+              </a:defRPr>
+            </a:pPr>
+            <a:r>
+              <a:t>Agent-only, on the record</a:t>
+            </a:r>
+          </a:p>
+        </p:txBody>
+      </p:sp>
+      <p:sp>
+        <p:nvSpPr>
+          <p:cNvPr id="24" name="TextBox 23"/>
+          <p:cNvSpPr txBox="1"/>
+          <p:nvPr/>
+        </p:nvSpPr>
+        <p:spPr>
+          <a:xfrm>
+            <a:off x="731520" y="5367528"/>
+            <a:ext cx="2103120" cy="457200"/>
+          </a:xfrm>
+          <a:prstGeom prst="rect">
+            <a:avLst/>
+          </a:prstGeom>
+          <a:noFill/>
+        </p:spPr>
+        <p:txBody>
+          <a:bodyPr wrap="square">
+            <a:spAutoFit/>
+          </a:bodyPr>
+          <a:lstStyle/>
+          <a:p>
+            <a:pPr>
+              <a:spcAft>
+                <a:spcPts val="594"/>
+              </a:spcAft>
+              <a:defRPr sz="1700" b="0">
+                <a:solidFill>
+                  <a:srgbClr val="F0B90B"/>
+                </a:solidFill>
+                <a:latin typeface="Calibri"/>
+              </a:defRPr>
+            </a:pPr>
+            <a:r>
+              <a:t>#134,042,328</a:t>
+            </a:r>
+          </a:p>
+        </p:txBody>
+      </p:sp>
+      <p:sp>
+        <p:nvSpPr>
+          <p:cNvPr id="25" name="TextBox 24"/>
+          <p:cNvSpPr txBox="1"/>
+          <p:nvPr/>
+        </p:nvSpPr>
+        <p:spPr>
+          <a:xfrm>
+            <a:off x="2926080" y="5367528"/>
+            <a:ext cx="4206240" cy="457200"/>
+          </a:xfrm>
+          <a:prstGeom prst="rect">
+            <a:avLst/>
+          </a:prstGeom>
+          <a:noFill/>
+        </p:spPr>
+        <p:txBody>
+          <a:bodyPr wrap="square">
+            <a:spAutoFit/>
+          </a:bodyPr>
+          <a:lstStyle/>
+          <a:p>
+            <a:pPr>
+              <a:spcAft>
+                <a:spcPts val="594"/>
+              </a:spcAft>
+              <a:defRPr sz="1700" b="0">
+                <a:solidFill>
+                  <a:srgbClr val="F4F5F8"/>
+                </a:solidFill>
+                <a:latin typeface="Calibri"/>
+              </a:defRPr>
+            </a:pPr>
+            <a:r>
+              <a:t>setRegime(Neutral)</a:t>
+            </a:r>
+          </a:p>
+        </p:txBody>
+      </p:sp>
+      <p:sp>
+        <p:nvSpPr>
+          <p:cNvPr id="26" name="TextBox 25"/>
+          <p:cNvSpPr txBox="1"/>
+          <p:nvPr/>
+        </p:nvSpPr>
+        <p:spPr>
+          <a:xfrm>
+            <a:off x="7223760" y="5367528"/>
+            <a:ext cx="4389120" cy="457200"/>
+          </a:xfrm>
+          <a:prstGeom prst="rect">
+            <a:avLst/>
+          </a:prstGeom>
+          <a:noFill/>
+        </p:spPr>
+        <p:txBody>
+          <a:bodyPr wrap="square">
+            <a:spAutoFit/>
+          </a:bodyPr>
+          <a:lstStyle/>
+          <a:p>
+            <a:pPr>
+              <a:spcAft>
+                <a:spcPts val="594"/>
+              </a:spcAft>
+              <a:defRPr sz="1700" b="0">
+                <a:solidFill>
+                  <a:srgbClr val="A6ABB8"/>
+                </a:solidFill>
+                <a:latin typeface="Calibri"/>
+              </a:defRPr>
+            </a:pPr>
+            <a:r>
+              <a:t>Long allowed again; 2 decisions on-chain</a:t>
+            </a:r>
+          </a:p>
+        </p:txBody>
+      </p:sp>
+      <p:sp>
+        <p:nvSpPr>
+          <p:cNvPr id="27" name="TextBox 26"/>
+          <p:cNvSpPr txBox="1"/>
+          <p:nvPr/>
+        </p:nvSpPr>
+        <p:spPr>
+          <a:xfrm>
+            <a:off x="640080" y="6172200"/>
+            <a:ext cx="10881360" cy="457200"/>
+          </a:xfrm>
+          <a:prstGeom prst="rect">
+            <a:avLst/>
+          </a:prstGeom>
+          <a:noFill/>
+        </p:spPr>
+        <p:txBody>
+          <a:bodyPr wrap="square">
+            <a:spAutoFit/>
+          </a:bodyPr>
+          <a:lstStyle/>
+          <a:p>
+            <a:pPr>
+              <a:spcAft>
+                <a:spcPts val="489"/>
+              </a:spcAft>
+              <a:defRPr sz="1400" b="0">
+                <a:solidFill>
+                  <a:srgbClr val="A6ABB8"/>
+                </a:solidFill>
+                <a:latin typeface="Calibri"/>
+              </a:defRPr>
+            </a:pPr>
+            <a:r>
+              <a:t>Every row is a transaction with receipt status 1 on BscScan · block 134,042,283 is the halt</a:t>
+            </a:r>
+          </a:p>
+        </p:txBody>
+      </p:sp>
+    </p:spTree>
+  </p:cSld>
+  <p:clrMapOvr>
+    <a:masterClrMapping/>
+  </p:clrMapOvr>
+</p:sld>
+</file>
+
+<file path=ppt/slides/slide7.xml><?xml version="1.0" encoding="utf-8"?>
+<p:sld xmlns:a="http://schemas.openxmlformats.org/drawingml/2006/main" xmlns:p="http://schemas.openxmlformats.org/presentationml/2006/main" xmlns:r="http://schemas.openxmlformats.org/officeDocument/2006/relationships">
+  <p:cSld>
+    <p:bg>
+      <p:bgPr>
+        <a:solidFill>
+          <a:srgbClr val="0B0C0F"/>
+        </a:solidFill>
+        <a:effectLst/>
+      </p:bgPr>
+    </p:bg>
+    <p:spTree>
+      <p:nvGrpSpPr>
+        <p:cNvPr id="1" name=""/>
+        <p:cNvGrpSpPr/>
+        <p:nvPr/>
+      </p:nvGrpSpPr>
+      <p:grpSpPr/>
+      <p:sp>
+        <p:nvSpPr>
+          <p:cNvPr id="2" name="TextBox 1"/>
+          <p:cNvSpPr txBox="1"/>
+          <p:nvPr/>
+        </p:nvSpPr>
+        <p:spPr>
+          <a:xfrm>
+            <a:off x="640080" y="365760"/>
+            <a:ext cx="10881360" cy="822960"/>
+          </a:xfrm>
+          <a:prstGeom prst="rect">
+            <a:avLst/>
+          </a:prstGeom>
+          <a:noFill/>
+        </p:spPr>
+        <p:txBody>
+          <a:bodyPr wrap="square">
+            <a:spAutoFit/>
+          </a:bodyPr>
+          <a:lstStyle/>
+          <a:p>
+            <a:pPr>
+              <a:spcAft>
+                <a:spcPts val="1260"/>
+              </a:spcAft>
+              <a:defRPr sz="3600" b="1">
+                <a:solidFill>
+                  <a:srgbClr val="F4F5F8"/>
+                </a:solidFill>
+                <a:latin typeface="Calibri"/>
+              </a:defRPr>
+            </a:pPr>
+            <a:r>
+              <a:t>Why BNB Chain</a:t>
             </a:r>
           </a:p>
         </p:txBody>
@@ -4651,8 +7052,8 @@
         </p:nvSpPr>
         <p:spPr>
           <a:xfrm>
-            <a:off x="640080" y="1554480"/>
-            <a:ext cx="3108960" cy="822960"/>
+            <a:off x="640080" y="1463040"/>
+            <a:ext cx="5394960" cy="822960"/>
           </a:xfrm>
           <a:prstGeom prst="rect">
             <a:avLst/>
@@ -4660,21 +7061,24 @@
           <a:noFill/>
         </p:spPr>
         <p:txBody>
-          <a:bodyPr wrap="none">
+          <a:bodyPr wrap="square">
             <a:spAutoFit/>
           </a:bodyPr>
           <a:lstStyle/>
           <a:p>
             <a:pPr>
-              <a:defRPr sz="4800" b="1">
-                <a:solidFill>
-                  <a:srgbClr val="78D5AB"/>
-                </a:solidFill>
-                <a:latin typeface="Calibri"/>
-              </a:defRPr>
-            </a:pPr>
-            <a:r>
-              <a:t>7 / 7</a:t>
+              <a:spcAft>
+                <a:spcPts val="1400"/>
+              </a:spcAft>
+              <a:defRPr sz="4000" b="1">
+                <a:solidFill>
+                  <a:srgbClr val="F0B90B"/>
+                </a:solidFill>
+                <a:latin typeface="Calibri"/>
+              </a:defRPr>
+            </a:pPr>
+            <a:r>
+              <a:t>≈ 0.0000034 tBNB</a:t>
             </a:r>
           </a:p>
         </p:txBody>
@@ -4687,8 +7091,8 @@
         </p:nvSpPr>
         <p:spPr>
           <a:xfrm>
-            <a:off x="640080" y="2377440"/>
-            <a:ext cx="5029200" cy="457200"/>
+            <a:off x="640080" y="2286000"/>
+            <a:ext cx="5394960" cy="1097280"/>
           </a:xfrm>
           <a:prstGeom prst="rect">
             <a:avLst/>
@@ -4696,13 +7100,16 @@
           <a:noFill/>
         </p:spPr>
         <p:txBody>
-          <a:bodyPr wrap="none">
+          <a:bodyPr wrap="square">
             <a:spAutoFit/>
           </a:bodyPr>
           <a:lstStyle/>
           <a:p>
             <a:pPr>
-              <a:defRPr sz="2000" b="0">
+              <a:spcAft>
+                <a:spcPts val="630"/>
+              </a:spcAft>
+              <a:defRPr sz="1800" b="0">
                 <a:solidFill>
                   <a:srgbClr val="F4F5F8"/>
                 </a:solidFill>
@@ -4710,7 +7117,23 @@
               </a:defRPr>
             </a:pPr>
             <a:r>
-              <a:t>contract tests passed (Foundry 1.5.1)</a:t>
+              <a:t>per recorded decision: 33,189–34,323 gas</a:t>
+            </a:r>
+          </a:p>
+          <a:p>
+            <a:pPr>
+              <a:spcAft>
+                <a:spcPts val="630"/>
+              </a:spcAft>
+              <a:defRPr sz="1800" b="0">
+                <a:solidFill>
+                  <a:srgbClr val="F4F5F8"/>
+                </a:solidFill>
+                <a:latin typeface="Calibri"/>
+              </a:defRPr>
+            </a:pPr>
+            <a:r>
+              <a:t>at 0.1 gwei (our receipts, BSC Testnet)</a:t>
             </a:r>
           </a:p>
         </p:txBody>
@@ -4723,8 +7146,8 @@
         </p:nvSpPr>
         <p:spPr>
           <a:xfrm>
-            <a:off x="6126480" y="1554480"/>
-            <a:ext cx="5394960" cy="731520"/>
+            <a:off x="640080" y="3657600"/>
+            <a:ext cx="5394960" cy="822960"/>
           </a:xfrm>
           <a:prstGeom prst="rect">
             <a:avLst/>
@@ -4732,21 +7155,24 @@
           <a:noFill/>
         </p:spPr>
         <p:txBody>
-          <a:bodyPr wrap="none">
+          <a:bodyPr wrap="square">
             <a:spAutoFit/>
           </a:bodyPr>
           <a:lstStyle/>
           <a:p>
             <a:pPr>
-              <a:defRPr sz="3200" b="1">
-                <a:solidFill>
-                  <a:srgbClr val="78D5AB"/>
-                </a:solidFill>
-                <a:latin typeface="Calibri"/>
-              </a:defRPr>
-            </a:pPr>
-            <a:r>
-              <a:t>DEPLOYED + SMOKE-TESTED</a:t>
+              <a:spcAft>
+                <a:spcPts val="1050"/>
+              </a:spcAft>
+              <a:defRPr sz="3000" b="1">
+                <a:solidFill>
+                  <a:srgbClr val="F0B90B"/>
+                </a:solidFill>
+                <a:latin typeface="Calibri"/>
+              </a:defRPr>
+            </a:pPr>
+            <a:r>
+              <a:t>≈ 0.00008 tBNB a day</a:t>
             </a:r>
           </a:p>
         </p:txBody>
@@ -4759,8 +7185,8 @@
         </p:nvSpPr>
         <p:spPr>
           <a:xfrm>
-            <a:off x="6126480" y="2377440"/>
-            <a:ext cx="5394960" cy="457200"/>
+            <a:off x="640080" y="4389120"/>
+            <a:ext cx="5394960" cy="914400"/>
           </a:xfrm>
           <a:prstGeom prst="rect">
             <a:avLst/>
@@ -4768,13 +7194,16 @@
           <a:noFill/>
         </p:spPr>
         <p:txBody>
-          <a:bodyPr wrap="none">
+          <a:bodyPr wrap="square">
             <a:spAutoFit/>
           </a:bodyPr>
           <a:lstStyle/>
           <a:p>
             <a:pPr>
-              <a:defRPr sz="2000" b="0">
+              <a:spcAft>
+                <a:spcPts val="630"/>
+              </a:spcAft>
+              <a:defRPr sz="1800" b="0">
                 <a:solidFill>
                   <a:srgbClr val="F4F5F8"/>
                 </a:solidFill>
@@ -4782,7 +7211,23 @@
               </a:defRPr>
             </a:pPr>
             <a:r>
-              <a:t>Dex contract: deploy + 5 smoke txs status 1; unauthorized call reverts</a:t>
+              <a:t>for an hourly bot (24 decisions);</a:t>
+            </a:r>
+          </a:p>
+          <a:p>
+            <a:pPr>
+              <a:spcAft>
+                <a:spcPts val="630"/>
+              </a:spcAft>
+              <a:defRPr sz="1800" b="0">
+                <a:solidFill>
+                  <a:srgbClr val="F4F5F8"/>
+                </a:solidFill>
+                <a:latin typeface="Calibri"/>
+              </a:defRPr>
+            </a:pPr>
+            <a:r>
+              <a:t>deploy: 449,207 gas ≈ 0.000045 tBNB</a:t>
             </a:r>
           </a:p>
         </p:txBody>
@@ -4795,8 +7240,8 @@
         </p:nvSpPr>
         <p:spPr>
           <a:xfrm>
-            <a:off x="640080" y="3566160"/>
-            <a:ext cx="10881360" cy="1188720"/>
+            <a:off x="6400800" y="1463040"/>
+            <a:ext cx="5120640" cy="548640"/>
           </a:xfrm>
           <a:prstGeom prst="rect">
             <a:avLst/>
@@ -4804,25 +7249,24 @@
           <a:noFill/>
         </p:spPr>
         <p:txBody>
-          <a:bodyPr wrap="none">
+          <a:bodyPr wrap="square">
             <a:spAutoFit/>
           </a:bodyPr>
           <a:lstStyle/>
           <a:p>
             <a:pPr>
-              <a:defRPr sz="2200" b="0">
-                <a:solidFill>
-                  <a:srgbClr val="F4F5F8"/>
-                </a:solidFill>
-                <a:latin typeface="Calibri"/>
-              </a:defRPr>
-            </a:pPr>
-            <a:r>
-              <a:t>Panel reads live Dex state (read 2 Oct 2026): Neutral, not halted, 20% limit, 2 decisions.</a:t>
-            </a:r>
-            <a:br/>
-            <a:r>
-              <a:t>Deploy + smoke receipts on BscScan testnet.</a:t>
+              <a:spcAft>
+                <a:spcPts val="839"/>
+              </a:spcAft>
+              <a:defRPr sz="2400" b="1">
+                <a:solidFill>
+                  <a:srgbClr val="AEB9F4"/>
+                </a:solidFill>
+                <a:latin typeface="Calibri"/>
+              </a:defRPr>
+            </a:pPr>
+            <a:r>
+              <a:t>What else it gives us</a:t>
             </a:r>
           </a:p>
         </p:txBody>
@@ -4835,8 +7279,8 @@
         </p:nvSpPr>
         <p:spPr>
           <a:xfrm>
-            <a:off x="640080" y="5212080"/>
-            <a:ext cx="10881360" cy="914400"/>
+            <a:off x="6400800" y="2194560"/>
+            <a:ext cx="5120640" cy="3291840"/>
           </a:xfrm>
           <a:prstGeom prst="rect">
             <a:avLst/>
@@ -4844,21 +7288,1050 @@
           <a:noFill/>
         </p:spPr>
         <p:txBody>
-          <a:bodyPr wrap="none">
+          <a:bodyPr wrap="square">
             <a:spAutoFit/>
           </a:bodyPr>
           <a:lstStyle/>
           <a:p>
             <a:pPr>
+              <a:spcAft>
+                <a:spcPts val="630"/>
+              </a:spcAft>
               <a:defRPr sz="1800" b="0">
                 <a:solidFill>
+                  <a:srgbClr val="F4F5F8"/>
+                </a:solidFill>
+                <a:latin typeface="Calibri"/>
+              </a:defRPr>
+            </a:pPr>
+            <a:r>
+              <a:t>EVM: Foundry tests and Sourcify verification on chain 97</a:t>
+            </a:r>
+          </a:p>
+          <a:p>
+            <a:pPr>
+              <a:spcAft>
+                <a:spcPts val="630"/>
+              </a:spcAft>
+              <a:defRPr sz="1800" b="0">
+                <a:solidFill>
+                  <a:srgbClr val="F4F5F8"/>
+                </a:solidFill>
+                <a:latin typeface="Calibri"/>
+              </a:defRPr>
+            </a:pPr>
+            <a:r>
+              <a:t>Public RPCs a browser can call: the panel needs no backend</a:t>
+            </a:r>
+          </a:p>
+          <a:p>
+            <a:pPr>
+              <a:spcAft>
+                <a:spcPts val="630"/>
+              </a:spcAft>
+              <a:defRPr sz="1800" b="0">
+                <a:solidFill>
+                  <a:srgbClr val="F4F5F8"/>
+                </a:solidFill>
+                <a:latin typeface="Calibri"/>
+              </a:defRPr>
+            </a:pPr>
+            <a:r>
+              <a:t>Five smoke-test transactions within 132 blocks</a:t>
+            </a:r>
+          </a:p>
+          <a:p>
+            <a:pPr>
+              <a:spcAft>
+                <a:spcPts val="630"/>
+              </a:spcAft>
+              <a:defRPr sz="1800" b="0">
+                <a:solidFill>
+                  <a:srgbClr val="F4F5F8"/>
+                </a:solidFill>
+                <a:latin typeface="Calibri"/>
+              </a:defRPr>
+            </a:pPr>
+            <a:r>
+              <a:t>Mainnet (chain 56) is a config switch; not deployed there</a:t>
+            </a:r>
+          </a:p>
+        </p:txBody>
+      </p:sp>
+      <p:sp>
+        <p:nvSpPr>
+          <p:cNvPr id="9" name="TextBox 8"/>
+          <p:cNvSpPr txBox="1"/>
+          <p:nvPr/>
+        </p:nvSpPr>
+        <p:spPr>
+          <a:xfrm>
+            <a:off x="640080" y="5943600"/>
+            <a:ext cx="10881360" cy="457200"/>
+          </a:xfrm>
+          <a:prstGeom prst="rect">
+            <a:avLst/>
+          </a:prstGeom>
+          <a:noFill/>
+        </p:spPr>
+        <p:txBody>
+          <a:bodyPr wrap="square">
+            <a:spAutoFit/>
+          </a:bodyPr>
+          <a:lstStyle/>
+          <a:p>
+            <a:pPr>
+              <a:spcAft>
+                <a:spcPts val="489"/>
+              </a:spcAft>
+              <a:defRPr sz="1400" b="0">
+                <a:solidFill>
+                  <a:srgbClr val="A6ABB8"/>
+                </a:solidFill>
+                <a:latin typeface="Calibri"/>
+              </a:defRPr>
+            </a:pPr>
+            <a:r>
+              <a:t>Testnet gas price, not a mainnet quote. Mainnet is on the roadmap, after an audit.</a:t>
+            </a:r>
+          </a:p>
+        </p:txBody>
+      </p:sp>
+    </p:spTree>
+  </p:cSld>
+  <p:clrMapOvr>
+    <a:masterClrMapping/>
+  </p:clrMapOvr>
+</p:sld>
+</file>
+
+<file path=ppt/slides/slide8.xml><?xml version="1.0" encoding="utf-8"?>
+<p:sld xmlns:a="http://schemas.openxmlformats.org/drawingml/2006/main" xmlns:p="http://schemas.openxmlformats.org/presentationml/2006/main" xmlns:r="http://schemas.openxmlformats.org/officeDocument/2006/relationships">
+  <p:cSld>
+    <p:bg>
+      <p:bgPr>
+        <a:solidFill>
+          <a:srgbClr val="0B0C0F"/>
+        </a:solidFill>
+        <a:effectLst/>
+      </p:bgPr>
+    </p:bg>
+    <p:spTree>
+      <p:nvGrpSpPr>
+        <p:cNvPr id="1" name=""/>
+        <p:cNvGrpSpPr/>
+        <p:nvPr/>
+      </p:nvGrpSpPr>
+      <p:grpSpPr/>
+      <p:sp>
+        <p:nvSpPr>
+          <p:cNvPr id="2" name="TextBox 1"/>
+          <p:cNvSpPr txBox="1"/>
+          <p:nvPr/>
+        </p:nvSpPr>
+        <p:spPr>
+          <a:xfrm>
+            <a:off x="640080" y="365760"/>
+            <a:ext cx="10881360" cy="822960"/>
+          </a:xfrm>
+          <a:prstGeom prst="rect">
+            <a:avLst/>
+          </a:prstGeom>
+          <a:noFill/>
+        </p:spPr>
+        <p:txBody>
+          <a:bodyPr wrap="square">
+            <a:spAutoFit/>
+          </a:bodyPr>
+          <a:lstStyle/>
+          <a:p>
+            <a:pPr>
+              <a:spcAft>
+                <a:spcPts val="1260"/>
+              </a:spcAft>
+              <a:defRPr sz="3600" b="1">
+                <a:solidFill>
+                  <a:srgbClr val="F4F5F8"/>
+                </a:solidFill>
+                <a:latin typeface="Calibri"/>
+              </a:defRPr>
+            </a:pPr>
+            <a:r>
+              <a:t>Evidence and current limits</a:t>
+            </a:r>
+          </a:p>
+        </p:txBody>
+      </p:sp>
+      <p:sp>
+        <p:nvSpPr>
+          <p:cNvPr id="3" name="TextBox 2"/>
+          <p:cNvSpPr txBox="1"/>
+          <p:nvPr/>
+        </p:nvSpPr>
+        <p:spPr>
+          <a:xfrm>
+            <a:off x="640080" y="1463040"/>
+            <a:ext cx="2743200" cy="731520"/>
+          </a:xfrm>
+          <a:prstGeom prst="rect">
+            <a:avLst/>
+          </a:prstGeom>
+          <a:noFill/>
+        </p:spPr>
+        <p:txBody>
+          <a:bodyPr wrap="square">
+            <a:spAutoFit/>
+          </a:bodyPr>
+          <a:lstStyle/>
+          <a:p>
+            <a:pPr>
+              <a:spcAft>
+                <a:spcPts val="1189"/>
+              </a:spcAft>
+              <a:defRPr sz="3400" b="1">
+                <a:solidFill>
+                  <a:srgbClr val="78D5AB"/>
+                </a:solidFill>
+                <a:latin typeface="Calibri"/>
+              </a:defRPr>
+            </a:pPr>
+            <a:r>
+              <a:t>30 / 30</a:t>
+            </a:r>
+          </a:p>
+        </p:txBody>
+      </p:sp>
+      <p:sp>
+        <p:nvSpPr>
+          <p:cNvPr id="4" name="TextBox 3"/>
+          <p:cNvSpPr txBox="1"/>
+          <p:nvPr/>
+        </p:nvSpPr>
+        <p:spPr>
+          <a:xfrm>
+            <a:off x="640080" y="2286000"/>
+            <a:ext cx="2743200" cy="1280160"/>
+          </a:xfrm>
+          <a:prstGeom prst="rect">
+            <a:avLst/>
+          </a:prstGeom>
+          <a:noFill/>
+        </p:spPr>
+        <p:txBody>
+          <a:bodyPr wrap="square">
+            <a:spAutoFit/>
+          </a:bodyPr>
+          <a:lstStyle/>
+          <a:p>
+            <a:pPr>
+              <a:spcAft>
+                <a:spcPts val="489"/>
+              </a:spcAft>
+              <a:defRPr sz="1400" b="0">
+                <a:solidFill>
+                  <a:srgbClr val="F4F5F8"/>
+                </a:solidFill>
+                <a:latin typeface="Calibri"/>
+              </a:defRPr>
+            </a:pPr>
+            <a:r>
+              <a:t>contract tests: unit, fuzz, invariant</a:t>
+            </a:r>
+          </a:p>
+          <a:p>
+            <a:pPr>
+              <a:spcAft>
+                <a:spcPts val="489"/>
+              </a:spcAft>
+              <a:defRPr sz="1400" b="0">
+                <a:solidFill>
+                  <a:srgbClr val="F4F5F8"/>
+                </a:solidFill>
+                <a:latin typeface="Calibri"/>
+              </a:defRPr>
+            </a:pPr>
+            <a:r>
+              <a:t>100% coverage of MacroGuard.sol</a:t>
+            </a:r>
+          </a:p>
+        </p:txBody>
+      </p:sp>
+      <p:sp>
+        <p:nvSpPr>
+          <p:cNvPr id="5" name="TextBox 4"/>
+          <p:cNvSpPr txBox="1"/>
+          <p:nvPr/>
+        </p:nvSpPr>
+        <p:spPr>
+          <a:xfrm>
+            <a:off x="3474720" y="1463040"/>
+            <a:ext cx="2743200" cy="731520"/>
+          </a:xfrm>
+          <a:prstGeom prst="rect">
+            <a:avLst/>
+          </a:prstGeom>
+          <a:noFill/>
+        </p:spPr>
+        <p:txBody>
+          <a:bodyPr wrap="square">
+            <a:spAutoFit/>
+          </a:bodyPr>
+          <a:lstStyle/>
+          <a:p>
+            <a:pPr>
+              <a:spcAft>
+                <a:spcPts val="1189"/>
+              </a:spcAft>
+              <a:defRPr sz="3400" b="1">
+                <a:solidFill>
+                  <a:srgbClr val="78D5AB"/>
+                </a:solidFill>
+                <a:latin typeface="Calibri"/>
+              </a:defRPr>
+            </a:pPr>
+            <a:r>
+              <a:t>45</a:t>
+            </a:r>
+          </a:p>
+        </p:txBody>
+      </p:sp>
+      <p:sp>
+        <p:nvSpPr>
+          <p:cNvPr id="6" name="TextBox 5"/>
+          <p:cNvSpPr txBox="1"/>
+          <p:nvPr/>
+        </p:nvSpPr>
+        <p:spPr>
+          <a:xfrm>
+            <a:off x="3474720" y="2286000"/>
+            <a:ext cx="2743200" cy="1280160"/>
+          </a:xfrm>
+          <a:prstGeom prst="rect">
+            <a:avLst/>
+          </a:prstGeom>
+          <a:noFill/>
+        </p:spPr>
+        <p:txBody>
+          <a:bodyPr wrap="square">
+            <a:spAutoFit/>
+          </a:bodyPr>
+          <a:lstStyle/>
+          <a:p>
+            <a:pPr>
+              <a:spcAft>
+                <a:spcPts val="489"/>
+              </a:spcAft>
+              <a:defRPr sz="1400" b="0">
+                <a:solidFill>
+                  <a:srgbClr val="F4F5F8"/>
+                </a:solidFill>
+                <a:latin typeface="Calibri"/>
+              </a:defRPr>
+            </a:pPr>
+            <a:r>
+              <a:t>offline engine tests;</a:t>
+            </a:r>
+          </a:p>
+          <a:p>
+            <a:pPr>
+              <a:spcAft>
+                <a:spcPts val="489"/>
+              </a:spcAft>
+              <a:defRPr sz="1400" b="0">
+                <a:solidFill>
+                  <a:srgbClr val="F4F5F8"/>
+                </a:solidFill>
+                <a:latin typeface="Calibri"/>
+              </a:defRPr>
+            </a:pPr>
+            <a:r>
+              <a:t>no look-ahead tested as a property</a:t>
+            </a:r>
+          </a:p>
+        </p:txBody>
+      </p:sp>
+      <p:sp>
+        <p:nvSpPr>
+          <p:cNvPr id="7" name="TextBox 6"/>
+          <p:cNvSpPr txBox="1"/>
+          <p:nvPr/>
+        </p:nvSpPr>
+        <p:spPr>
+          <a:xfrm>
+            <a:off x="6309360" y="1463040"/>
+            <a:ext cx="2743200" cy="731520"/>
+          </a:xfrm>
+          <a:prstGeom prst="rect">
+            <a:avLst/>
+          </a:prstGeom>
+          <a:noFill/>
+        </p:spPr>
+        <p:txBody>
+          <a:bodyPr wrap="square">
+            <a:spAutoFit/>
+          </a:bodyPr>
+          <a:lstStyle/>
+          <a:p>
+            <a:pPr>
+              <a:spcAft>
+                <a:spcPts val="1189"/>
+              </a:spcAft>
+              <a:defRPr sz="3400" b="1">
+                <a:solidFill>
+                  <a:srgbClr val="78D5AB"/>
+                </a:solidFill>
+                <a:latin typeface="Calibri"/>
+              </a:defRPr>
+            </a:pPr>
+            <a:r>
+              <a:t>15</a:t>
+            </a:r>
+          </a:p>
+        </p:txBody>
+      </p:sp>
+      <p:sp>
+        <p:nvSpPr>
+          <p:cNvPr id="8" name="TextBox 7"/>
+          <p:cNvSpPr txBox="1"/>
+          <p:nvPr/>
+        </p:nvSpPr>
+        <p:spPr>
+          <a:xfrm>
+            <a:off x="6309360" y="2286000"/>
+            <a:ext cx="2743200" cy="1280160"/>
+          </a:xfrm>
+          <a:prstGeom prst="rect">
+            <a:avLst/>
+          </a:prstGeom>
+          <a:noFill/>
+        </p:spPr>
+        <p:txBody>
+          <a:bodyPr wrap="square">
+            <a:spAutoFit/>
+          </a:bodyPr>
+          <a:lstStyle/>
+          <a:p>
+            <a:pPr>
+              <a:spcAft>
+                <a:spcPts val="489"/>
+              </a:spcAft>
+              <a:defRPr sz="1400" b="0">
+                <a:solidFill>
+                  <a:srgbClr val="F4F5F8"/>
+                </a:solidFill>
+                <a:latin typeface="Calibri"/>
+              </a:defRPr>
+            </a:pPr>
+            <a:r>
+              <a:t>web tests: contract reads and the</a:t>
+            </a:r>
+          </a:p>
+          <a:p>
+            <a:pPr>
+              <a:spcAft>
+                <a:spcPts val="489"/>
+              </a:spcAft>
+              <a:defRPr sz="1400" b="0">
+                <a:solidFill>
+                  <a:srgbClr val="F4F5F8"/>
+                </a:solidFill>
+                <a:latin typeface="Calibri"/>
+              </a:defRPr>
+            </a:pPr>
+            <a:r>
+              <a:t>what-if encoder against cast</a:t>
+            </a:r>
+          </a:p>
+        </p:txBody>
+      </p:sp>
+      <p:sp>
+        <p:nvSpPr>
+          <p:cNvPr id="9" name="TextBox 8"/>
+          <p:cNvSpPr txBox="1"/>
+          <p:nvPr/>
+        </p:nvSpPr>
+        <p:spPr>
+          <a:xfrm>
+            <a:off x="9144000" y="1463040"/>
+            <a:ext cx="2743200" cy="731520"/>
+          </a:xfrm>
+          <a:prstGeom prst="rect">
+            <a:avLst/>
+          </a:prstGeom>
+          <a:noFill/>
+        </p:spPr>
+        <p:txBody>
+          <a:bodyPr wrap="square">
+            <a:spAutoFit/>
+          </a:bodyPr>
+          <a:lstStyle/>
+          <a:p>
+            <a:pPr>
+              <a:spcAft>
+                <a:spcPts val="1189"/>
+              </a:spcAft>
+              <a:defRPr sz="3400" b="1">
+                <a:solidFill>
+                  <a:srgbClr val="F0B90B"/>
+                </a:solidFill>
+                <a:latin typeface="Calibri"/>
+              </a:defRPr>
+            </a:pPr>
+            <a:r>
+              <a:t>exact match</a:t>
+            </a:r>
+          </a:p>
+        </p:txBody>
+      </p:sp>
+      <p:sp>
+        <p:nvSpPr>
+          <p:cNvPr id="10" name="TextBox 9"/>
+          <p:cNvSpPr txBox="1"/>
+          <p:nvPr/>
+        </p:nvSpPr>
+        <p:spPr>
+          <a:xfrm>
+            <a:off x="9144000" y="2286000"/>
+            <a:ext cx="2743200" cy="1280160"/>
+          </a:xfrm>
+          <a:prstGeom prst="rect">
+            <a:avLst/>
+          </a:prstGeom>
+          <a:noFill/>
+        </p:spPr>
+        <p:txBody>
+          <a:bodyPr wrap="square">
+            <a:spAutoFit/>
+          </a:bodyPr>
+          <a:lstStyle/>
+          <a:p>
+            <a:pPr>
+              <a:spcAft>
+                <a:spcPts val="489"/>
+              </a:spcAft>
+              <a:defRPr sz="1400" b="0">
+                <a:solidFill>
+                  <a:srgbClr val="F4F5F8"/>
+                </a:solidFill>
+                <a:latin typeface="Calibri"/>
+              </a:defRPr>
+            </a:pPr>
+            <a:r>
+              <a:t>source verified on Sourcify</a:t>
+            </a:r>
+          </a:p>
+          <a:p>
+            <a:pPr>
+              <a:spcAft>
+                <a:spcPts val="489"/>
+              </a:spcAft>
+              <a:defRPr sz="1400" b="0">
+                <a:solidFill>
+                  <a:srgbClr val="F4F5F8"/>
+                </a:solidFill>
+                <a:latin typeface="Calibri"/>
+              </a:defRPr>
+            </a:pPr>
+            <a:r>
+              <a:t>6 receipts, all status 1</a:t>
+            </a:r>
+          </a:p>
+        </p:txBody>
+      </p:sp>
+      <p:sp>
+        <p:nvSpPr>
+          <p:cNvPr id="11" name="TextBox 10"/>
+          <p:cNvSpPr txBox="1"/>
+          <p:nvPr/>
+        </p:nvSpPr>
+        <p:spPr>
+          <a:xfrm>
+            <a:off x="640080" y="4023360"/>
+            <a:ext cx="10881360" cy="548640"/>
+          </a:xfrm>
+          <a:prstGeom prst="rect">
+            <a:avLst/>
+          </a:prstGeom>
+          <a:noFill/>
+        </p:spPr>
+        <p:txBody>
+          <a:bodyPr wrap="square">
+            <a:spAutoFit/>
+          </a:bodyPr>
+          <a:lstStyle/>
+          <a:p>
+            <a:pPr>
+              <a:spcAft>
+                <a:spcPts val="769"/>
+              </a:spcAft>
+              <a:defRPr sz="2200" b="1">
+                <a:solidFill>
                   <a:srgbClr val="E5BD71"/>
                 </a:solidFill>
                 <a:latin typeface="Calibri"/>
               </a:defRPr>
             </a:pPr>
             <a:r>
-              <a:t>Limits: contract never executes orders; RPC fail-open in runner; agent can resume(); no live bot tick or profit verified.</a:t>
+              <a:t>Limits, said plainly</a:t>
+            </a:r>
+          </a:p>
+        </p:txBody>
+      </p:sp>
+      <p:sp>
+        <p:nvSpPr>
+          <p:cNvPr id="12" name="TextBox 11"/>
+          <p:cNvSpPr txBox="1"/>
+          <p:nvPr/>
+        </p:nvSpPr>
+        <p:spPr>
+          <a:xfrm>
+            <a:off x="640080" y="4572000"/>
+            <a:ext cx="10881360" cy="1737360"/>
+          </a:xfrm>
+          <a:prstGeom prst="rect">
+            <a:avLst/>
+          </a:prstGeom>
+          <a:noFill/>
+        </p:spPr>
+        <p:txBody>
+          <a:bodyPr wrap="square">
+            <a:spAutoFit/>
+          </a:bodyPr>
+          <a:lstStyle/>
+          <a:p>
+            <a:pPr>
+              <a:spcAft>
+                <a:spcPts val="560"/>
+              </a:spcAft>
+              <a:defRPr sz="1600" b="0">
+                <a:solidFill>
+                  <a:srgbClr val="F4F5F8"/>
+                </a:solidFill>
+                <a:latin typeface="Calibri"/>
+              </a:defRPr>
+            </a:pPr>
+            <a:r>
+              <a:t>The contract never executes orders · the runner fails open if the RPC is down · the agent can resume() at once</a:t>
+            </a:r>
+          </a:p>
+          <a:p>
+            <a:pPr>
+              <a:spcAft>
+                <a:spcPts val="560"/>
+              </a:spcAft>
+              <a:defRPr sz="1600" b="0">
+                <a:solidFill>
+                  <a:srgbClr val="F4F5F8"/>
+                </a:solidFill>
+                <a:latin typeface="Calibri"/>
+              </a:defRPr>
+            </a:pPr>
+            <a:r>
+              <a:t>The drawdown is reported by the agent · no live bot tick and no profit claimed; backtests are research</a:t>
+            </a:r>
+          </a:p>
+        </p:txBody>
+      </p:sp>
+    </p:spTree>
+  </p:cSld>
+  <p:clrMapOvr>
+    <a:masterClrMapping/>
+  </p:clrMapOvr>
+</p:sld>
+</file>
+
+<file path=ppt/slides/slide9.xml><?xml version="1.0" encoding="utf-8"?>
+<p:sld xmlns:a="http://schemas.openxmlformats.org/drawingml/2006/main" xmlns:p="http://schemas.openxmlformats.org/presentationml/2006/main" xmlns:r="http://schemas.openxmlformats.org/officeDocument/2006/relationships">
+  <p:cSld>
+    <p:bg>
+      <p:bgPr>
+        <a:solidFill>
+          <a:srgbClr val="0B0C0F"/>
+        </a:solidFill>
+        <a:effectLst/>
+      </p:bgPr>
+    </p:bg>
+    <p:spTree>
+      <p:nvGrpSpPr>
+        <p:cNvPr id="1" name=""/>
+        <p:cNvGrpSpPr/>
+        <p:nvPr/>
+      </p:nvGrpSpPr>
+      <p:grpSpPr/>
+      <p:sp>
+        <p:nvSpPr>
+          <p:cNvPr id="2" name="TextBox 1"/>
+          <p:cNvSpPr txBox="1"/>
+          <p:nvPr/>
+        </p:nvSpPr>
+        <p:spPr>
+          <a:xfrm>
+            <a:off x="640080" y="365760"/>
+            <a:ext cx="10881360" cy="822960"/>
+          </a:xfrm>
+          <a:prstGeom prst="rect">
+            <a:avLst/>
+          </a:prstGeom>
+          <a:noFill/>
+        </p:spPr>
+        <p:txBody>
+          <a:bodyPr wrap="square">
+            <a:spAutoFit/>
+          </a:bodyPr>
+          <a:lstStyle/>
+          <a:p>
+            <a:pPr>
+              <a:spcAft>
+                <a:spcPts val="1260"/>
+              </a:spcAft>
+              <a:defRPr sz="3600" b="1">
+                <a:solidFill>
+                  <a:srgbClr val="F4F5F8"/>
+                </a:solidFill>
+                <a:latin typeface="Calibri"/>
+              </a:defRPr>
+            </a:pPr>
+            <a:r>
+              <a:t>What Dex added</a:t>
+            </a:r>
+          </a:p>
+        </p:txBody>
+      </p:sp>
+      <p:sp>
+        <p:nvSpPr>
+          <p:cNvPr id="3" name="TextBox 2"/>
+          <p:cNvSpPr txBox="1"/>
+          <p:nvPr/>
+        </p:nvSpPr>
+        <p:spPr>
+          <a:xfrm>
+            <a:off x="640080" y="1371600"/>
+            <a:ext cx="4754880" cy="640080"/>
+          </a:xfrm>
+          <a:prstGeom prst="rect">
+            <a:avLst/>
+          </a:prstGeom>
+          <a:noFill/>
+        </p:spPr>
+        <p:txBody>
+          <a:bodyPr wrap="square">
+            <a:spAutoFit/>
+          </a:bodyPr>
+          <a:lstStyle/>
+          <a:p>
+            <a:pPr>
+              <a:spcAft>
+                <a:spcPts val="839"/>
+              </a:spcAft>
+              <a:defRPr sz="2400" b="1">
+                <a:solidFill>
+                  <a:srgbClr val="A6ABB8"/>
+                </a:solidFill>
+                <a:latin typeface="Calibri"/>
+              </a:defRPr>
+            </a:pPr>
+            <a:r>
+              <a:t>Upstream DRIFT project</a:t>
+            </a:r>
+          </a:p>
+        </p:txBody>
+      </p:sp>
+      <p:sp>
+        <p:nvSpPr>
+          <p:cNvPr id="4" name="TextBox 3"/>
+          <p:cNvSpPr txBox="1"/>
+          <p:nvPr/>
+        </p:nvSpPr>
+        <p:spPr>
+          <a:xfrm>
+            <a:off x="640080" y="2103120"/>
+            <a:ext cx="5029200" cy="2560320"/>
+          </a:xfrm>
+          <a:prstGeom prst="rect">
+            <a:avLst/>
+          </a:prstGeom>
+          <a:noFill/>
+        </p:spPr>
+        <p:txBody>
+          <a:bodyPr wrap="square">
+            <a:spAutoFit/>
+          </a:bodyPr>
+          <a:lstStyle/>
+          <a:p>
+            <a:pPr>
+              <a:spcAft>
+                <a:spcPts val="630"/>
+              </a:spcAft>
+              <a:defRPr sz="1800" b="0">
+                <a:solidFill>
+                  <a:srgbClr val="F4F5F8"/>
+                </a:solidFill>
+                <a:latin typeface="Calibri"/>
+              </a:defRPr>
+            </a:pPr>
+            <a:r>
+              <a:t>Quant engine, cockpit and MacroGuard.sol</a:t>
+            </a:r>
+          </a:p>
+          <a:p>
+            <a:pPr>
+              <a:spcAft>
+                <a:spcPts val="630"/>
+              </a:spcAft>
+              <a:defRPr sz="1800" b="0">
+                <a:solidFill>
+                  <a:srgbClr val="F4F5F8"/>
+                </a:solidFill>
+                <a:latin typeface="Calibri"/>
+              </a:defRPr>
+            </a:pPr>
+            <a:r>
+              <a:t>Built for a Mantle hackathon track (June 2026)</a:t>
+            </a:r>
+          </a:p>
+          <a:p>
+            <a:pPr>
+              <a:spcAft>
+                <a:spcPts val="630"/>
+              </a:spcAft>
+              <a:defRPr sz="1800" b="0">
+                <a:solidFill>
+                  <a:srgbClr val="F4F5F8"/>
+                </a:solidFill>
+                <a:latin typeface="Calibri"/>
+              </a:defRPr>
+            </a:pPr>
+            <a:r>
+              <a:t>Migrated to BNB Chain in bcc-ukdw/seed-bnb</a:t>
+            </a:r>
+          </a:p>
+          <a:p>
+            <a:pPr>
+              <a:spcAft>
+                <a:spcPts val="630"/>
+              </a:spcAft>
+              <a:defRPr sz="1800" b="0">
+                <a:solidFill>
+                  <a:srgbClr val="F4F5F8"/>
+                </a:solidFill>
+                <a:latin typeface="Calibri"/>
+              </a:defRPr>
+            </a:pPr>
+            <a:r>
+              <a:t>(commit 52671ce, 29 Sep 2026)</a:t>
+            </a:r>
+          </a:p>
+        </p:txBody>
+      </p:sp>
+      <p:sp>
+        <p:nvSpPr>
+          <p:cNvPr id="5" name="TextBox 4"/>
+          <p:cNvSpPr txBox="1"/>
+          <p:nvPr/>
+        </p:nvSpPr>
+        <p:spPr>
+          <a:xfrm>
+            <a:off x="6035040" y="1371600"/>
+            <a:ext cx="5486400" cy="640080"/>
+          </a:xfrm>
+          <a:prstGeom prst="rect">
+            <a:avLst/>
+          </a:prstGeom>
+          <a:noFill/>
+        </p:spPr>
+        <p:txBody>
+          <a:bodyPr wrap="square">
+            <a:spAutoFit/>
+          </a:bodyPr>
+          <a:lstStyle/>
+          <a:p>
+            <a:pPr>
+              <a:spcAft>
+                <a:spcPts val="839"/>
+              </a:spcAft>
+              <a:defRPr sz="2400" b="1">
+                <a:solidFill>
+                  <a:srgbClr val="F0B90B"/>
+                </a:solidFill>
+                <a:latin typeface="Calibri"/>
+              </a:defRPr>
+            </a:pPr>
+            <a:r>
+              <a:t>Dex's work in this fork</a:t>
+            </a:r>
+          </a:p>
+        </p:txBody>
+      </p:sp>
+      <p:sp>
+        <p:nvSpPr>
+          <p:cNvPr id="6" name="TextBox 5"/>
+          <p:cNvSpPr txBox="1"/>
+          <p:nvPr/>
+        </p:nvSpPr>
+        <p:spPr>
+          <a:xfrm>
+            <a:off x="6035040" y="2103120"/>
+            <a:ext cx="5486400" cy="3657600"/>
+          </a:xfrm>
+          <a:prstGeom prst="rect">
+            <a:avLst/>
+          </a:prstGeom>
+          <a:noFill/>
+        </p:spPr>
+        <p:txBody>
+          <a:bodyPr wrap="square">
+            <a:spAutoFit/>
+          </a:bodyPr>
+          <a:lstStyle/>
+          <a:p>
+            <a:pPr>
+              <a:spcAft>
+                <a:spcPts val="594"/>
+              </a:spcAft>
+              <a:defRPr sz="1700" b="0">
+                <a:solidFill>
+                  <a:srgbClr val="F4F5F8"/>
+                </a:solidFill>
+                <a:latin typeface="Calibri"/>
+              </a:defRPr>
+            </a:pPr>
+            <a:r>
+              <a:t>Own BSC Testnet deploy + 5-tx smoke test (status 1)</a:t>
+            </a:r>
+          </a:p>
+          <a:p>
+            <a:pPr>
+              <a:spcAft>
+                <a:spcPts val="594"/>
+              </a:spcAft>
+              <a:defRPr sz="1700" b="0">
+                <a:solidFill>
+                  <a:srgbClr val="F4F5F8"/>
+                </a:solidFill>
+                <a:latin typeface="Calibri"/>
+              </a:defRPr>
+            </a:pPr>
+            <a:r>
+              <a:t>Source verified on Sourcify (exact match)</a:t>
+            </a:r>
+          </a:p>
+          <a:p>
+            <a:pPr>
+              <a:spcAft>
+                <a:spcPts val="594"/>
+              </a:spcAft>
+              <a:defRPr sz="1700" b="0">
+                <a:solidFill>
+                  <a:srgbClr val="F4F5F8"/>
+                </a:solidFill>
+                <a:latin typeface="Calibri"/>
+              </a:defRPr>
+            </a:pPr>
+            <a:r>
+              <a:t>Public panel: live browser reads, receipts, limits</a:t>
+            </a:r>
+          </a:p>
+          <a:p>
+            <a:pPr>
+              <a:spcAft>
+                <a:spcPts val="594"/>
+              </a:spcAft>
+              <a:defRPr sz="1700" b="0">
+                <a:solidFill>
+                  <a:srgbClr val="F4F5F8"/>
+                </a:solidFill>
+                <a:latin typeface="Calibri"/>
+              </a:defRPr>
+            </a:pPr>
+            <a:r>
+              <a:t>Ask the contract: eth_call what-if, nothing signed</a:t>
+            </a:r>
+          </a:p>
+          <a:p>
+            <a:pPr>
+              <a:spcAft>
+                <a:spcPts val="594"/>
+              </a:spcAft>
+              <a:defRPr sz="1700" b="0">
+                <a:solidFill>
+                  <a:srgbClr val="F4F5F8"/>
+                </a:solidFill>
+                <a:latin typeface="Calibri"/>
+              </a:defRPr>
+            </a:pPr>
+            <a:r>
+              <a:t>23 contract + 45 engine + 8 web tests, CI</a:t>
+            </a:r>
+          </a:p>
+          <a:p>
+            <a:pPr>
+              <a:spcAft>
+                <a:spcPts val="594"/>
+              </a:spcAft>
+              <a:defRPr sz="1700" b="0">
+                <a:solidFill>
+                  <a:srgbClr val="F4F5F8"/>
+                </a:solidFill>
+                <a:latin typeface="Calibri"/>
+              </a:defRPr>
+            </a:pPr>
+            <a:r>
+              <a:t>Labelled Binance data fallback · threat model</a:t>
+            </a:r>
+          </a:p>
+          <a:p>
+            <a:pPr>
+              <a:spcAft>
+                <a:spcPts val="594"/>
+              </a:spcAft>
+              <a:defRPr sz="1700" b="0">
+                <a:solidFill>
+                  <a:srgbClr val="F4F5F8"/>
+                </a:solidFill>
+                <a:latin typeface="Calibri"/>
+              </a:defRPr>
+            </a:pPr>
+            <a:r>
+              <a:t>Landing, visual system, PRD, this deck</a:t>
+            </a:r>
+          </a:p>
+        </p:txBody>
+      </p:sp>
+      <p:sp>
+        <p:nvSpPr>
+          <p:cNvPr id="7" name="TextBox 6"/>
+          <p:cNvSpPr txBox="1"/>
+          <p:nvPr/>
+        </p:nvSpPr>
+        <p:spPr>
+          <a:xfrm>
+            <a:off x="640080" y="5852160"/>
+            <a:ext cx="10881360" cy="457200"/>
+          </a:xfrm>
+          <a:prstGeom prst="rect">
+            <a:avLst/>
+          </a:prstGeom>
+          <a:noFill/>
+        </p:spPr>
+        <p:txBody>
+          <a:bodyPr wrap="square">
+            <a:spAutoFit/>
+          </a:bodyPr>
+          <a:lstStyle/>
+          <a:p>
+            <a:pPr>
+              <a:spcAft>
+                <a:spcPts val="560"/>
+              </a:spcAft>
+              <a:defRPr sz="1600" b="0">
+                <a:solidFill>
+                  <a:srgbClr val="AEB9F4"/>
+                </a:solidFill>
+                <a:latin typeface="Calibri"/>
+              </a:defRPr>
+            </a:pPr>
+            <a:r>
+              <a:t>Code: github.com/Stylenecy/seed-bnb/tree/dex/drift/drift</a:t>
             </a:r>
           </a:p>
         </p:txBody>

--- a/docs/submission/DRIFT-pitch.pptx
+++ b/docs/submission/DRIFT-pitch.pptx
@@ -4183,7 +4183,7 @@
               </a:spcAft>
               <a:defRPr sz="6000" b="1">
                 <a:solidFill>
-                  <a:srgbClr val="F0B90B"/>
+                  <a:srgbClr val="FFFFFF"/>
                 </a:solidFill>
                 <a:latin typeface="Calibri"/>
               </a:defRPr>
@@ -4222,7 +4222,7 @@
               </a:spcAft>
               <a:defRPr sz="3400" b="1">
                 <a:solidFill>
-                  <a:srgbClr val="F4F5F8"/>
+                  <a:srgbClr val="FFFFFF"/>
                 </a:solidFill>
                 <a:latin typeface="Calibri"/>
               </a:defRPr>
@@ -4261,7 +4261,7 @@
               </a:spcAft>
               <a:defRPr sz="2200" b="0">
                 <a:solidFill>
-                  <a:srgbClr val="A6ABB8"/>
+                  <a:srgbClr val="AAAAAB"/>
                 </a:solidFill>
                 <a:latin typeface="Calibri"/>
               </a:defRPr>
@@ -4296,17 +4296,17 @@
           <a:p>
             <a:pPr>
               <a:spcAft>
-                <a:spcPts val="630"/>
-              </a:spcAft>
-              <a:defRPr sz="1800" b="0">
-                <a:solidFill>
-                  <a:srgbClr val="F4F5F8"/>
-                </a:solidFill>
-                <a:latin typeface="Calibri"/>
-              </a:defRPr>
-            </a:pPr>
-            <a:r>
-              <a:t>Live: drift-macroguard.vercel.app/macroguard</a:t>
+                <a:spcPts val="560"/>
+              </a:spcAft>
+              <a:defRPr sz="1600" b="0">
+                <a:solidFill>
+                  <a:srgbClr val="AAAAAB"/>
+                </a:solidFill>
+                <a:latin typeface="Calibri"/>
+              </a:defRPr>
+            </a:pPr>
+            <a:r>
+              <a:t>Live demo</a:t>
             </a:r>
           </a:p>
         </p:txBody>
@@ -4319,7 +4319,7 @@
         </p:nvSpPr>
         <p:spPr>
           <a:xfrm>
-            <a:off x="640080" y="4754880"/>
+            <a:off x="640080" y="4572000"/>
             <a:ext cx="10881360" cy="457200"/>
           </a:xfrm>
           <a:prstGeom prst="rect">
@@ -4335,17 +4335,17 @@
           <a:p>
             <a:pPr>
               <a:spcAft>
-                <a:spcPts val="560"/>
-              </a:spcAft>
-              <a:defRPr sz="1600" b="0">
-                <a:solidFill>
-                  <a:srgbClr val="F0B90B"/>
-                </a:solidFill>
-                <a:latin typeface="Calibri"/>
-              </a:defRPr>
-            </a:pPr>
-            <a:r>
-              <a:t>Dex contract (BSC Testnet): 0x8b09ebB85Be8Ed55Bb5132d29eABc567c42aa83D</a:t>
+                <a:spcPts val="630"/>
+              </a:spcAft>
+              <a:defRPr sz="1800" b="0">
+                <a:solidFill>
+                  <a:srgbClr val="FFFFFF"/>
+                </a:solidFill>
+                <a:latin typeface="Consolas"/>
+              </a:defRPr>
+            </a:pPr>
+            <a:r>
+              <a:t>drift-macroguard.vercel.app/macroguard</a:t>
             </a:r>
           </a:p>
         </p:txBody>
@@ -4358,7 +4358,7 @@
         </p:nvSpPr>
         <p:spPr>
           <a:xfrm>
-            <a:off x="640080" y="5852160"/>
+            <a:off x="640080" y="5120640"/>
             <a:ext cx="10881360" cy="457200"/>
           </a:xfrm>
           <a:prstGeom prst="rect">
@@ -4374,11 +4374,89 @@
           <a:p>
             <a:pPr>
               <a:spcAft>
+                <a:spcPts val="560"/>
+              </a:spcAft>
+              <a:defRPr sz="1600" b="0">
+                <a:solidFill>
+                  <a:srgbClr val="AAAAAB"/>
+                </a:solidFill>
+                <a:latin typeface="Calibri"/>
+              </a:defRPr>
+            </a:pPr>
+            <a:r>
+              <a:t>Dex's contract on BSC Testnet</a:t>
+            </a:r>
+          </a:p>
+        </p:txBody>
+      </p:sp>
+      <p:sp>
+        <p:nvSpPr>
+          <p:cNvPr id="8" name="TextBox 7"/>
+          <p:cNvSpPr txBox="1"/>
+          <p:nvPr/>
+        </p:nvSpPr>
+        <p:spPr>
+          <a:xfrm>
+            <a:off x="640080" y="5486400"/>
+            <a:ext cx="10881360" cy="457200"/>
+          </a:xfrm>
+          <a:prstGeom prst="rect">
+            <a:avLst/>
+          </a:prstGeom>
+          <a:noFill/>
+        </p:spPr>
+        <p:txBody>
+          <a:bodyPr wrap="square">
+            <a:spAutoFit/>
+          </a:bodyPr>
+          <a:lstStyle/>
+          <a:p>
+            <a:pPr>
+              <a:spcAft>
                 <a:spcPts val="630"/>
               </a:spcAft>
               <a:defRPr sz="1800" b="0">
                 <a:solidFill>
-                  <a:srgbClr val="A6ABB8"/>
+                  <a:srgbClr val="F0B90B"/>
+                </a:solidFill>
+                <a:latin typeface="Consolas"/>
+              </a:defRPr>
+            </a:pPr>
+            <a:r>
+              <a:t>0x8b09ebB85Be8Ed55Bb5132d29eABc567c42aa83D</a:t>
+            </a:r>
+          </a:p>
+        </p:txBody>
+      </p:sp>
+      <p:sp>
+        <p:nvSpPr>
+          <p:cNvPr id="9" name="TextBox 8"/>
+          <p:cNvSpPr txBox="1"/>
+          <p:nvPr/>
+        </p:nvSpPr>
+        <p:spPr>
+          <a:xfrm>
+            <a:off x="640080" y="6172200"/>
+            <a:ext cx="10881360" cy="457200"/>
+          </a:xfrm>
+          <a:prstGeom prst="rect">
+            <a:avLst/>
+          </a:prstGeom>
+          <a:noFill/>
+        </p:spPr>
+        <p:txBody>
+          <a:bodyPr wrap="square">
+            <a:spAutoFit/>
+          </a:bodyPr>
+          <a:lstStyle/>
+          <a:p>
+            <a:pPr>
+              <a:spcAft>
+                <a:spcPts val="560"/>
+              </a:spcAft>
+              <a:defRPr sz="1600" b="0">
+                <a:solidFill>
+                  <a:srgbClr val="AAAAAB"/>
                 </a:solidFill>
                 <a:latin typeface="Calibri"/>
               </a:defRPr>
@@ -4443,7 +4521,7 @@
               </a:spcAft>
               <a:defRPr sz="3600" b="1">
                 <a:solidFill>
-                  <a:srgbClr val="F4F5F8"/>
+                  <a:srgbClr val="FFFFFF"/>
                 </a:solidFill>
                 <a:latin typeface="Calibri"/>
               </a:defRPr>
@@ -4482,7 +4560,7 @@
               </a:spcAft>
               <a:defRPr sz="1500" b="1">
                 <a:solidFill>
-                  <a:srgbClr val="E5BD71"/>
+                  <a:srgbClr val="FBBF24"/>
                 </a:solidFill>
                 <a:latin typeface="Calibri"/>
               </a:defRPr>
@@ -4521,7 +4599,7 @@
               </a:spcAft>
               <a:defRPr sz="1800" b="0">
                 <a:solidFill>
-                  <a:srgbClr val="F4F5F8"/>
+                  <a:srgbClr val="FFFFFF"/>
                 </a:solidFill>
                 <a:latin typeface="Calibri"/>
               </a:defRPr>
@@ -4537,7 +4615,7 @@
               </a:spcAft>
               <a:defRPr sz="1800" b="0">
                 <a:solidFill>
-                  <a:srgbClr val="F4F5F8"/>
+                  <a:srgbClr val="FFFFFF"/>
                 </a:solidFill>
                 <a:latin typeface="Calibri"/>
               </a:defRPr>
@@ -4553,7 +4631,7 @@
               </a:spcAft>
               <a:defRPr sz="1800" b="0">
                 <a:solidFill>
-                  <a:srgbClr val="F4F5F8"/>
+                  <a:srgbClr val="FFFFFF"/>
                 </a:solidFill>
                 <a:latin typeface="Calibri"/>
               </a:defRPr>
@@ -4569,7 +4647,7 @@
               </a:spcAft>
               <a:defRPr sz="1800" b="0">
                 <a:solidFill>
-                  <a:srgbClr val="F4F5F8"/>
+                  <a:srgbClr val="FFFFFF"/>
                 </a:solidFill>
                 <a:latin typeface="Calibri"/>
               </a:defRPr>
@@ -4585,7 +4663,7 @@
               </a:spcAft>
               <a:defRPr sz="1800" b="0">
                 <a:solidFill>
-                  <a:srgbClr val="F4F5F8"/>
+                  <a:srgbClr val="FFFFFF"/>
                 </a:solidFill>
                 <a:latin typeface="Calibri"/>
               </a:defRPr>
@@ -4601,7 +4679,7 @@
               </a:spcAft>
               <a:defRPr sz="1800" b="0">
                 <a:solidFill>
-                  <a:srgbClr val="F4F5F8"/>
+                  <a:srgbClr val="FFFFFF"/>
                 </a:solidFill>
                 <a:latin typeface="Calibri"/>
               </a:defRPr>
@@ -4660,7 +4738,7 @@
         <p:spPr>
           <a:xfrm>
             <a:off x="6766560" y="2560320"/>
-            <a:ext cx="4754880" cy="2743200"/>
+            <a:ext cx="4937760" cy="2743200"/>
           </a:xfrm>
           <a:prstGeom prst="rect">
             <a:avLst/>
@@ -4675,13 +4753,13 @@
           <a:p>
             <a:pPr>
               <a:spcAft>
-                <a:spcPts val="560"/>
-              </a:spcAft>
-              <a:defRPr sz="1600" b="0">
-                <a:solidFill>
-                  <a:srgbClr val="F4F5F8"/>
-                </a:solidFill>
-                <a:latin typeface="Calibri"/>
+                <a:spcPts val="525"/>
+              </a:spcAft>
+              <a:defRPr sz="1500" b="0">
+                <a:solidFill>
+                  <a:srgbClr val="FFFFFF"/>
+                </a:solidFill>
+                <a:latin typeface="Consolas"/>
               </a:defRPr>
             </a:pPr>
             <a:r>
@@ -4691,13 +4769,13 @@
           <a:p>
             <a:pPr>
               <a:spcAft>
-                <a:spcPts val="560"/>
-              </a:spcAft>
-              <a:defRPr sz="1600" b="0">
-                <a:solidFill>
-                  <a:srgbClr val="F4F5F8"/>
-                </a:solidFill>
-                <a:latin typeface="Calibri"/>
+                <a:spcPts val="525"/>
+              </a:spcAft>
+              <a:defRPr sz="1500" b="0">
+                <a:solidFill>
+                  <a:srgbClr val="FFFFFF"/>
+                </a:solidFill>
+                <a:latin typeface="Consolas"/>
               </a:defRPr>
             </a:pPr>
             <a:r>
@@ -4707,13 +4785,13 @@
           <a:p>
             <a:pPr>
               <a:spcAft>
-                <a:spcPts val="560"/>
-              </a:spcAft>
-              <a:defRPr sz="1600" b="0">
-                <a:solidFill>
-                  <a:srgbClr val="F4F5F8"/>
-                </a:solidFill>
-                <a:latin typeface="Calibri"/>
+                <a:spcPts val="525"/>
+              </a:spcAft>
+              <a:defRPr sz="1500" b="0">
+                <a:solidFill>
+                  <a:srgbClr val="FFFFFF"/>
+                </a:solidFill>
+                <a:latin typeface="Consolas"/>
               </a:defRPr>
             </a:pPr>
             <a:r>
@@ -4723,13 +4801,13 @@
           <a:p>
             <a:pPr>
               <a:spcAft>
-                <a:spcPts val="560"/>
-              </a:spcAft>
-              <a:defRPr sz="1600" b="0">
-                <a:solidFill>
-                  <a:srgbClr val="F4F5F8"/>
-                </a:solidFill>
-                <a:latin typeface="Calibri"/>
+                <a:spcPts val="525"/>
+              </a:spcAft>
+              <a:defRPr sz="1500" b="0">
+                <a:solidFill>
+                  <a:srgbClr val="FFFFFF"/>
+                </a:solidFill>
+                <a:latin typeface="Consolas"/>
               </a:defRPr>
             </a:pPr>
             <a:r>
@@ -4792,7 +4870,7 @@
               </a:spcAft>
               <a:defRPr sz="3600" b="1">
                 <a:solidFill>
-                  <a:srgbClr val="F4F5F8"/>
+                  <a:srgbClr val="FFFFFF"/>
                 </a:solidFill>
                 <a:latin typeface="Calibri"/>
               </a:defRPr>
@@ -4831,7 +4909,7 @@
               </a:spcAft>
               <a:defRPr sz="2400" b="0">
                 <a:solidFill>
-                  <a:srgbClr val="F4F5F8"/>
+                  <a:srgbClr val="FFFFFF"/>
                 </a:solidFill>
                 <a:latin typeface="Calibri"/>
               </a:defRPr>
@@ -4847,7 +4925,7 @@
               </a:spcAft>
               <a:defRPr sz="2400" b="0">
                 <a:solidFill>
-                  <a:srgbClr val="F4F5F8"/>
+                  <a:srgbClr val="FFFFFF"/>
                 </a:solidFill>
                 <a:latin typeface="Calibri"/>
               </a:defRPr>
@@ -4886,7 +4964,7 @@
               </a:spcAft>
               <a:defRPr sz="2800" b="1">
                 <a:solidFill>
-                  <a:srgbClr val="F0B90B"/>
+                  <a:srgbClr val="FFFFFF"/>
                 </a:solidFill>
                 <a:latin typeface="Calibri"/>
               </a:defRPr>
@@ -4925,7 +5003,7 @@
               </a:spcAft>
               <a:defRPr sz="2400" b="0">
                 <a:solidFill>
-                  <a:srgbClr val="F4F5F8"/>
+                  <a:srgbClr val="FFFFFF"/>
                 </a:solidFill>
                 <a:latin typeface="Calibri"/>
               </a:defRPr>
@@ -4941,7 +5019,7 @@
               </a:spcAft>
               <a:defRPr sz="2400" b="0">
                 <a:solidFill>
-                  <a:srgbClr val="F4F5F8"/>
+                  <a:srgbClr val="FFFFFF"/>
                 </a:solidFill>
                 <a:latin typeface="Calibri"/>
               </a:defRPr>
@@ -5006,7 +5084,7 @@
               </a:spcAft>
               <a:defRPr sz="3600" b="1">
                 <a:solidFill>
-                  <a:srgbClr val="F4F5F8"/>
+                  <a:srgbClr val="FFFFFF"/>
                 </a:solidFill>
                 <a:latin typeface="Calibri"/>
               </a:defRPr>
@@ -5045,7 +5123,7 @@
               </a:spcAft>
               <a:defRPr sz="1500" b="1">
                 <a:solidFill>
-                  <a:srgbClr val="E5BD71"/>
+                  <a:srgbClr val="FBBF24"/>
                 </a:solidFill>
                 <a:latin typeface="Calibri"/>
               </a:defRPr>
@@ -5084,7 +5162,7 @@
               </a:spcAft>
               <a:defRPr sz="2400" b="1">
                 <a:solidFill>
-                  <a:srgbClr val="AEB9F4"/>
+                  <a:srgbClr val="FFFFFF"/>
                 </a:solidFill>
                 <a:latin typeface="Calibri"/>
               </a:defRPr>
@@ -5123,7 +5201,7 @@
               </a:spcAft>
               <a:defRPr sz="1800" b="0">
                 <a:solidFill>
-                  <a:srgbClr val="F4F5F8"/>
+                  <a:srgbClr val="FFFFFF"/>
                 </a:solidFill>
                 <a:latin typeface="Calibri"/>
               </a:defRPr>
@@ -5139,7 +5217,7 @@
               </a:spcAft>
               <a:defRPr sz="1800" b="0">
                 <a:solidFill>
-                  <a:srgbClr val="F4F5F8"/>
+                  <a:srgbClr val="FFFFFF"/>
                 </a:solidFill>
                 <a:latin typeface="Calibri"/>
               </a:defRPr>
@@ -5155,7 +5233,7 @@
               </a:spcAft>
               <a:defRPr sz="1800" b="0">
                 <a:solidFill>
-                  <a:srgbClr val="F4F5F8"/>
+                  <a:srgbClr val="FFFFFF"/>
                 </a:solidFill>
                 <a:latin typeface="Calibri"/>
               </a:defRPr>
@@ -5194,7 +5272,7 @@
               </a:spcAft>
               <a:defRPr sz="2400" b="1">
                 <a:solidFill>
-                  <a:srgbClr val="F0B90B"/>
+                  <a:srgbClr val="FFFFFF"/>
                 </a:solidFill>
                 <a:latin typeface="Calibri"/>
               </a:defRPr>
@@ -5233,7 +5311,7 @@
               </a:spcAft>
               <a:defRPr sz="1800" b="0">
                 <a:solidFill>
-                  <a:srgbClr val="F4F5F8"/>
+                  <a:srgbClr val="FFFFFF"/>
                 </a:solidFill>
                 <a:latin typeface="Calibri"/>
               </a:defRPr>
@@ -5249,7 +5327,7 @@
               </a:spcAft>
               <a:defRPr sz="1800" b="0">
                 <a:solidFill>
-                  <a:srgbClr val="F4F5F8"/>
+                  <a:srgbClr val="FFFFFF"/>
                 </a:solidFill>
                 <a:latin typeface="Calibri"/>
               </a:defRPr>
@@ -5265,13 +5343,13 @@
               </a:spcAft>
               <a:defRPr sz="1800" b="0">
                 <a:solidFill>
-                  <a:srgbClr val="F4F5F8"/>
-                </a:solidFill>
-                <a:latin typeface="Calibri"/>
-              </a:defRPr>
-            </a:pPr>
-            <a:r>
-              <a:t>No custody and no performance fee; on-chain cost per decision stays tiny (next slides)</a:t>
+                  <a:srgbClr val="FFFFFF"/>
+                </a:solidFill>
+                <a:latin typeface="Calibri"/>
+              </a:defRPr>
+            </a:pPr>
+            <a:r>
+              <a:t>No custody and no performance fee; on-chain cost per decision stays tiny (slide 7)</a:t>
             </a:r>
           </a:p>
         </p:txBody>
@@ -5330,7 +5408,7 @@
               </a:spcAft>
               <a:defRPr sz="3600" b="1">
                 <a:solidFill>
-                  <a:srgbClr val="F4F5F8"/>
+                  <a:srgbClr val="FFFFFF"/>
                 </a:solidFill>
                 <a:latin typeface="Calibri"/>
               </a:defRPr>
@@ -5369,7 +5447,7 @@
               </a:spcAft>
               <a:defRPr sz="2400" b="1">
                 <a:solidFill>
-                  <a:srgbClr val="AEB9F4"/>
+                  <a:srgbClr val="9AA8F0"/>
                 </a:solidFill>
                 <a:latin typeface="Calibri"/>
               </a:defRPr>
@@ -5408,7 +5486,7 @@
               </a:spcAft>
               <a:defRPr sz="2000" b="0">
                 <a:solidFill>
-                  <a:srgbClr val="F4F5F8"/>
+                  <a:srgbClr val="FFFFFF"/>
                 </a:solidFill>
                 <a:latin typeface="Calibri"/>
               </a:defRPr>
@@ -5447,7 +5525,7 @@
               </a:spcAft>
               <a:defRPr sz="2400" b="1">
                 <a:solidFill>
-                  <a:srgbClr val="F0B90B"/>
+                  <a:srgbClr val="FFFFFF"/>
                 </a:solidFill>
                 <a:latin typeface="Calibri"/>
               </a:defRPr>
@@ -5486,7 +5564,7 @@
               </a:spcAft>
               <a:defRPr sz="2000" b="0">
                 <a:solidFill>
-                  <a:srgbClr val="F4F5F8"/>
+                  <a:srgbClr val="FFFFFF"/>
                 </a:solidFill>
                 <a:latin typeface="Calibri"/>
               </a:defRPr>
@@ -5525,7 +5603,7 @@
               </a:spcAft>
               <a:defRPr sz="2400" b="1">
                 <a:solidFill>
-                  <a:srgbClr val="AEB9F4"/>
+                  <a:srgbClr val="9AA8F0"/>
                 </a:solidFill>
                 <a:latin typeface="Calibri"/>
               </a:defRPr>
@@ -5564,7 +5642,7 @@
               </a:spcAft>
               <a:defRPr sz="2000" b="0">
                 <a:solidFill>
-                  <a:srgbClr val="F4F5F8"/>
+                  <a:srgbClr val="FFFFFF"/>
                 </a:solidFill>
                 <a:latin typeface="Calibri"/>
               </a:defRPr>
@@ -5603,7 +5681,7 @@
               </a:spcAft>
               <a:defRPr sz="2400" b="1">
                 <a:solidFill>
-                  <a:srgbClr val="F0B90B"/>
+                  <a:srgbClr val="FFFFFF"/>
                 </a:solidFill>
                 <a:latin typeface="Calibri"/>
               </a:defRPr>
@@ -5642,7 +5720,7 @@
               </a:spcAft>
               <a:defRPr sz="2000" b="0">
                 <a:solidFill>
-                  <a:srgbClr val="F4F5F8"/>
+                  <a:srgbClr val="FFFFFF"/>
                 </a:solidFill>
                 <a:latin typeface="Calibri"/>
               </a:defRPr>
@@ -5661,8 +5739,8 @@
         </p:nvSpPr>
         <p:spPr>
           <a:xfrm>
-            <a:off x="640080" y="5760720"/>
-            <a:ext cx="10881360" cy="548640"/>
+            <a:off x="640080" y="5577840"/>
+            <a:ext cx="10881360" cy="457200"/>
           </a:xfrm>
           <a:prstGeom prst="rect">
             <a:avLst/>
@@ -5677,11 +5755,50 @@
           <a:p>
             <a:pPr>
               <a:spcAft>
+                <a:spcPts val="489"/>
+              </a:spcAft>
+              <a:defRPr sz="1400" b="0">
+                <a:solidFill>
+                  <a:srgbClr val="AAAAAB"/>
+                </a:solidFill>
+                <a:latin typeface="Calibri"/>
+              </a:defRPr>
+            </a:pPr>
+            <a:r>
+              <a:t>Periwinkle: off-chain engine · white: on-chain contract</a:t>
+            </a:r>
+          </a:p>
+        </p:txBody>
+      </p:sp>
+      <p:sp>
+        <p:nvSpPr>
+          <p:cNvPr id="12" name="TextBox 11"/>
+          <p:cNvSpPr txBox="1"/>
+          <p:nvPr/>
+        </p:nvSpPr>
+        <p:spPr>
+          <a:xfrm>
+            <a:off x="640080" y="5943600"/>
+            <a:ext cx="10881360" cy="548640"/>
+          </a:xfrm>
+          <a:prstGeom prst="rect">
+            <a:avLst/>
+          </a:prstGeom>
+          <a:noFill/>
+        </p:spPr>
+        <p:txBody>
+          <a:bodyPr wrap="square">
+            <a:spAutoFit/>
+          </a:bodyPr>
+          <a:lstStyle/>
+          <a:p>
+            <a:pPr>
+              <a:spcAft>
                 <a:spcPts val="630"/>
               </a:spcAft>
               <a:defRPr sz="1800" b="0">
                 <a:solidFill>
-                  <a:srgbClr val="A6ABB8"/>
+                  <a:srgbClr val="AAAAAB"/>
                 </a:solidFill>
                 <a:latin typeface="Calibri"/>
               </a:defRPr>
@@ -5746,7 +5863,7 @@
               </a:spcAft>
               <a:defRPr sz="3600" b="1">
                 <a:solidFill>
-                  <a:srgbClr val="F4F5F8"/>
+                  <a:srgbClr val="FFFFFF"/>
                 </a:solidFill>
                 <a:latin typeface="Calibri"/>
               </a:defRPr>
@@ -5833,7 +5950,7 @@
               </a:spcAft>
               <a:defRPr sz="1600" b="0">
                 <a:solidFill>
-                  <a:srgbClr val="A6ABB8"/>
+                  <a:srgbClr val="AAAAAB"/>
                 </a:solidFill>
                 <a:latin typeface="Calibri"/>
               </a:defRPr>
@@ -5849,7 +5966,7 @@
               </a:spcAft>
               <a:defRPr sz="1600" b="0">
                 <a:solidFill>
-                  <a:srgbClr val="A6ABB8"/>
+                  <a:srgbClr val="AAAAAB"/>
                 </a:solidFill>
                 <a:latin typeface="Calibri"/>
               </a:defRPr>
@@ -5888,7 +6005,7 @@
               </a:spcAft>
               <a:defRPr sz="1600" b="0">
                 <a:solidFill>
-                  <a:srgbClr val="A6ABB8"/>
+                  <a:srgbClr val="AAAAAB"/>
                 </a:solidFill>
                 <a:latin typeface="Calibri"/>
               </a:defRPr>
@@ -5904,7 +6021,7 @@
               </a:spcAft>
               <a:defRPr sz="1600" b="0">
                 <a:solidFill>
-                  <a:srgbClr val="A6ABB8"/>
+                  <a:srgbClr val="AAAAAB"/>
                 </a:solidFill>
                 <a:latin typeface="Calibri"/>
               </a:defRPr>
@@ -5969,7 +6086,7 @@
               </a:spcAft>
               <a:defRPr sz="3600" b="1">
                 <a:solidFill>
-                  <a:srgbClr val="F4F5F8"/>
+                  <a:srgbClr val="FFFFFF"/>
                 </a:solidFill>
                 <a:latin typeface="Calibri"/>
               </a:defRPr>
@@ -5995,7 +6112,7 @@
             <a:avLst/>
           </a:prstGeom>
           <a:solidFill>
-            <a:srgbClr val="1F4D3B"/>
+            <a:srgbClr val="153E32"/>
           </a:solidFill>
           <a:ln>
             <a:noFill/>
@@ -6038,7 +6155,7 @@
             <a:avLst/>
           </a:prstGeom>
           <a:solidFill>
-            <a:srgbClr val="5A232D"/>
+            <a:srgbClr val="47252C"/>
           </a:solidFill>
           <a:ln>
             <a:noFill/>
@@ -6124,7 +6241,7 @@
             <a:avLst/>
           </a:prstGeom>
           <a:solidFill>
-            <a:srgbClr val="78D5AB"/>
+            <a:srgbClr val="34D399"/>
           </a:solidFill>
           <a:ln>
             <a:noFill/>
@@ -6262,7 +6379,7 @@
               </a:spcAft>
               <a:defRPr sz="1400" b="0">
                 <a:solidFill>
-                  <a:srgbClr val="78D5AB"/>
+                  <a:srgbClr val="34D399"/>
                 </a:solidFill>
                 <a:latin typeface="Calibri"/>
               </a:defRPr>
@@ -6336,13 +6453,13 @@
           <a:p>
             <a:pPr>
               <a:spcAft>
-                <a:spcPts val="594"/>
-              </a:spcAft>
-              <a:defRPr sz="1700" b="0">
+                <a:spcPts val="560"/>
+              </a:spcAft>
+              <a:defRPr sz="1600" b="0">
                 <a:solidFill>
                   <a:srgbClr val="F0B90B"/>
                 </a:solidFill>
-                <a:latin typeface="Calibri"/>
+                <a:latin typeface="Consolas"/>
               </a:defRPr>
             </a:pPr>
             <a:r>
@@ -6375,13 +6492,13 @@
           <a:p>
             <a:pPr>
               <a:spcAft>
-                <a:spcPts val="594"/>
-              </a:spcAft>
-              <a:defRPr sz="1700" b="0">
-                <a:solidFill>
-                  <a:srgbClr val="F4F5F8"/>
-                </a:solidFill>
-                <a:latin typeface="Calibri"/>
+                <a:spcPts val="560"/>
+              </a:spcAft>
+              <a:defRPr sz="1600" b="0">
+                <a:solidFill>
+                  <a:srgbClr val="FFFFFF"/>
+                </a:solidFill>
+                <a:latin typeface="Consolas"/>
               </a:defRPr>
             </a:pPr>
             <a:r>
@@ -6418,7 +6535,7 @@
               </a:spcAft>
               <a:defRPr sz="1700" b="0">
                 <a:solidFill>
-                  <a:srgbClr val="A6ABB8"/>
+                  <a:srgbClr val="AAAAAB"/>
                 </a:solidFill>
                 <a:latin typeface="Calibri"/>
               </a:defRPr>
@@ -6453,13 +6570,13 @@
           <a:p>
             <a:pPr>
               <a:spcAft>
-                <a:spcPts val="594"/>
-              </a:spcAft>
-              <a:defRPr sz="1700" b="0">
+                <a:spcPts val="560"/>
+              </a:spcAft>
+              <a:defRPr sz="1600" b="0">
                 <a:solidFill>
                   <a:srgbClr val="F0B90B"/>
                 </a:solidFill>
-                <a:latin typeface="Calibri"/>
+                <a:latin typeface="Consolas"/>
               </a:defRPr>
             </a:pPr>
             <a:r>
@@ -6492,13 +6609,13 @@
           <a:p>
             <a:pPr>
               <a:spcAft>
-                <a:spcPts val="594"/>
-              </a:spcAft>
-              <a:defRPr sz="1700" b="0">
-                <a:solidFill>
-                  <a:srgbClr val="F4F5F8"/>
-                </a:solidFill>
-                <a:latin typeface="Calibri"/>
+                <a:spcPts val="560"/>
+              </a:spcAft>
+              <a:defRPr sz="1600" b="0">
+                <a:solidFill>
+                  <a:srgbClr val="FFFFFF"/>
+                </a:solidFill>
+                <a:latin typeface="Consolas"/>
               </a:defRPr>
             </a:pPr>
             <a:r>
@@ -6535,7 +6652,7 @@
               </a:spcAft>
               <a:defRPr sz="1700" b="0">
                 <a:solidFill>
-                  <a:srgbClr val="78D5AB"/>
+                  <a:srgbClr val="34D399"/>
                 </a:solidFill>
                 <a:latin typeface="Calibri"/>
               </a:defRPr>
@@ -6561,7 +6678,7 @@
             <a:avLst/>
           </a:prstGeom>
           <a:solidFill>
-            <a:srgbClr val="16171B"/>
+            <a:srgbClr val="1A1B1D"/>
           </a:solidFill>
           <a:ln>
             <a:noFill/>
@@ -6613,13 +6730,13 @@
           <a:p>
             <a:pPr>
               <a:spcAft>
-                <a:spcPts val="594"/>
-              </a:spcAft>
-              <a:defRPr sz="1700" b="0">
+                <a:spcPts val="560"/>
+              </a:spcAft>
+              <a:defRPr sz="1600" b="0">
                 <a:solidFill>
                   <a:srgbClr val="F0B90B"/>
                 </a:solidFill>
-                <a:latin typeface="Calibri"/>
+                <a:latin typeface="Consolas"/>
               </a:defRPr>
             </a:pPr>
             <a:r>
@@ -6652,13 +6769,13 @@
           <a:p>
             <a:pPr>
               <a:spcAft>
-                <a:spcPts val="594"/>
-              </a:spcAft>
-              <a:defRPr sz="1700" b="1">
-                <a:solidFill>
-                  <a:srgbClr val="F4F5F8"/>
-                </a:solidFill>
-                <a:latin typeface="Calibri"/>
+                <a:spcPts val="560"/>
+              </a:spcAft>
+              <a:defRPr sz="1600" b="1">
+                <a:solidFill>
+                  <a:srgbClr val="FFFFFF"/>
+                </a:solidFill>
+                <a:latin typeface="Consolas"/>
               </a:defRPr>
             </a:pPr>
             <a:r>
@@ -6730,13 +6847,13 @@
           <a:p>
             <a:pPr>
               <a:spcAft>
-                <a:spcPts val="594"/>
-              </a:spcAft>
-              <a:defRPr sz="1700" b="0">
+                <a:spcPts val="560"/>
+              </a:spcAft>
+              <a:defRPr sz="1600" b="0">
                 <a:solidFill>
                   <a:srgbClr val="F0B90B"/>
                 </a:solidFill>
-                <a:latin typeface="Calibri"/>
+                <a:latin typeface="Consolas"/>
               </a:defRPr>
             </a:pPr>
             <a:r>
@@ -6769,13 +6886,13 @@
           <a:p>
             <a:pPr>
               <a:spcAft>
-                <a:spcPts val="594"/>
-              </a:spcAft>
-              <a:defRPr sz="1700" b="0">
-                <a:solidFill>
-                  <a:srgbClr val="F4F5F8"/>
-                </a:solidFill>
-                <a:latin typeface="Calibri"/>
+                <a:spcPts val="560"/>
+              </a:spcAft>
+              <a:defRPr sz="1600" b="0">
+                <a:solidFill>
+                  <a:srgbClr val="FFFFFF"/>
+                </a:solidFill>
+                <a:latin typeface="Consolas"/>
               </a:defRPr>
             </a:pPr>
             <a:r>
@@ -6812,7 +6929,7 @@
               </a:spcAft>
               <a:defRPr sz="1700" b="0">
                 <a:solidFill>
-                  <a:srgbClr val="A6ABB8"/>
+                  <a:srgbClr val="AAAAAB"/>
                 </a:solidFill>
                 <a:latin typeface="Calibri"/>
               </a:defRPr>
@@ -6847,13 +6964,13 @@
           <a:p>
             <a:pPr>
               <a:spcAft>
-                <a:spcPts val="594"/>
-              </a:spcAft>
-              <a:defRPr sz="1700" b="0">
+                <a:spcPts val="560"/>
+              </a:spcAft>
+              <a:defRPr sz="1600" b="0">
                 <a:solidFill>
                   <a:srgbClr val="F0B90B"/>
                 </a:solidFill>
-                <a:latin typeface="Calibri"/>
+                <a:latin typeface="Consolas"/>
               </a:defRPr>
             </a:pPr>
             <a:r>
@@ -6886,13 +7003,13 @@
           <a:p>
             <a:pPr>
               <a:spcAft>
-                <a:spcPts val="594"/>
-              </a:spcAft>
-              <a:defRPr sz="1700" b="0">
-                <a:solidFill>
-                  <a:srgbClr val="F4F5F8"/>
-                </a:solidFill>
-                <a:latin typeface="Calibri"/>
+                <a:spcPts val="560"/>
+              </a:spcAft>
+              <a:defRPr sz="1600" b="0">
+                <a:solidFill>
+                  <a:srgbClr val="FFFFFF"/>
+                </a:solidFill>
+                <a:latin typeface="Consolas"/>
               </a:defRPr>
             </a:pPr>
             <a:r>
@@ -6929,7 +7046,7 @@
               </a:spcAft>
               <a:defRPr sz="1700" b="0">
                 <a:solidFill>
-                  <a:srgbClr val="A6ABB8"/>
+                  <a:srgbClr val="AAAAAB"/>
                 </a:solidFill>
                 <a:latin typeface="Calibri"/>
               </a:defRPr>
@@ -6968,7 +7085,7 @@
               </a:spcAft>
               <a:defRPr sz="1400" b="0">
                 <a:solidFill>
-                  <a:srgbClr val="A6ABB8"/>
+                  <a:srgbClr val="AAAAAB"/>
                 </a:solidFill>
                 <a:latin typeface="Calibri"/>
               </a:defRPr>
@@ -7033,7 +7150,7 @@
               </a:spcAft>
               <a:defRPr sz="3600" b="1">
                 <a:solidFill>
-                  <a:srgbClr val="F4F5F8"/>
+                  <a:srgbClr val="FFFFFF"/>
                 </a:solidFill>
                 <a:latin typeface="Calibri"/>
               </a:defRPr>
@@ -7072,7 +7189,7 @@
               </a:spcAft>
               <a:defRPr sz="4000" b="1">
                 <a:solidFill>
-                  <a:srgbClr val="F0B90B"/>
+                  <a:srgbClr val="FFFFFF"/>
                 </a:solidFill>
                 <a:latin typeface="Calibri"/>
               </a:defRPr>
@@ -7111,7 +7228,7 @@
               </a:spcAft>
               <a:defRPr sz="1800" b="0">
                 <a:solidFill>
-                  <a:srgbClr val="F4F5F8"/>
+                  <a:srgbClr val="AAAAAB"/>
                 </a:solidFill>
                 <a:latin typeface="Calibri"/>
               </a:defRPr>
@@ -7127,7 +7244,7 @@
               </a:spcAft>
               <a:defRPr sz="1800" b="0">
                 <a:solidFill>
-                  <a:srgbClr val="F4F5F8"/>
+                  <a:srgbClr val="AAAAAB"/>
                 </a:solidFill>
                 <a:latin typeface="Calibri"/>
               </a:defRPr>
@@ -7166,7 +7283,7 @@
               </a:spcAft>
               <a:defRPr sz="3000" b="1">
                 <a:solidFill>
-                  <a:srgbClr val="F0B90B"/>
+                  <a:srgbClr val="FFFFFF"/>
                 </a:solidFill>
                 <a:latin typeface="Calibri"/>
               </a:defRPr>
@@ -7205,7 +7322,7 @@
               </a:spcAft>
               <a:defRPr sz="1800" b="0">
                 <a:solidFill>
-                  <a:srgbClr val="F4F5F8"/>
+                  <a:srgbClr val="AAAAAB"/>
                 </a:solidFill>
                 <a:latin typeface="Calibri"/>
               </a:defRPr>
@@ -7221,7 +7338,7 @@
               </a:spcAft>
               <a:defRPr sz="1800" b="0">
                 <a:solidFill>
-                  <a:srgbClr val="F4F5F8"/>
+                  <a:srgbClr val="AAAAAB"/>
                 </a:solidFill>
                 <a:latin typeface="Calibri"/>
               </a:defRPr>
@@ -7260,7 +7377,7 @@
               </a:spcAft>
               <a:defRPr sz="2400" b="1">
                 <a:solidFill>
-                  <a:srgbClr val="AEB9F4"/>
+                  <a:srgbClr val="FFFFFF"/>
                 </a:solidFill>
                 <a:latin typeface="Calibri"/>
               </a:defRPr>
@@ -7299,7 +7416,7 @@
               </a:spcAft>
               <a:defRPr sz="1800" b="0">
                 <a:solidFill>
-                  <a:srgbClr val="F4F5F8"/>
+                  <a:srgbClr val="FFFFFF"/>
                 </a:solidFill>
                 <a:latin typeface="Calibri"/>
               </a:defRPr>
@@ -7315,7 +7432,7 @@
               </a:spcAft>
               <a:defRPr sz="1800" b="0">
                 <a:solidFill>
-                  <a:srgbClr val="F4F5F8"/>
+                  <a:srgbClr val="FFFFFF"/>
                 </a:solidFill>
                 <a:latin typeface="Calibri"/>
               </a:defRPr>
@@ -7331,7 +7448,7 @@
               </a:spcAft>
               <a:defRPr sz="1800" b="0">
                 <a:solidFill>
-                  <a:srgbClr val="F4F5F8"/>
+                  <a:srgbClr val="FFFFFF"/>
                 </a:solidFill>
                 <a:latin typeface="Calibri"/>
               </a:defRPr>
@@ -7347,7 +7464,7 @@
               </a:spcAft>
               <a:defRPr sz="1800" b="0">
                 <a:solidFill>
-                  <a:srgbClr val="F4F5F8"/>
+                  <a:srgbClr val="FFFFFF"/>
                 </a:solidFill>
                 <a:latin typeface="Calibri"/>
               </a:defRPr>
@@ -7386,7 +7503,7 @@
               </a:spcAft>
               <a:defRPr sz="1400" b="0">
                 <a:solidFill>
-                  <a:srgbClr val="A6ABB8"/>
+                  <a:srgbClr val="AAAAAB"/>
                 </a:solidFill>
                 <a:latin typeface="Calibri"/>
               </a:defRPr>
@@ -7451,7 +7568,7 @@
               </a:spcAft>
               <a:defRPr sz="3600" b="1">
                 <a:solidFill>
-                  <a:srgbClr val="F4F5F8"/>
+                  <a:srgbClr val="FFFFFF"/>
                 </a:solidFill>
                 <a:latin typeface="Calibri"/>
               </a:defRPr>
@@ -7490,7 +7607,7 @@
               </a:spcAft>
               <a:defRPr sz="3400" b="1">
                 <a:solidFill>
-                  <a:srgbClr val="78D5AB"/>
+                  <a:srgbClr val="34D399"/>
                 </a:solidFill>
                 <a:latin typeface="Calibri"/>
               </a:defRPr>
@@ -7529,7 +7646,7 @@
               </a:spcAft>
               <a:defRPr sz="1400" b="0">
                 <a:solidFill>
-                  <a:srgbClr val="F4F5F8"/>
+                  <a:srgbClr val="FFFFFF"/>
                 </a:solidFill>
                 <a:latin typeface="Calibri"/>
               </a:defRPr>
@@ -7545,7 +7662,7 @@
               </a:spcAft>
               <a:defRPr sz="1400" b="0">
                 <a:solidFill>
-                  <a:srgbClr val="F4F5F8"/>
+                  <a:srgbClr val="FFFFFF"/>
                 </a:solidFill>
                 <a:latin typeface="Calibri"/>
               </a:defRPr>
@@ -7584,13 +7701,13 @@
               </a:spcAft>
               <a:defRPr sz="3400" b="1">
                 <a:solidFill>
-                  <a:srgbClr val="78D5AB"/>
-                </a:solidFill>
-                <a:latin typeface="Calibri"/>
-              </a:defRPr>
-            </a:pPr>
-            <a:r>
-              <a:t>45</a:t>
+                  <a:srgbClr val="34D399"/>
+                </a:solidFill>
+                <a:latin typeface="Calibri"/>
+              </a:defRPr>
+            </a:pPr>
+            <a:r>
+              <a:t>47</a:t>
             </a:r>
           </a:p>
         </p:txBody>
@@ -7623,7 +7740,7 @@
               </a:spcAft>
               <a:defRPr sz="1400" b="0">
                 <a:solidFill>
-                  <a:srgbClr val="F4F5F8"/>
+                  <a:srgbClr val="FFFFFF"/>
                 </a:solidFill>
                 <a:latin typeface="Calibri"/>
               </a:defRPr>
@@ -7639,7 +7756,7 @@
               </a:spcAft>
               <a:defRPr sz="1400" b="0">
                 <a:solidFill>
-                  <a:srgbClr val="F4F5F8"/>
+                  <a:srgbClr val="FFFFFF"/>
                 </a:solidFill>
                 <a:latin typeface="Calibri"/>
               </a:defRPr>
@@ -7678,7 +7795,7 @@
               </a:spcAft>
               <a:defRPr sz="3400" b="1">
                 <a:solidFill>
-                  <a:srgbClr val="78D5AB"/>
+                  <a:srgbClr val="34D399"/>
                 </a:solidFill>
                 <a:latin typeface="Calibri"/>
               </a:defRPr>
@@ -7717,7 +7834,7 @@
               </a:spcAft>
               <a:defRPr sz="1400" b="0">
                 <a:solidFill>
-                  <a:srgbClr val="F4F5F8"/>
+                  <a:srgbClr val="FFFFFF"/>
                 </a:solidFill>
                 <a:latin typeface="Calibri"/>
               </a:defRPr>
@@ -7733,7 +7850,7 @@
               </a:spcAft>
               <a:defRPr sz="1400" b="0">
                 <a:solidFill>
-                  <a:srgbClr val="F4F5F8"/>
+                  <a:srgbClr val="FFFFFF"/>
                 </a:solidFill>
                 <a:latin typeface="Calibri"/>
               </a:defRPr>
@@ -7811,7 +7928,7 @@
               </a:spcAft>
               <a:defRPr sz="1400" b="0">
                 <a:solidFill>
-                  <a:srgbClr val="F4F5F8"/>
+                  <a:srgbClr val="FFFFFF"/>
                 </a:solidFill>
                 <a:latin typeface="Calibri"/>
               </a:defRPr>
@@ -7827,7 +7944,7 @@
               </a:spcAft>
               <a:defRPr sz="1400" b="0">
                 <a:solidFill>
-                  <a:srgbClr val="F4F5F8"/>
+                  <a:srgbClr val="FFFFFF"/>
                 </a:solidFill>
                 <a:latin typeface="Calibri"/>
               </a:defRPr>
@@ -7866,7 +7983,7 @@
               </a:spcAft>
               <a:defRPr sz="2200" b="1">
                 <a:solidFill>
-                  <a:srgbClr val="E5BD71"/>
+                  <a:srgbClr val="FBBF24"/>
                 </a:solidFill>
                 <a:latin typeface="Calibri"/>
               </a:defRPr>
@@ -7905,7 +8022,7 @@
               </a:spcAft>
               <a:defRPr sz="1600" b="0">
                 <a:solidFill>
-                  <a:srgbClr val="F4F5F8"/>
+                  <a:srgbClr val="FFFFFF"/>
                 </a:solidFill>
                 <a:latin typeface="Calibri"/>
               </a:defRPr>
@@ -7921,7 +8038,7 @@
               </a:spcAft>
               <a:defRPr sz="1600" b="0">
                 <a:solidFill>
-                  <a:srgbClr val="F4F5F8"/>
+                  <a:srgbClr val="FFFFFF"/>
                 </a:solidFill>
                 <a:latin typeface="Calibri"/>
               </a:defRPr>
@@ -7986,7 +8103,7 @@
               </a:spcAft>
               <a:defRPr sz="3600" b="1">
                 <a:solidFill>
-                  <a:srgbClr val="F4F5F8"/>
+                  <a:srgbClr val="FFFFFF"/>
                 </a:solidFill>
                 <a:latin typeface="Calibri"/>
               </a:defRPr>
@@ -8025,7 +8142,7 @@
               </a:spcAft>
               <a:defRPr sz="2400" b="1">
                 <a:solidFill>
-                  <a:srgbClr val="A6ABB8"/>
+                  <a:srgbClr val="AAAAAB"/>
                 </a:solidFill>
                 <a:latin typeface="Calibri"/>
               </a:defRPr>
@@ -8064,7 +8181,7 @@
               </a:spcAft>
               <a:defRPr sz="1800" b="0">
                 <a:solidFill>
-                  <a:srgbClr val="F4F5F8"/>
+                  <a:srgbClr val="FFFFFF"/>
                 </a:solidFill>
                 <a:latin typeface="Calibri"/>
               </a:defRPr>
@@ -8080,7 +8197,23 @@
               </a:spcAft>
               <a:defRPr sz="1800" b="0">
                 <a:solidFill>
-                  <a:srgbClr val="F4F5F8"/>
+                  <a:srgbClr val="FFFFFF"/>
+                </a:solidFill>
+                <a:latin typeface="Calibri"/>
+              </a:defRPr>
+            </a:pPr>
+            <a:r>
+              <a:t>7 contract tests</a:t>
+            </a:r>
+          </a:p>
+          <a:p>
+            <a:pPr>
+              <a:spcAft>
+                <a:spcPts val="630"/>
+              </a:spcAft>
+              <a:defRPr sz="1800" b="0">
+                <a:solidFill>
+                  <a:srgbClr val="FFFFFF"/>
                 </a:solidFill>
                 <a:latin typeface="Calibri"/>
               </a:defRPr>
@@ -8096,7 +8229,7 @@
               </a:spcAft>
               <a:defRPr sz="1800" b="0">
                 <a:solidFill>
-                  <a:srgbClr val="F4F5F8"/>
+                  <a:srgbClr val="FFFFFF"/>
                 </a:solidFill>
                 <a:latin typeface="Calibri"/>
               </a:defRPr>
@@ -8112,7 +8245,7 @@
               </a:spcAft>
               <a:defRPr sz="1800" b="0">
                 <a:solidFill>
-                  <a:srgbClr val="F4F5F8"/>
+                  <a:srgbClr val="FFFFFF"/>
                 </a:solidFill>
                 <a:latin typeface="Calibri"/>
               </a:defRPr>
@@ -8151,7 +8284,7 @@
               </a:spcAft>
               <a:defRPr sz="2400" b="1">
                 <a:solidFill>
-                  <a:srgbClr val="F0B90B"/>
+                  <a:srgbClr val="FFFFFF"/>
                 </a:solidFill>
                 <a:latin typeface="Calibri"/>
               </a:defRPr>
@@ -8190,7 +8323,7 @@
               </a:spcAft>
               <a:defRPr sz="1700" b="0">
                 <a:solidFill>
-                  <a:srgbClr val="F4F5F8"/>
+                  <a:srgbClr val="FFFFFF"/>
                 </a:solidFill>
                 <a:latin typeface="Calibri"/>
               </a:defRPr>
@@ -8206,7 +8339,7 @@
               </a:spcAft>
               <a:defRPr sz="1700" b="0">
                 <a:solidFill>
-                  <a:srgbClr val="F4F5F8"/>
+                  <a:srgbClr val="FFFFFF"/>
                 </a:solidFill>
                 <a:latin typeface="Calibri"/>
               </a:defRPr>
@@ -8222,7 +8355,7 @@
               </a:spcAft>
               <a:defRPr sz="1700" b="0">
                 <a:solidFill>
-                  <a:srgbClr val="F4F5F8"/>
+                  <a:srgbClr val="FFFFFF"/>
                 </a:solidFill>
                 <a:latin typeface="Calibri"/>
               </a:defRPr>
@@ -8238,7 +8371,7 @@
               </a:spcAft>
               <a:defRPr sz="1700" b="0">
                 <a:solidFill>
-                  <a:srgbClr val="F4F5F8"/>
+                  <a:srgbClr val="FFFFFF"/>
                 </a:solidFill>
                 <a:latin typeface="Calibri"/>
               </a:defRPr>
@@ -8254,13 +8387,13 @@
               </a:spcAft>
               <a:defRPr sz="1700" b="0">
                 <a:solidFill>
-                  <a:srgbClr val="F4F5F8"/>
-                </a:solidFill>
-                <a:latin typeface="Calibri"/>
-              </a:defRPr>
-            </a:pPr>
-            <a:r>
-              <a:t>23 contract + 45 engine + 8 web tests, CI</a:t>
+                  <a:srgbClr val="FFFFFF"/>
+                </a:solidFill>
+                <a:latin typeface="Calibri"/>
+              </a:defRPr>
+            </a:pPr>
+            <a:r>
+              <a:t>+23 contract tests, 47 engine tests, 15 web tests, CI</a:t>
             </a:r>
           </a:p>
           <a:p>
@@ -8270,7 +8403,7 @@
               </a:spcAft>
               <a:defRPr sz="1700" b="0">
                 <a:solidFill>
-                  <a:srgbClr val="F4F5F8"/>
+                  <a:srgbClr val="FFFFFF"/>
                 </a:solidFill>
                 <a:latin typeface="Calibri"/>
               </a:defRPr>
@@ -8286,7 +8419,7 @@
               </a:spcAft>
               <a:defRPr sz="1700" b="0">
                 <a:solidFill>
-                  <a:srgbClr val="F4F5F8"/>
+                  <a:srgbClr val="FFFFFF"/>
                 </a:solidFill>
                 <a:latin typeface="Calibri"/>
               </a:defRPr>
@@ -8325,9 +8458,9 @@
               </a:spcAft>
               <a:defRPr sz="1600" b="0">
                 <a:solidFill>
-                  <a:srgbClr val="AEB9F4"/>
-                </a:solidFill>
-                <a:latin typeface="Calibri"/>
+                  <a:srgbClr val="AAAAAB"/>
+                </a:solidFill>
+                <a:latin typeface="Consolas"/>
               </a:defRPr>
             </a:pPr>
             <a:r>

--- a/docs/submission/DRIFT-pitch.pptx
+++ b/docs/submission/DRIFT-pitch.pptx
@@ -581,7 +581,7 @@
           <a:lstStyle/>
           <a:p>
             <a:r>
-              <a:t>Roadmap items are not built yet. The links are live today.</a:t>
+              <a:t>Roadmap items are not built yet. The links are live today and clickable in the deck.</a:t>
             </a:r>
           </a:p>
         </p:txBody>
@@ -4181,14 +4181,14 @@
               <a:spcAft>
                 <a:spcPts val="2100"/>
               </a:spcAft>
-              <a:defRPr sz="6000" b="1">
+            </a:pPr>
+            <a:r>
+              <a:rPr sz="6000" b="1">
                 <a:solidFill>
                   <a:srgbClr val="FFFFFF"/>
                 </a:solidFill>
                 <a:latin typeface="Calibri"/>
-              </a:defRPr>
-            </a:pPr>
-            <a:r>
+              </a:rPr>
               <a:t>DRIFT</a:t>
             </a:r>
           </a:p>
@@ -4220,14 +4220,14 @@
               <a:spcAft>
                 <a:spcPts val="1189"/>
               </a:spcAft>
-              <a:defRPr sz="3400" b="1">
+            </a:pPr>
+            <a:r>
+              <a:rPr sz="3400" b="1">
                 <a:solidFill>
                   <a:srgbClr val="FFFFFF"/>
                 </a:solidFill>
                 <a:latin typeface="Calibri"/>
-              </a:defRPr>
-            </a:pPr>
-            <a:r>
+              </a:rPr>
               <a:t>A trading bot whose risk rules you can verify</a:t>
             </a:r>
           </a:p>
@@ -4259,14 +4259,14 @@
               <a:spcAft>
                 <a:spcPts val="769"/>
               </a:spcAft>
-              <a:defRPr sz="2200" b="0">
+            </a:pPr>
+            <a:r>
+              <a:rPr sz="2200" b="0">
                 <a:solidFill>
                   <a:srgbClr val="AAAAAB"/>
                 </a:solidFill>
                 <a:latin typeface="Calibri"/>
-              </a:defRPr>
-            </a:pPr>
-            <a:r>
+              </a:rPr>
               <a:t>Off-chain quant research · on-chain risk gate on BNB Chain</a:t>
             </a:r>
           </a:p>
@@ -4298,14 +4298,14 @@
               <a:spcAft>
                 <a:spcPts val="560"/>
               </a:spcAft>
-              <a:defRPr sz="1600" b="0">
+            </a:pPr>
+            <a:r>
+              <a:rPr sz="1600" b="0">
                 <a:solidFill>
                   <a:srgbClr val="AAAAAB"/>
                 </a:solidFill>
                 <a:latin typeface="Calibri"/>
-              </a:defRPr>
-            </a:pPr>
-            <a:r>
+              </a:rPr>
               <a:t>Live demo</a:t>
             </a:r>
           </a:p>
@@ -4337,14 +4337,14 @@
               <a:spcAft>
                 <a:spcPts val="630"/>
               </a:spcAft>
-              <a:defRPr sz="1800" b="0">
+            </a:pPr>
+            <a:r>
+              <a:rPr sz="1800" b="0">
                 <a:solidFill>
                   <a:srgbClr val="FFFFFF"/>
                 </a:solidFill>
                 <a:latin typeface="Consolas"/>
-              </a:defRPr>
-            </a:pPr>
-            <a:r>
+              </a:rPr>
               <a:t>drift-macroguard.vercel.app/macroguard</a:t>
             </a:r>
           </a:p>
@@ -4376,14 +4376,14 @@
               <a:spcAft>
                 <a:spcPts val="560"/>
               </a:spcAft>
-              <a:defRPr sz="1600" b="0">
+            </a:pPr>
+            <a:r>
+              <a:rPr sz="1600" b="0">
                 <a:solidFill>
                   <a:srgbClr val="AAAAAB"/>
                 </a:solidFill>
                 <a:latin typeface="Calibri"/>
-              </a:defRPr>
-            </a:pPr>
-            <a:r>
+              </a:rPr>
               <a:t>Dex's contract on BSC Testnet</a:t>
             </a:r>
           </a:p>
@@ -4415,14 +4415,14 @@
               <a:spcAft>
                 <a:spcPts val="630"/>
               </a:spcAft>
-              <a:defRPr sz="1800" b="0">
+            </a:pPr>
+            <a:r>
+              <a:rPr sz="1800" b="0">
                 <a:solidFill>
                   <a:srgbClr val="F0B90B"/>
                 </a:solidFill>
                 <a:latin typeface="Consolas"/>
-              </a:defRPr>
-            </a:pPr>
-            <a:r>
+              </a:rPr>
               <a:t>0x8b09ebB85Be8Ed55Bb5132d29eABc567c42aa83D</a:t>
             </a:r>
           </a:p>
@@ -4454,14 +4454,14 @@
               <a:spcAft>
                 <a:spcPts val="560"/>
               </a:spcAft>
-              <a:defRPr sz="1600" b="0">
+            </a:pPr>
+            <a:r>
+              <a:rPr sz="1600" b="0">
                 <a:solidFill>
                   <a:srgbClr val="AAAAAB"/>
                 </a:solidFill>
                 <a:latin typeface="Calibri"/>
-              </a:defRPr>
-            </a:pPr>
-            <a:r>
+              </a:rPr>
               <a:t>Indonesia Web3 Hackathon 2026 · Dex Bennett</a:t>
             </a:r>
           </a:p>
@@ -4519,14 +4519,14 @@
               <a:spcAft>
                 <a:spcPts val="1260"/>
               </a:spcAft>
-              <a:defRPr sz="3600" b="1">
+            </a:pPr>
+            <a:r>
+              <a:rPr sz="3600" b="1">
                 <a:solidFill>
                   <a:srgbClr val="FFFFFF"/>
                 </a:solidFill>
                 <a:latin typeface="Calibri"/>
-              </a:defRPr>
-            </a:pPr>
-            <a:r>
+              </a:rPr>
               <a:t>Roadmap</a:t>
             </a:r>
           </a:p>
@@ -4558,14 +4558,14 @@
               <a:spcAft>
                 <a:spcPts val="525"/>
               </a:spcAft>
-              <a:defRPr sz="1500" b="1">
+            </a:pPr>
+            <a:r>
+              <a:rPr sz="1500" b="1">
                 <a:solidFill>
                   <a:srgbClr val="FBBF24"/>
                 </a:solidFill>
                 <a:latin typeface="Calibri"/>
-              </a:defRPr>
-            </a:pPr>
-            <a:r>
+              </a:rPr>
               <a:t>Not built yet; listed in order of trust gained per step</a:t>
             </a:r>
           </a:p>
@@ -4579,8 +4579,8 @@
         </p:nvSpPr>
         <p:spPr>
           <a:xfrm>
-            <a:off x="640080" y="1828800"/>
-            <a:ext cx="5669280" cy="3840480"/>
+            <a:off x="640080" y="1737360"/>
+            <a:ext cx="5486400" cy="2011680"/>
           </a:xfrm>
           <a:prstGeom prst="rect">
             <a:avLst/>
@@ -4597,14 +4597,14 @@
               <a:spcAft>
                 <a:spcPts val="630"/>
               </a:spcAft>
-              <a:defRPr sz="1800" b="0">
+            </a:pPr>
+            <a:r>
+              <a:rPr sz="1800" b="0">
                 <a:solidFill>
                   <a:srgbClr val="FFFFFF"/>
                 </a:solidFill>
                 <a:latin typeface="Calibri"/>
-              </a:defRPr>
-            </a:pPr>
-            <a:r>
+              </a:rPr>
               <a:t>Resume through a multisig or timelock</a:t>
             </a:r>
           </a:p>
@@ -4613,14 +4613,14 @@
               <a:spcAft>
                 <a:spcPts val="630"/>
               </a:spcAft>
-              <a:defRPr sz="1800" b="0">
+            </a:pPr>
+            <a:r>
+              <a:rPr sz="1800" b="0">
                 <a:solidFill>
                   <a:srgbClr val="FFFFFF"/>
                 </a:solidFill>
                 <a:latin typeface="Calibri"/>
-              </a:defRPr>
-            </a:pPr>
-            <a:r>
+              </a:rPr>
               <a:t>Fail-closed mode for the runner</a:t>
             </a:r>
           </a:p>
@@ -4629,63 +4629,15 @@
               <a:spcAft>
                 <a:spcPts val="630"/>
               </a:spcAft>
-              <a:defRPr sz="1800" b="0">
+            </a:pPr>
+            <a:r>
+              <a:rPr sz="1800" b="0">
                 <a:solidFill>
                   <a:srgbClr val="FFFFFF"/>
                 </a:solidFill>
                 <a:latin typeface="Calibri"/>
-              </a:defRPr>
-            </a:pPr>
-            <a:r>
+              </a:rPr>
               <a:t>Signed regime verdicts (EIP-712) with an input hash</a:t>
-            </a:r>
-          </a:p>
-          <a:p>
-            <a:pPr>
-              <a:spcAft>
-                <a:spcPts val="630"/>
-              </a:spcAft>
-              <a:defRPr sz="1800" b="0">
-                <a:solidFill>
-                  <a:srgbClr val="FFFFFF"/>
-                </a:solidFill>
-                <a:latin typeface="Calibri"/>
-              </a:defRPr>
-            </a:pPr>
-            <a:r>
-              <a:t>Attested equity, so the drawdown is not self-reported</a:t>
-            </a:r>
-          </a:p>
-          <a:p>
-            <a:pPr>
-              <a:spcAft>
-                <a:spcPts val="630"/>
-              </a:spcAft>
-              <a:defRPr sz="1800" b="0">
-                <a:solidFill>
-                  <a:srgbClr val="FFFFFF"/>
-                </a:solidFill>
-                <a:latin typeface="Calibri"/>
-              </a:defRPr>
-            </a:pPr>
-            <a:r>
-              <a:t>Record the raw signal plus a veto flag</a:t>
-            </a:r>
-          </a:p>
-          <a:p>
-            <a:pPr>
-              <a:spcAft>
-                <a:spcPts val="630"/>
-              </a:spcAft>
-              <a:defRPr sz="1800" b="0">
-                <a:solidFill>
-                  <a:srgbClr val="FFFFFF"/>
-                </a:solidFill>
-                <a:latin typeface="Calibri"/>
-              </a:defRPr>
-            </a:pPr>
-            <a:r>
-              <a:t>Agent identity (ERC-8004), then mainnet after an audit</a:t>
             </a:r>
           </a:p>
         </p:txBody>
@@ -4698,8 +4650,8 @@
         </p:nvSpPr>
         <p:spPr>
           <a:xfrm>
-            <a:off x="6766560" y="1828800"/>
-            <a:ext cx="4754880" cy="548640"/>
+            <a:off x="6309360" y="1737360"/>
+            <a:ext cx="5486400" cy="2011680"/>
           </a:xfrm>
           <a:prstGeom prst="rect">
             <a:avLst/>
@@ -4714,17 +4666,49 @@
           <a:p>
             <a:pPr>
               <a:spcAft>
-                <a:spcPts val="839"/>
-              </a:spcAft>
-              <a:defRPr sz="2400" b="1">
-                <a:solidFill>
-                  <a:srgbClr val="F0B90B"/>
-                </a:solidFill>
-                <a:latin typeface="Calibri"/>
-              </a:defRPr>
-            </a:pPr>
-            <a:r>
-              <a:t>Check it yourself</a:t>
+                <a:spcPts val="630"/>
+              </a:spcAft>
+            </a:pPr>
+            <a:r>
+              <a:rPr sz="1800" b="0">
+                <a:solidFill>
+                  <a:srgbClr val="FFFFFF"/>
+                </a:solidFill>
+                <a:latin typeface="Calibri"/>
+              </a:rPr>
+              <a:t>Attested equity, so the drawdown is not self-reported</a:t>
+            </a:r>
+          </a:p>
+          <a:p>
+            <a:pPr>
+              <a:spcAft>
+                <a:spcPts val="630"/>
+              </a:spcAft>
+            </a:pPr>
+            <a:r>
+              <a:rPr sz="1800" b="0">
+                <a:solidFill>
+                  <a:srgbClr val="FFFFFF"/>
+                </a:solidFill>
+                <a:latin typeface="Calibri"/>
+              </a:rPr>
+              <a:t>Record the raw signal plus a veto flag</a:t>
+            </a:r>
+          </a:p>
+          <a:p>
+            <a:pPr>
+              <a:spcAft>
+                <a:spcPts val="630"/>
+              </a:spcAft>
+            </a:pPr>
+            <a:r>
+              <a:rPr sz="1800" b="0">
+                <a:solidFill>
+                  <a:srgbClr val="FFFFFF"/>
+                </a:solidFill>
+                <a:latin typeface="Calibri"/>
+              </a:rPr>
+              <a:t>Agent identity (ERC-8004), then mainnet after an audit</a:t>
             </a:r>
           </a:p>
         </p:txBody>
@@ -4737,8 +4721,8 @@
         </p:nvSpPr>
         <p:spPr>
           <a:xfrm>
-            <a:off x="6766560" y="2560320"/>
-            <a:ext cx="4937760" cy="2743200"/>
+            <a:off x="640080" y="3931920"/>
+            <a:ext cx="10881360" cy="548640"/>
           </a:xfrm>
           <a:prstGeom prst="rect">
             <a:avLst/>
@@ -4753,65 +4737,311 @@
           <a:p>
             <a:pPr>
               <a:spcAft>
-                <a:spcPts val="525"/>
-              </a:spcAft>
-              <a:defRPr sz="1500" b="0">
+                <a:spcPts val="839"/>
+              </a:spcAft>
+            </a:pPr>
+            <a:r>
+              <a:rPr sz="2400" b="1">
                 <a:solidFill>
                   <a:srgbClr val="FFFFFF"/>
                 </a:solidFill>
+                <a:latin typeface="Calibri"/>
+              </a:rPr>
+              <a:t>Check it yourself</a:t>
+            </a:r>
+          </a:p>
+        </p:txBody>
+      </p:sp>
+      <p:sp>
+        <p:nvSpPr>
+          <p:cNvPr id="7" name="TextBox 6"/>
+          <p:cNvSpPr txBox="1"/>
+          <p:nvPr/>
+        </p:nvSpPr>
+        <p:spPr>
+          <a:xfrm>
+            <a:off x="640080" y="4599432"/>
+            <a:ext cx="1737360" cy="411480"/>
+          </a:xfrm>
+          <a:prstGeom prst="rect">
+            <a:avLst/>
+          </a:prstGeom>
+          <a:noFill/>
+        </p:spPr>
+        <p:txBody>
+          <a:bodyPr wrap="square">
+            <a:spAutoFit/>
+          </a:bodyPr>
+          <a:lstStyle/>
+          <a:p>
+            <a:pPr>
+              <a:spcAft>
+                <a:spcPts val="455"/>
+              </a:spcAft>
+            </a:pPr>
+            <a:r>
+              <a:rPr sz="1300" b="0">
+                <a:solidFill>
+                  <a:srgbClr val="AAAAAB"/>
+                </a:solidFill>
+                <a:latin typeface="Calibri"/>
+              </a:rPr>
+              <a:t>Live demo</a:t>
+            </a:r>
+          </a:p>
+        </p:txBody>
+      </p:sp>
+      <p:sp>
+        <p:nvSpPr>
+          <p:cNvPr id="8" name="TextBox 7"/>
+          <p:cNvSpPr txBox="1"/>
+          <p:nvPr/>
+        </p:nvSpPr>
+        <p:spPr>
+          <a:xfrm>
+            <a:off x="2286000" y="4572000"/>
+            <a:ext cx="9418320" cy="411480"/>
+          </a:xfrm>
+          <a:prstGeom prst="rect">
+            <a:avLst/>
+          </a:prstGeom>
+          <a:noFill/>
+        </p:spPr>
+        <p:txBody>
+          <a:bodyPr wrap="none">
+            <a:spAutoFit/>
+          </a:bodyPr>
+          <a:lstStyle/>
+          <a:p>
+            <a:r>
+              <a:rPr sz="1400">
+                <a:solidFill>
+                  <a:srgbClr val="FFFFFF"/>
+                </a:solidFill>
                 <a:latin typeface="Consolas"/>
-              </a:defRPr>
-            </a:pPr>
-            <a:r>
-              <a:t>drift-macroguard.vercel.app/macroguard</a:t>
-            </a:r>
-          </a:p>
-          <a:p>
-            <a:pPr>
-              <a:spcAft>
-                <a:spcPts val="525"/>
-              </a:spcAft>
-              <a:defRPr sz="1500" b="0">
+              </a:rPr>
+              <a:t>https://drift-macroguard.vercel.app/macroguard</a:t>
+            </a:r>
+          </a:p>
+        </p:txBody>
+      </p:sp>
+      <p:sp>
+        <p:nvSpPr>
+          <p:cNvPr id="9" name="TextBox 8"/>
+          <p:cNvSpPr txBox="1"/>
+          <p:nvPr/>
+        </p:nvSpPr>
+        <p:spPr>
+          <a:xfrm>
+            <a:off x="640080" y="5056632"/>
+            <a:ext cx="1737360" cy="411480"/>
+          </a:xfrm>
+          <a:prstGeom prst="rect">
+            <a:avLst/>
+          </a:prstGeom>
+          <a:noFill/>
+        </p:spPr>
+        <p:txBody>
+          <a:bodyPr wrap="square">
+            <a:spAutoFit/>
+          </a:bodyPr>
+          <a:lstStyle/>
+          <a:p>
+            <a:pPr>
+              <a:spcAft>
+                <a:spcPts val="455"/>
+              </a:spcAft>
+            </a:pPr>
+            <a:r>
+              <a:rPr sz="1300" b="0">
+                <a:solidFill>
+                  <a:srgbClr val="AAAAAB"/>
+                </a:solidFill>
+                <a:latin typeface="Calibri"/>
+              </a:rPr>
+              <a:t>Code</a:t>
+            </a:r>
+          </a:p>
+        </p:txBody>
+      </p:sp>
+      <p:sp>
+        <p:nvSpPr>
+          <p:cNvPr id="10" name="TextBox 9"/>
+          <p:cNvSpPr txBox="1"/>
+          <p:nvPr/>
+        </p:nvSpPr>
+        <p:spPr>
+          <a:xfrm>
+            <a:off x="2286000" y="5029200"/>
+            <a:ext cx="9418320" cy="411480"/>
+          </a:xfrm>
+          <a:prstGeom prst="rect">
+            <a:avLst/>
+          </a:prstGeom>
+          <a:noFill/>
+        </p:spPr>
+        <p:txBody>
+          <a:bodyPr wrap="none">
+            <a:spAutoFit/>
+          </a:bodyPr>
+          <a:lstStyle/>
+          <a:p>
+            <a:r>
+              <a:rPr sz="1400">
                 <a:solidFill>
                   <a:srgbClr val="FFFFFF"/>
                 </a:solidFill>
                 <a:latin typeface="Consolas"/>
-              </a:defRPr>
-            </a:pPr>
-            <a:r>
-              <a:t>github.com/Stylenecy/seed-bnb/tree/dex/drift/drift</a:t>
-            </a:r>
-          </a:p>
-          <a:p>
-            <a:pPr>
-              <a:spcAft>
-                <a:spcPts val="525"/>
-              </a:spcAft>
-              <a:defRPr sz="1500" b="0">
-                <a:solidFill>
-                  <a:srgbClr val="FFFFFF"/>
+              </a:rPr>
+              <a:t>https://github.com/Stylenecy/seed-bnb/tree/dex/drift/drift</a:t>
+            </a:r>
+          </a:p>
+        </p:txBody>
+      </p:sp>
+      <p:sp>
+        <p:nvSpPr>
+          <p:cNvPr id="11" name="TextBox 10"/>
+          <p:cNvSpPr txBox="1"/>
+          <p:nvPr/>
+        </p:nvSpPr>
+        <p:spPr>
+          <a:xfrm>
+            <a:off x="640080" y="5513832"/>
+            <a:ext cx="1737360" cy="411480"/>
+          </a:xfrm>
+          <a:prstGeom prst="rect">
+            <a:avLst/>
+          </a:prstGeom>
+          <a:noFill/>
+        </p:spPr>
+        <p:txBody>
+          <a:bodyPr wrap="square">
+            <a:spAutoFit/>
+          </a:bodyPr>
+          <a:lstStyle/>
+          <a:p>
+            <a:pPr>
+              <a:spcAft>
+                <a:spcPts val="455"/>
+              </a:spcAft>
+            </a:pPr>
+            <a:r>
+              <a:rPr sz="1300" b="0">
+                <a:solidFill>
+                  <a:srgbClr val="AAAAAB"/>
+                </a:solidFill>
+                <a:latin typeface="Calibri"/>
+              </a:rPr>
+              <a:t>Contract</a:t>
+            </a:r>
+          </a:p>
+        </p:txBody>
+      </p:sp>
+      <p:sp>
+        <p:nvSpPr>
+          <p:cNvPr id="12" name="TextBox 11"/>
+          <p:cNvSpPr txBox="1"/>
+          <p:nvPr/>
+        </p:nvSpPr>
+        <p:spPr>
+          <a:xfrm>
+            <a:off x="2286000" y="5486400"/>
+            <a:ext cx="9418320" cy="411480"/>
+          </a:xfrm>
+          <a:prstGeom prst="rect">
+            <a:avLst/>
+          </a:prstGeom>
+          <a:noFill/>
+        </p:spPr>
+        <p:txBody>
+          <a:bodyPr wrap="none">
+            <a:spAutoFit/>
+          </a:bodyPr>
+          <a:lstStyle/>
+          <a:p>
+            <a:r>
+              <a:rPr sz="1400">
+                <a:solidFill>
+                  <a:srgbClr val="F0B90B"/>
                 </a:solidFill>
                 <a:latin typeface="Consolas"/>
-              </a:defRPr>
-            </a:pPr>
-            <a:r>
-              <a:t>BscScan: 0x8b09ebB8…2aa83D</a:t>
-            </a:r>
-          </a:p>
-          <a:p>
-            <a:pPr>
-              <a:spcAft>
-                <a:spcPts val="525"/>
-              </a:spcAft>
-              <a:defRPr sz="1500" b="0">
-                <a:solidFill>
-                  <a:srgbClr val="FFFFFF"/>
+                <a:hlinkClick r:id="rId3"/>
+              </a:rPr>
+              <a:t>https://testnet.bscscan.com/address/0x8b09ebB85Be8Ed55Bb5132d29eABc567c42aa83D</a:t>
+            </a:r>
+          </a:p>
+        </p:txBody>
+      </p:sp>
+      <p:sp>
+        <p:nvSpPr>
+          <p:cNvPr id="13" name="TextBox 12"/>
+          <p:cNvSpPr txBox="1"/>
+          <p:nvPr/>
+        </p:nvSpPr>
+        <p:spPr>
+          <a:xfrm>
+            <a:off x="640080" y="5971032"/>
+            <a:ext cx="1737360" cy="411480"/>
+          </a:xfrm>
+          <a:prstGeom prst="rect">
+            <a:avLst/>
+          </a:prstGeom>
+          <a:noFill/>
+        </p:spPr>
+        <p:txBody>
+          <a:bodyPr wrap="square">
+            <a:spAutoFit/>
+          </a:bodyPr>
+          <a:lstStyle/>
+          <a:p>
+            <a:pPr>
+              <a:spcAft>
+                <a:spcPts val="455"/>
+              </a:spcAft>
+            </a:pPr>
+            <a:r>
+              <a:rPr sz="1300" b="0">
+                <a:solidFill>
+                  <a:srgbClr val="AAAAAB"/>
+                </a:solidFill>
+                <a:latin typeface="Calibri"/>
+              </a:rPr>
+              <a:t>Source</a:t>
+            </a:r>
+          </a:p>
+        </p:txBody>
+      </p:sp>
+      <p:sp>
+        <p:nvSpPr>
+          <p:cNvPr id="14" name="TextBox 13"/>
+          <p:cNvSpPr txBox="1"/>
+          <p:nvPr/>
+        </p:nvSpPr>
+        <p:spPr>
+          <a:xfrm>
+            <a:off x="2286000" y="5943600"/>
+            <a:ext cx="9418320" cy="411480"/>
+          </a:xfrm>
+          <a:prstGeom prst="rect">
+            <a:avLst/>
+          </a:prstGeom>
+          <a:noFill/>
+        </p:spPr>
+        <p:txBody>
+          <a:bodyPr wrap="none">
+            <a:spAutoFit/>
+          </a:bodyPr>
+          <a:lstStyle/>
+          <a:p>
+            <a:r>
+              <a:rPr sz="1400">
+                <a:solidFill>
+                  <a:srgbClr val="F0B90B"/>
                 </a:solidFill>
                 <a:latin typeface="Consolas"/>
-              </a:defRPr>
-            </a:pPr>
-            <a:r>
-              <a:t>Sourcify: repo.sourcify.dev/97/…</a:t>
+                <a:hlinkClick r:id="rId4"/>
+              </a:rPr>
+              <a:t>https://repo.sourcify.dev/97/0x8b09ebB85Be8Ed55Bb5132d29eABc567c42aa83D</a:t>
             </a:r>
           </a:p>
         </p:txBody>
@@ -4868,14 +5098,14 @@
               <a:spcAft>
                 <a:spcPts val="1260"/>
               </a:spcAft>
-              <a:defRPr sz="3600" b="1">
+            </a:pPr>
+            <a:r>
+              <a:rPr sz="3600" b="1">
                 <a:solidFill>
                   <a:srgbClr val="FFFFFF"/>
                 </a:solidFill>
                 <a:latin typeface="Calibri"/>
-              </a:defRPr>
-            </a:pPr>
-            <a:r>
+              </a:rPr>
               <a:t>The problem</a:t>
             </a:r>
           </a:p>
@@ -4907,14 +5137,14 @@
               <a:spcAft>
                 <a:spcPts val="839"/>
               </a:spcAft>
-              <a:defRPr sz="2400" b="0">
+            </a:pPr>
+            <a:r>
+              <a:rPr sz="2400" b="0">
                 <a:solidFill>
                   <a:srgbClr val="FFFFFF"/>
                 </a:solidFill>
                 <a:latin typeface="Calibri"/>
-              </a:defRPr>
-            </a:pPr>
-            <a:r>
+              </a:rPr>
               <a:t>Trading bots ask users to trust risk rules nobody can see.</a:t>
             </a:r>
           </a:p>
@@ -4923,14 +5153,14 @@
               <a:spcAft>
                 <a:spcPts val="839"/>
               </a:spcAft>
-              <a:defRPr sz="2400" b="0">
+            </a:pPr>
+            <a:r>
+              <a:rPr sz="2400" b="0">
                 <a:solidFill>
                   <a:srgbClr val="FFFFFF"/>
                 </a:solidFill>
                 <a:latin typeface="Calibri"/>
-              </a:defRPr>
-            </a:pPr>
-            <a:r>
+              </a:rPr>
               <a:t>Settings change silently; off-chain decision logs can be rewritten.</a:t>
             </a:r>
           </a:p>
@@ -4962,14 +5192,14 @@
               <a:spcAft>
                 <a:spcPts val="979"/>
               </a:spcAft>
-              <a:defRPr sz="2800" b="1">
+            </a:pPr>
+            <a:r>
+              <a:rPr sz="2800" b="1">
                 <a:solidFill>
                   <a:srgbClr val="FFFFFF"/>
                 </a:solidFill>
                 <a:latin typeface="Calibri"/>
-              </a:defRPr>
-            </a:pPr>
-            <a:r>
+              </a:rPr>
               <a:t>The promise</a:t>
             </a:r>
           </a:p>
@@ -5001,14 +5231,14 @@
               <a:spcAft>
                 <a:spcPts val="839"/>
               </a:spcAft>
-              <a:defRPr sz="2400" b="0">
+            </a:pPr>
+            <a:r>
+              <a:rPr sz="2400" b="0">
                 <a:solidFill>
                   <a:srgbClr val="FFFFFF"/>
                 </a:solidFill>
                 <a:latin typeface="Calibri"/>
-              </a:defRPr>
-            </a:pPr>
-            <a:r>
+              </a:rPr>
               <a:t>Anyone can check what DRIFT's bot is allowed to do right now,</a:t>
             </a:r>
           </a:p>
@@ -5017,14 +5247,14 @@
               <a:spcAft>
                 <a:spcPts val="839"/>
               </a:spcAft>
-              <a:defRPr sz="2400" b="0">
+            </a:pPr>
+            <a:r>
+              <a:rPr sz="2400" b="0">
                 <a:solidFill>
                   <a:srgbClr val="FFFFFF"/>
                 </a:solidFill>
                 <a:latin typeface="Calibri"/>
-              </a:defRPr>
-            </a:pPr>
-            <a:r>
+              </a:rPr>
               <a:t>and every recorded decision is public on BscScan.</a:t>
             </a:r>
           </a:p>
@@ -5082,14 +5312,14 @@
               <a:spcAft>
                 <a:spcPts val="1260"/>
               </a:spcAft>
-              <a:defRPr sz="3600" b="1">
+            </a:pPr>
+            <a:r>
+              <a:rPr sz="3600" b="1">
                 <a:solidFill>
                   <a:srgbClr val="FFFFFF"/>
                 </a:solidFill>
                 <a:latin typeface="Calibri"/>
-              </a:defRPr>
-            </a:pPr>
-            <a:r>
+              </a:rPr>
               <a:t>Who needs it, and how it could pay</a:t>
             </a:r>
           </a:p>
@@ -5121,14 +5351,14 @@
               <a:spcAft>
                 <a:spcPts val="525"/>
               </a:spcAft>
-              <a:defRPr sz="1500" b="1">
+            </a:pPr>
+            <a:r>
+              <a:rPr sz="1500" b="1">
                 <a:solidFill>
                   <a:srgbClr val="FBBF24"/>
                 </a:solidFill>
                 <a:latin typeface="Calibri"/>
-              </a:defRPr>
-            </a:pPr>
-            <a:r>
+              </a:rPr>
               <a:t>HYPOTHESIS: not yet validated with users; no market figures claimed</a:t>
             </a:r>
           </a:p>
@@ -5160,14 +5390,14 @@
               <a:spcAft>
                 <a:spcPts val="839"/>
               </a:spcAft>
-              <a:defRPr sz="2400" b="1">
+            </a:pPr>
+            <a:r>
+              <a:rPr sz="2400" b="1">
                 <a:solidFill>
                   <a:srgbClr val="FFFFFF"/>
                 </a:solidFill>
                 <a:latin typeface="Calibri"/>
-              </a:defRPr>
-            </a:pPr>
-            <a:r>
+              </a:rPr>
               <a:t>Who needs it</a:t>
             </a:r>
           </a:p>
@@ -5199,14 +5429,14 @@
               <a:spcAft>
                 <a:spcPts val="630"/>
               </a:spcAft>
-              <a:defRPr sz="1800" b="0">
+            </a:pPr>
+            <a:r>
+              <a:rPr sz="1800" b="0">
                 <a:solidFill>
                   <a:srgbClr val="FFFFFF"/>
                 </a:solidFill>
                 <a:latin typeface="Calibri"/>
-              </a:defRPr>
-            </a:pPr>
-            <a:r>
+              </a:rPr>
               <a:t>Retail traders who follow or rent bots: proof that the risk stop is real</a:t>
             </a:r>
           </a:p>
@@ -5215,14 +5445,14 @@
               <a:spcAft>
                 <a:spcPts val="630"/>
               </a:spcAft>
-              <a:defRPr sz="1800" b="0">
+            </a:pPr>
+            <a:r>
+              <a:rPr sz="1800" b="0">
                 <a:solidFill>
                   <a:srgbClr val="FFFFFF"/>
                 </a:solidFill>
                 <a:latin typeface="Calibri"/>
-              </a:defRPr>
-            </a:pPr>
-            <a:r>
+              </a:rPr>
               <a:t>Bot builders and signal sellers: a record of discipline a screenshot cannot fake</a:t>
             </a:r>
           </a:p>
@@ -5231,14 +5461,14 @@
               <a:spcAft>
                 <a:spcPts val="630"/>
               </a:spcAft>
-              <a:defRPr sz="1800" b="0">
+            </a:pPr>
+            <a:r>
+              <a:rPr sz="1800" b="0">
                 <a:solidFill>
                   <a:srgbClr val="FFFFFF"/>
                 </a:solidFill>
                 <a:latin typeface="Calibri"/>
-              </a:defRPr>
-            </a:pPr>
-            <a:r>
+              </a:rPr>
               <a:t>Communities and auditors: check a bot's rules without trusting its operator</a:t>
             </a:r>
           </a:p>
@@ -5270,14 +5500,14 @@
               <a:spcAft>
                 <a:spcPts val="839"/>
               </a:spcAft>
-              <a:defRPr sz="2400" b="1">
+            </a:pPr>
+            <a:r>
+              <a:rPr sz="2400" b="1">
                 <a:solidFill>
                   <a:srgbClr val="FFFFFF"/>
                 </a:solidFill>
                 <a:latin typeface="Calibri"/>
-              </a:defRPr>
-            </a:pPr>
-            <a:r>
+              </a:rPr>
               <a:t>How it could pay</a:t>
             </a:r>
           </a:p>
@@ -5309,14 +5539,14 @@
               <a:spcAft>
                 <a:spcPts val="630"/>
               </a:spcAft>
-              <a:defRPr sz="1800" b="0">
+            </a:pPr>
+            <a:r>
+              <a:rPr sz="1800" b="0">
                 <a:solidFill>
                   <a:srgbClr val="FFFFFF"/>
                 </a:solidFill>
                 <a:latin typeface="Calibri"/>
-              </a:defRPr>
-            </a:pPr>
-            <a:r>
+              </a:rPr>
               <a:t>A risk gate per bot: its own MacroGuard plus a public panel, as a monthly service</a:t>
             </a:r>
           </a:p>
@@ -5325,14 +5555,14 @@
               <a:spcAft>
                 <a:spcPts val="630"/>
               </a:spcAft>
-              <a:defRPr sz="1800" b="0">
+            </a:pPr>
+            <a:r>
+              <a:rPr sz="1800" b="0">
                 <a:solidFill>
                   <a:srgbClr val="FFFFFF"/>
                 </a:solidFill>
                 <a:latin typeface="Calibri"/>
-              </a:defRPr>
-            </a:pPr>
-            <a:r>
+              </a:rPr>
               <a:t>The panel link as a trust badge for strategy sellers</a:t>
             </a:r>
           </a:p>
@@ -5341,14 +5571,14 @@
               <a:spcAft>
                 <a:spcPts val="630"/>
               </a:spcAft>
-              <a:defRPr sz="1800" b="0">
+            </a:pPr>
+            <a:r>
+              <a:rPr sz="1800" b="0">
                 <a:solidFill>
                   <a:srgbClr val="FFFFFF"/>
                 </a:solidFill>
                 <a:latin typeface="Calibri"/>
-              </a:defRPr>
-            </a:pPr>
-            <a:r>
+              </a:rPr>
               <a:t>No custody and no performance fee; on-chain cost per decision stays tiny (slide 7)</a:t>
             </a:r>
           </a:p>
@@ -5406,14 +5636,14 @@
               <a:spcAft>
                 <a:spcPts val="1260"/>
               </a:spcAft>
-              <a:defRPr sz="3600" b="1">
+            </a:pPr>
+            <a:r>
+              <a:rPr sz="3600" b="1">
                 <a:solidFill>
                   <a:srgbClr val="FFFFFF"/>
                 </a:solidFill>
                 <a:latin typeface="Calibri"/>
-              </a:defRPr>
-            </a:pPr>
-            <a:r>
+              </a:rPr>
               <a:t>How DRIFT works</a:t>
             </a:r>
           </a:p>
@@ -5445,14 +5675,14 @@
               <a:spcAft>
                 <a:spcPts val="839"/>
               </a:spcAft>
-              <a:defRPr sz="2400" b="1">
+            </a:pPr>
+            <a:r>
+              <a:rPr sz="2400" b="1">
                 <a:solidFill>
                   <a:srgbClr val="9AA8F0"/>
                 </a:solidFill>
                 <a:latin typeface="Calibri"/>
-              </a:defRPr>
-            </a:pPr>
-            <a:r>
+              </a:rPr>
               <a:t>1  Signal</a:t>
             </a:r>
           </a:p>
@@ -5484,14 +5714,14 @@
               <a:spcAft>
                 <a:spcPts val="700"/>
               </a:spcAft>
-              <a:defRPr sz="2000" b="0">
+            </a:pPr>
+            <a:r>
+              <a:rPr sz="2000" b="0">
                 <a:solidFill>
                   <a:srgbClr val="FFFFFF"/>
                 </a:solidFill>
                 <a:latin typeface="Calibri"/>
-              </a:defRPr>
-            </a:pPr>
-            <a:r>
+              </a:rPr>
               <a:t>Python engine: four strategies, point-in-time, no look-ahead</a:t>
             </a:r>
           </a:p>
@@ -5523,14 +5753,14 @@
               <a:spcAft>
                 <a:spcPts val="839"/>
               </a:spcAft>
-              <a:defRPr sz="2400" b="1">
+            </a:pPr>
+            <a:r>
+              <a:rPr sz="2400" b="1">
                 <a:solidFill>
                   <a:srgbClr val="FFFFFF"/>
                 </a:solidFill>
                 <a:latin typeface="Calibri"/>
-              </a:defRPr>
-            </a:pPr>
-            <a:r>
+              </a:rPr>
               <a:t>2  Ask the gate</a:t>
             </a:r>
           </a:p>
@@ -5562,15 +5792,24 @@
               <a:spcAft>
                 <a:spcPts val="700"/>
               </a:spcAft>
-              <a:defRPr sz="2000" b="0">
+            </a:pPr>
+            <a:r>
+              <a:rPr sz="2000" b="0">
                 <a:solidFill>
                   <a:srgbClr val="FFFFFF"/>
                 </a:solidFill>
-                <a:latin typeface="Calibri"/>
-              </a:defRPr>
-            </a:pPr>
-            <a:r>
-              <a:t>MacroGuard.allowed(signal) on BSC Testnet: regime + 20% halt</a:t>
+                <a:latin typeface="Consolas"/>
+              </a:rPr>
+              <a:t>MacroGuard.allowed(signal)</a:t>
+            </a:r>
+            <a:r>
+              <a:rPr sz="2000" b="0">
+                <a:solidFill>
+                  <a:srgbClr val="FFFFFF"/>
+                </a:solidFill>
+                <a:latin typeface="Calibri"/>
+              </a:rPr>
+              <a:t> on BSC Testnet: regime + 20% halt</a:t>
             </a:r>
           </a:p>
         </p:txBody>
@@ -5601,14 +5840,14 @@
               <a:spcAft>
                 <a:spcPts val="839"/>
               </a:spcAft>
-              <a:defRPr sz="2400" b="1">
+            </a:pPr>
+            <a:r>
+              <a:rPr sz="2400" b="1">
                 <a:solidFill>
                   <a:srgbClr val="9AA8F0"/>
                 </a:solidFill>
                 <a:latin typeface="Calibri"/>
-              </a:defRPr>
-            </a:pPr>
-            <a:r>
+              </a:rPr>
               <a:t>3  Trade</a:t>
             </a:r>
           </a:p>
@@ -5640,14 +5879,14 @@
               <a:spcAft>
                 <a:spcPts val="700"/>
               </a:spcAft>
-              <a:defRPr sz="2000" b="0">
+            </a:pPr>
+            <a:r>
+              <a:rPr sz="2000" b="0">
                 <a:solidFill>
                   <a:srgbClr val="FFFFFF"/>
                 </a:solidFill>
                 <a:latin typeface="Calibri"/>
-              </a:defRPr>
-            </a:pPr>
-            <a:r>
+              </a:rPr>
               <a:t>Runner places the order on Bybit testnet (vetoed signals go Flat)</a:t>
             </a:r>
           </a:p>
@@ -5679,14 +5918,14 @@
               <a:spcAft>
                 <a:spcPts val="839"/>
               </a:spcAft>
-              <a:defRPr sz="2400" b="1">
+            </a:pPr>
+            <a:r>
+              <a:rPr sz="2400" b="1">
                 <a:solidFill>
                   <a:srgbClr val="FFFFFF"/>
                 </a:solidFill>
                 <a:latin typeface="Calibri"/>
-              </a:defRPr>
-            </a:pPr>
-            <a:r>
+              </a:rPr>
               <a:t>4  Record</a:t>
             </a:r>
           </a:p>
@@ -5718,15 +5957,24 @@
               <a:spcAft>
                 <a:spcPts val="700"/>
               </a:spcAft>
-              <a:defRPr sz="2000" b="0">
+            </a:pPr>
+            <a:r>
+              <a:rPr sz="2000" b="0">
                 <a:solidFill>
                   <a:srgbClr val="FFFFFF"/>
                 </a:solidFill>
-                <a:latin typeface="Calibri"/>
-              </a:defRPr>
-            </a:pPr>
-            <a:r>
-              <a:t>recordDecision(...) leaves a public receipt; a breach halts the contract</a:t>
+                <a:latin typeface="Consolas"/>
+              </a:rPr>
+              <a:t>recordDecision(...)</a:t>
+            </a:r>
+            <a:r>
+              <a:rPr sz="2000" b="0">
+                <a:solidFill>
+                  <a:srgbClr val="FFFFFF"/>
+                </a:solidFill>
+                <a:latin typeface="Calibri"/>
+              </a:rPr>
+              <a:t> leaves a public receipt; a breach halts it</a:t>
             </a:r>
           </a:p>
         </p:txBody>
@@ -5757,14 +6005,14 @@
               <a:spcAft>
                 <a:spcPts val="489"/>
               </a:spcAft>
-              <a:defRPr sz="1400" b="0">
+            </a:pPr>
+            <a:r>
+              <a:rPr sz="1400" b="0">
                 <a:solidFill>
                   <a:srgbClr val="AAAAAB"/>
                 </a:solidFill>
                 <a:latin typeface="Calibri"/>
-              </a:defRPr>
-            </a:pPr>
-            <a:r>
+              </a:rPr>
               <a:t>Periwinkle: off-chain engine · white: on-chain contract</a:t>
             </a:r>
           </a:p>
@@ -5796,14 +6044,14 @@
               <a:spcAft>
                 <a:spcPts val="630"/>
               </a:spcAft>
-              <a:defRPr sz="1800" b="0">
+            </a:pPr>
+            <a:r>
+              <a:rPr sz="1800" b="0">
                 <a:solidFill>
                   <a:srgbClr val="AAAAAB"/>
                 </a:solidFill>
                 <a:latin typeface="Calibri"/>
-              </a:defRPr>
-            </a:pPr>
-            <a:r>
+              </a:rPr>
               <a:t>The contract never executes orders; it is the public rule and the public record.</a:t>
             </a:r>
           </a:p>
@@ -5861,14 +6109,14 @@
               <a:spcAft>
                 <a:spcPts val="1260"/>
               </a:spcAft>
-              <a:defRPr sz="3600" b="1">
+            </a:pPr>
+            <a:r>
+              <a:rPr sz="3600" b="1">
                 <a:solidFill>
                   <a:srgbClr val="FFFFFF"/>
                 </a:solidFill>
                 <a:latin typeface="Calibri"/>
-              </a:defRPr>
-            </a:pPr>
-            <a:r>
+              </a:rPr>
               <a:t>The panel, and asking the contract</a:t>
             </a:r>
           </a:p>
@@ -5884,6 +6132,7 @@
         </p:nvPicPr>
         <p:blipFill>
           <a:blip r:embed="rId3"/>
+          <a:srcRect l="9700" t="9400" r="9700"/>
           <a:stretch>
             <a:fillRect/>
           </a:stretch>
@@ -5891,7 +6140,7 @@
         <p:spPr>
           <a:xfrm>
             <a:off x="457200" y="1280160"/>
-            <a:ext cx="5577840" cy="3486150"/>
+            <a:ext cx="5577840" cy="3918674"/>
           </a:xfrm>
           <a:prstGeom prst="rect">
             <a:avLst/>
@@ -5915,7 +6164,7 @@
         <p:spPr>
           <a:xfrm>
             <a:off x="6217920" y="1280160"/>
-            <a:ext cx="5486400" cy="2704427"/>
+            <a:ext cx="5486400" cy="2704426"/>
           </a:xfrm>
           <a:prstGeom prst="rect">
             <a:avLst/>
@@ -5930,8 +6179,8 @@
         </p:nvSpPr>
         <p:spPr>
           <a:xfrm>
-            <a:off x="457200" y="4937760"/>
-            <a:ext cx="5577840" cy="1280160"/>
+            <a:off x="457200" y="5349240"/>
+            <a:ext cx="5577840" cy="1097280"/>
           </a:xfrm>
           <a:prstGeom prst="rect">
             <a:avLst/>
@@ -5948,14 +6197,14 @@
               <a:spcAft>
                 <a:spcPts val="560"/>
               </a:spcAft>
-              <a:defRPr sz="1600" b="0">
+            </a:pPr>
+            <a:r>
+              <a:rPr sz="1600" b="0">
                 <a:solidFill>
                   <a:srgbClr val="AAAAAB"/>
                 </a:solidFill>
                 <a:latin typeface="Calibri"/>
-              </a:defRPr>
-            </a:pPr>
-            <a:r>
+              </a:rPr>
               <a:t>Live regime, halt, 20% line and decisions,</a:t>
             </a:r>
           </a:p>
@@ -5964,14 +6213,14 @@
               <a:spcAft>
                 <a:spcPts val="560"/>
               </a:spcAft>
-              <a:defRPr sz="1600" b="0">
+            </a:pPr>
+            <a:r>
+              <a:rPr sz="1600" b="0">
                 <a:solidFill>
                   <a:srgbClr val="AAAAAB"/>
                 </a:solidFill>
                 <a:latin typeface="Calibri"/>
-              </a:defRPr>
-            </a:pPr>
-            <a:r>
+              </a:rPr>
               <a:t>read from BSC Testnet at a named block</a:t>
             </a:r>
           </a:p>
@@ -5985,8 +6234,8 @@
         </p:nvSpPr>
         <p:spPr>
           <a:xfrm>
-            <a:off x="6217920" y="4937760"/>
-            <a:ext cx="5486400" cy="1280160"/>
+            <a:off x="6217920" y="5349240"/>
+            <a:ext cx="5486400" cy="1097280"/>
           </a:xfrm>
           <a:prstGeom prst="rect">
             <a:avLst/>
@@ -6003,14 +6252,14 @@
               <a:spcAft>
                 <a:spcPts val="560"/>
               </a:spcAft>
-              <a:defRPr sz="1600" b="0">
+            </a:pPr>
+            <a:r>
+              <a:rPr sz="1600" b="0">
                 <a:solidFill>
                   <a:srgbClr val="AAAAAB"/>
                 </a:solidFill>
                 <a:latin typeface="Calibri"/>
-              </a:defRPr>
-            </a:pPr>
-            <a:r>
+              </a:rPr>
               <a:t>Long at −25%: Blocked, answered by the live contract</a:t>
             </a:r>
           </a:p>
@@ -6019,15 +6268,33 @@
               <a:spcAft>
                 <a:spcPts val="560"/>
               </a:spcAft>
-              <a:defRPr sz="1600" b="0">
+            </a:pPr>
+            <a:r>
+              <a:rPr sz="1600" b="0">
                 <a:solidFill>
                   <a:srgbClr val="AAAAAB"/>
                 </a:solidFill>
                 <a:latin typeface="Calibri"/>
-              </a:defRPr>
-            </a:pPr>
-            <a:r>
-              <a:t>via eth_call from the agent address (simulation)</a:t>
+              </a:rPr>
+              <a:t>via </a:t>
+            </a:r>
+            <a:r>
+              <a:rPr sz="1600" b="0">
+                <a:solidFill>
+                  <a:srgbClr val="AAAAAB"/>
+                </a:solidFill>
+                <a:latin typeface="Consolas"/>
+              </a:rPr>
+              <a:t>eth_call</a:t>
+            </a:r>
+            <a:r>
+              <a:rPr sz="1600" b="0">
+                <a:solidFill>
+                  <a:srgbClr val="AAAAAB"/>
+                </a:solidFill>
+                <a:latin typeface="Calibri"/>
+              </a:rPr>
+              <a:t> from the agent address (simulation)</a:t>
             </a:r>
           </a:p>
         </p:txBody>
@@ -6084,14 +6351,14 @@
               <a:spcAft>
                 <a:spcPts val="1260"/>
               </a:spcAft>
-              <a:defRPr sz="3600" b="1">
+            </a:pPr>
+            <a:r>
+              <a:rPr sz="3600" b="1">
                 <a:solidFill>
                   <a:srgbClr val="FFFFFF"/>
                 </a:solidFill>
                 <a:latin typeface="Calibri"/>
-              </a:defRPr>
-            </a:pPr>
-            <a:r>
+              </a:rPr>
               <a:t>−25% recorded: the contract halted itself</a:t>
             </a:r>
           </a:p>
@@ -6338,14 +6605,14 @@
               <a:spcAft>
                 <a:spcPts val="489"/>
               </a:spcAft>
-              <a:defRPr sz="1400" b="1">
+            </a:pPr>
+            <a:r>
+              <a:rPr sz="1400" b="1">
                 <a:solidFill>
                   <a:srgbClr val="F0B90B"/>
                 </a:solidFill>
                 <a:latin typeface="Calibri"/>
-              </a:defRPr>
-            </a:pPr>
-            <a:r>
+              </a:rPr>
               <a:t>halt line 20%</a:t>
             </a:r>
           </a:p>
@@ -6377,14 +6644,14 @@
               <a:spcAft>
                 <a:spcPts val="489"/>
               </a:spcAft>
-              <a:defRPr sz="1400" b="0">
+            </a:pPr>
+            <a:r>
+              <a:rPr sz="1400" b="0">
                 <a:solidFill>
                   <a:srgbClr val="34D399"/>
                 </a:solidFill>
                 <a:latin typeface="Calibri"/>
-              </a:defRPr>
-            </a:pPr>
-            <a:r>
+              </a:rPr>
               <a:t>−1%: kept running</a:t>
             </a:r>
           </a:p>
@@ -6416,14 +6683,14 @@
               <a:spcAft>
                 <a:spcPts val="489"/>
               </a:spcAft>
-              <a:defRPr sz="1400" b="0">
+            </a:pPr>
+            <a:r>
+              <a:rPr sz="1400" b="0">
                 <a:solidFill>
                   <a:srgbClr val="FB7185"/>
                 </a:solidFill>
                 <a:latin typeface="Calibri"/>
-              </a:defRPr>
-            </a:pPr>
-            <a:r>
+              </a:rPr>
               <a:t>−25%: halted itself</a:t>
             </a:r>
           </a:p>
@@ -6455,14 +6722,14 @@
               <a:spcAft>
                 <a:spcPts val="560"/>
               </a:spcAft>
-              <a:defRPr sz="1600" b="0">
+            </a:pPr>
+            <a:r>
+              <a:rPr sz="1600" b="0">
                 <a:solidFill>
                   <a:srgbClr val="F0B90B"/>
                 </a:solidFill>
                 <a:latin typeface="Consolas"/>
-              </a:defRPr>
-            </a:pPr>
-            <a:r>
+              </a:rPr>
               <a:t>#134,042,196</a:t>
             </a:r>
           </a:p>
@@ -6494,14 +6761,14 @@
               <a:spcAft>
                 <a:spcPts val="560"/>
               </a:spcAft>
-              <a:defRPr sz="1600" b="0">
+            </a:pPr>
+            <a:r>
+              <a:rPr sz="1600" b="0">
                 <a:solidFill>
                   <a:srgbClr val="FFFFFF"/>
                 </a:solidFill>
                 <a:latin typeface="Consolas"/>
-              </a:defRPr>
-            </a:pPr>
-            <a:r>
+              </a:rPr>
               <a:t>setRegime(RiskOff)</a:t>
             </a:r>
           </a:p>
@@ -6533,14 +6800,14 @@
               <a:spcAft>
                 <a:spcPts val="594"/>
               </a:spcAft>
-              <a:defRPr sz="1700" b="0">
+            </a:pPr>
+            <a:r>
+              <a:rPr sz="1700" b="0">
                 <a:solidFill>
                   <a:srgbClr val="AAAAAB"/>
                 </a:solidFill>
                 <a:latin typeface="Calibri"/>
-              </a:defRPr>
-            </a:pPr>
-            <a:r>
+              </a:rPr>
               <a:t>Long blocked; Short and Flat open</a:t>
             </a:r>
           </a:p>
@@ -6572,14 +6839,14 @@
               <a:spcAft>
                 <a:spcPts val="560"/>
               </a:spcAft>
-              <a:defRPr sz="1600" b="0">
+            </a:pPr>
+            <a:r>
+              <a:rPr sz="1600" b="0">
                 <a:solidFill>
                   <a:srgbClr val="F0B90B"/>
                 </a:solidFill>
                 <a:latin typeface="Consolas"/>
-              </a:defRPr>
-            </a:pPr>
-            <a:r>
+              </a:rPr>
               <a:t>#134,042,256</a:t>
             </a:r>
           </a:p>
@@ -6611,14 +6878,14 @@
               <a:spcAft>
                 <a:spcPts val="560"/>
               </a:spcAft>
-              <a:defRPr sz="1600" b="0">
+            </a:pPr>
+            <a:r>
+              <a:rPr sz="1600" b="0">
                 <a:solidFill>
                   <a:srgbClr val="FFFFFF"/>
                 </a:solidFill>
                 <a:latin typeface="Consolas"/>
-              </a:defRPr>
-            </a:pPr>
-            <a:r>
+              </a:rPr>
               <a:t>recordDecision(BNB, Short, −1%)</a:t>
             </a:r>
           </a:p>
@@ -6650,14 +6917,14 @@
               <a:spcAft>
                 <a:spcPts val="594"/>
               </a:spcAft>
-              <a:defRPr sz="1700" b="0">
+            </a:pPr>
+            <a:r>
+              <a:rPr sz="1700" b="0">
                 <a:solidFill>
                   <a:srgbClr val="34D399"/>
                 </a:solidFill>
                 <a:latin typeface="Calibri"/>
-              </a:defRPr>
-            </a:pPr>
-            <a:r>
+              </a:rPr>
               <a:t>Decision #1, inside the line</a:t>
             </a:r>
           </a:p>
@@ -6732,14 +6999,14 @@
               <a:spcAft>
                 <a:spcPts val="560"/>
               </a:spcAft>
-              <a:defRPr sz="1600" b="0">
+            </a:pPr>
+            <a:r>
+              <a:rPr sz="1600" b="0">
                 <a:solidFill>
                   <a:srgbClr val="F0B90B"/>
                 </a:solidFill>
                 <a:latin typeface="Consolas"/>
-              </a:defRPr>
-            </a:pPr>
-            <a:r>
+              </a:rPr>
               <a:t>#134,042,283</a:t>
             </a:r>
           </a:p>
@@ -6771,14 +7038,14 @@
               <a:spcAft>
                 <a:spcPts val="560"/>
               </a:spcAft>
-              <a:defRPr sz="1600" b="1">
+            </a:pPr>
+            <a:r>
+              <a:rPr sz="1600" b="1">
                 <a:solidFill>
                   <a:srgbClr val="FFFFFF"/>
                 </a:solidFill>
                 <a:latin typeface="Consolas"/>
-              </a:defRPr>
-            </a:pPr>
-            <a:r>
+              </a:rPr>
               <a:t>recordDecision(BNB, Short, −25%)</a:t>
             </a:r>
           </a:p>
@@ -6810,14 +7077,14 @@
               <a:spcAft>
                 <a:spcPts val="594"/>
               </a:spcAft>
-              <a:defRPr sz="1700" b="0">
+            </a:pPr>
+            <a:r>
+              <a:rPr sz="1700" b="0">
                 <a:solidFill>
                   <a:srgbClr val="FB7185"/>
                 </a:solidFill>
                 <a:latin typeface="Calibri"/>
-              </a:defRPr>
-            </a:pPr>
-            <a:r>
+              </a:rPr>
               <a:t>Halted event: only Flat allowed</a:t>
             </a:r>
           </a:p>
@@ -6849,14 +7116,14 @@
               <a:spcAft>
                 <a:spcPts val="560"/>
               </a:spcAft>
-              <a:defRPr sz="1600" b="0">
+            </a:pPr>
+            <a:r>
+              <a:rPr sz="1600" b="0">
                 <a:solidFill>
                   <a:srgbClr val="F0B90B"/>
                 </a:solidFill>
                 <a:latin typeface="Consolas"/>
-              </a:defRPr>
-            </a:pPr>
-            <a:r>
+              </a:rPr>
               <a:t>#134,042,318</a:t>
             </a:r>
           </a:p>
@@ -6888,14 +7155,14 @@
               <a:spcAft>
                 <a:spcPts val="560"/>
               </a:spcAft>
-              <a:defRPr sz="1600" b="0">
+            </a:pPr>
+            <a:r>
+              <a:rPr sz="1600" b="0">
                 <a:solidFill>
                   <a:srgbClr val="FFFFFF"/>
                 </a:solidFill>
                 <a:latin typeface="Consolas"/>
-              </a:defRPr>
-            </a:pPr>
-            <a:r>
+              </a:rPr>
               <a:t>resume()</a:t>
             </a:r>
           </a:p>
@@ -6927,14 +7194,14 @@
               <a:spcAft>
                 <a:spcPts val="594"/>
               </a:spcAft>
-              <a:defRPr sz="1700" b="0">
+            </a:pPr>
+            <a:r>
+              <a:rPr sz="1700" b="0">
                 <a:solidFill>
                   <a:srgbClr val="AAAAAB"/>
                 </a:solidFill>
                 <a:latin typeface="Calibri"/>
-              </a:defRPr>
-            </a:pPr>
-            <a:r>
+              </a:rPr>
               <a:t>Agent-only, on the record</a:t>
             </a:r>
           </a:p>
@@ -6966,14 +7233,14 @@
               <a:spcAft>
                 <a:spcPts val="560"/>
               </a:spcAft>
-              <a:defRPr sz="1600" b="0">
+            </a:pPr>
+            <a:r>
+              <a:rPr sz="1600" b="0">
                 <a:solidFill>
                   <a:srgbClr val="F0B90B"/>
                 </a:solidFill>
                 <a:latin typeface="Consolas"/>
-              </a:defRPr>
-            </a:pPr>
-            <a:r>
+              </a:rPr>
               <a:t>#134,042,328</a:t>
             </a:r>
           </a:p>
@@ -7005,14 +7272,14 @@
               <a:spcAft>
                 <a:spcPts val="560"/>
               </a:spcAft>
-              <a:defRPr sz="1600" b="0">
+            </a:pPr>
+            <a:r>
+              <a:rPr sz="1600" b="0">
                 <a:solidFill>
                   <a:srgbClr val="FFFFFF"/>
                 </a:solidFill>
                 <a:latin typeface="Consolas"/>
-              </a:defRPr>
-            </a:pPr>
-            <a:r>
+              </a:rPr>
               <a:t>setRegime(Neutral)</a:t>
             </a:r>
           </a:p>
@@ -7044,14 +7311,14 @@
               <a:spcAft>
                 <a:spcPts val="594"/>
               </a:spcAft>
-              <a:defRPr sz="1700" b="0">
+            </a:pPr>
+            <a:r>
+              <a:rPr sz="1700" b="0">
                 <a:solidFill>
                   <a:srgbClr val="AAAAAB"/>
                 </a:solidFill>
                 <a:latin typeface="Calibri"/>
-              </a:defRPr>
-            </a:pPr>
-            <a:r>
+              </a:rPr>
               <a:t>Long allowed again; 2 decisions on-chain</a:t>
             </a:r>
           </a:p>
@@ -7083,15 +7350,33 @@
               <a:spcAft>
                 <a:spcPts val="489"/>
               </a:spcAft>
-              <a:defRPr sz="1400" b="0">
+            </a:pPr>
+            <a:r>
+              <a:rPr sz="1400" b="0">
                 <a:solidFill>
                   <a:srgbClr val="AAAAAB"/>
                 </a:solidFill>
                 <a:latin typeface="Calibri"/>
-              </a:defRPr>
-            </a:pPr>
-            <a:r>
-              <a:t>Every row is a transaction with receipt status 1 on BscScan · block 134,042,283 is the halt</a:t>
+              </a:rPr>
+              <a:t>Every row is a transaction with receipt status 1 on BscScan · block </a:t>
+            </a:r>
+            <a:r>
+              <a:rPr sz="1400" b="0">
+                <a:solidFill>
+                  <a:srgbClr val="AAAAAB"/>
+                </a:solidFill>
+                <a:latin typeface="Consolas"/>
+              </a:rPr>
+              <a:t>134,042,283</a:t>
+            </a:r>
+            <a:r>
+              <a:rPr sz="1400" b="0">
+                <a:solidFill>
+                  <a:srgbClr val="AAAAAB"/>
+                </a:solidFill>
+                <a:latin typeface="Calibri"/>
+              </a:rPr>
+              <a:t> is the halt</a:t>
             </a:r>
           </a:p>
         </p:txBody>
@@ -7148,14 +7433,14 @@
               <a:spcAft>
                 <a:spcPts val="1260"/>
               </a:spcAft>
-              <a:defRPr sz="3600" b="1">
+            </a:pPr>
+            <a:r>
+              <a:rPr sz="3600" b="1">
                 <a:solidFill>
                   <a:srgbClr val="FFFFFF"/>
                 </a:solidFill>
                 <a:latin typeface="Calibri"/>
-              </a:defRPr>
-            </a:pPr>
-            <a:r>
+              </a:rPr>
               <a:t>Why BNB Chain</a:t>
             </a:r>
           </a:p>
@@ -7187,14 +7472,14 @@
               <a:spcAft>
                 <a:spcPts val="1400"/>
               </a:spcAft>
-              <a:defRPr sz="4000" b="1">
+            </a:pPr>
+            <a:r>
+              <a:rPr sz="4000" b="1">
                 <a:solidFill>
                   <a:srgbClr val="FFFFFF"/>
                 </a:solidFill>
                 <a:latin typeface="Calibri"/>
-              </a:defRPr>
-            </a:pPr>
-            <a:r>
+              </a:rPr>
               <a:t>≈ 0.0000034 tBNB</a:t>
             </a:r>
           </a:p>
@@ -7226,15 +7511,33 @@
               <a:spcAft>
                 <a:spcPts val="630"/>
               </a:spcAft>
-              <a:defRPr sz="1800" b="0">
+            </a:pPr>
+            <a:r>
+              <a:rPr sz="1800" b="0">
                 <a:solidFill>
                   <a:srgbClr val="AAAAAB"/>
                 </a:solidFill>
                 <a:latin typeface="Calibri"/>
-              </a:defRPr>
-            </a:pPr>
-            <a:r>
-              <a:t>per recorded decision: 33,189–34,323 gas</a:t>
+              </a:rPr>
+              <a:t>per recorded decision: </a:t>
+            </a:r>
+            <a:r>
+              <a:rPr sz="1800" b="0">
+                <a:solidFill>
+                  <a:srgbClr val="AAAAAB"/>
+                </a:solidFill>
+                <a:latin typeface="Consolas"/>
+              </a:rPr>
+              <a:t>33,189–34,323</a:t>
+            </a:r>
+            <a:r>
+              <a:rPr sz="1800" b="0">
+                <a:solidFill>
+                  <a:srgbClr val="AAAAAB"/>
+                </a:solidFill>
+                <a:latin typeface="Calibri"/>
+              </a:rPr>
+              <a:t> gas</a:t>
             </a:r>
           </a:p>
           <a:p>
@@ -7242,15 +7545,33 @@
               <a:spcAft>
                 <a:spcPts val="630"/>
               </a:spcAft>
-              <a:defRPr sz="1800" b="0">
+            </a:pPr>
+            <a:r>
+              <a:rPr sz="1800" b="0">
                 <a:solidFill>
                   <a:srgbClr val="AAAAAB"/>
                 </a:solidFill>
                 <a:latin typeface="Calibri"/>
-              </a:defRPr>
-            </a:pPr>
-            <a:r>
-              <a:t>at 0.1 gwei (our receipts, BSC Testnet)</a:t>
+              </a:rPr>
+              <a:t>at </a:t>
+            </a:r>
+            <a:r>
+              <a:rPr sz="1800" b="0">
+                <a:solidFill>
+                  <a:srgbClr val="AAAAAB"/>
+                </a:solidFill>
+                <a:latin typeface="Consolas"/>
+              </a:rPr>
+              <a:t>0.1</a:t>
+            </a:r>
+            <a:r>
+              <a:rPr sz="1800" b="0">
+                <a:solidFill>
+                  <a:srgbClr val="AAAAAB"/>
+                </a:solidFill>
+                <a:latin typeface="Calibri"/>
+              </a:rPr>
+              <a:t> gwei (our receipts, BSC Testnet)</a:t>
             </a:r>
           </a:p>
         </p:txBody>
@@ -7281,14 +7602,14 @@
               <a:spcAft>
                 <a:spcPts val="1050"/>
               </a:spcAft>
-              <a:defRPr sz="3000" b="1">
+            </a:pPr>
+            <a:r>
+              <a:rPr sz="3000" b="1">
                 <a:solidFill>
                   <a:srgbClr val="FFFFFF"/>
                 </a:solidFill>
                 <a:latin typeface="Calibri"/>
-              </a:defRPr>
-            </a:pPr>
-            <a:r>
+              </a:rPr>
               <a:t>≈ 0.00008 tBNB a day</a:t>
             </a:r>
           </a:p>
@@ -7320,14 +7641,14 @@
               <a:spcAft>
                 <a:spcPts val="630"/>
               </a:spcAft>
-              <a:defRPr sz="1800" b="0">
+            </a:pPr>
+            <a:r>
+              <a:rPr sz="1800" b="0">
                 <a:solidFill>
                   <a:srgbClr val="AAAAAB"/>
                 </a:solidFill>
                 <a:latin typeface="Calibri"/>
-              </a:defRPr>
-            </a:pPr>
-            <a:r>
+              </a:rPr>
               <a:t>for an hourly bot (24 decisions);</a:t>
             </a:r>
           </a:p>
@@ -7336,15 +7657,33 @@
               <a:spcAft>
                 <a:spcPts val="630"/>
               </a:spcAft>
-              <a:defRPr sz="1800" b="0">
+            </a:pPr>
+            <a:r>
+              <a:rPr sz="1800" b="0">
                 <a:solidFill>
                   <a:srgbClr val="AAAAAB"/>
                 </a:solidFill>
                 <a:latin typeface="Calibri"/>
-              </a:defRPr>
-            </a:pPr>
-            <a:r>
-              <a:t>deploy: 449,207 gas ≈ 0.000045 tBNB</a:t>
+              </a:rPr>
+              <a:t>deploy: </a:t>
+            </a:r>
+            <a:r>
+              <a:rPr sz="1800" b="0">
+                <a:solidFill>
+                  <a:srgbClr val="AAAAAB"/>
+                </a:solidFill>
+                <a:latin typeface="Consolas"/>
+              </a:rPr>
+              <a:t>449,207</a:t>
+            </a:r>
+            <a:r>
+              <a:rPr sz="1800" b="0">
+                <a:solidFill>
+                  <a:srgbClr val="AAAAAB"/>
+                </a:solidFill>
+                <a:latin typeface="Calibri"/>
+              </a:rPr>
+              <a:t> gas ≈ 0.000045 tBNB</a:t>
             </a:r>
           </a:p>
         </p:txBody>
@@ -7375,14 +7714,14 @@
               <a:spcAft>
                 <a:spcPts val="839"/>
               </a:spcAft>
-              <a:defRPr sz="2400" b="1">
+            </a:pPr>
+            <a:r>
+              <a:rPr sz="2400" b="1">
                 <a:solidFill>
                   <a:srgbClr val="FFFFFF"/>
                 </a:solidFill>
                 <a:latin typeface="Calibri"/>
-              </a:defRPr>
-            </a:pPr>
-            <a:r>
+              </a:rPr>
               <a:t>What else it gives us</a:t>
             </a:r>
           </a:p>
@@ -7414,15 +7753,24 @@
               <a:spcAft>
                 <a:spcPts val="630"/>
               </a:spcAft>
-              <a:defRPr sz="1800" b="0">
+            </a:pPr>
+            <a:r>
+              <a:rPr sz="1800" b="0">
                 <a:solidFill>
                   <a:srgbClr val="FFFFFF"/>
                 </a:solidFill>
                 <a:latin typeface="Calibri"/>
-              </a:defRPr>
-            </a:pPr>
-            <a:r>
-              <a:t>EVM: Foundry tests and Sourcify verification on chain 97</a:t>
+              </a:rPr>
+              <a:t>EVM: Foundry tests and Sourcify verification on chain </a:t>
+            </a:r>
+            <a:r>
+              <a:rPr sz="1800" b="0">
+                <a:solidFill>
+                  <a:srgbClr val="FFFFFF"/>
+                </a:solidFill>
+                <a:latin typeface="Consolas"/>
+              </a:rPr>
+              <a:t>97</a:t>
             </a:r>
           </a:p>
           <a:p>
@@ -7430,14 +7778,14 @@
               <a:spcAft>
                 <a:spcPts val="630"/>
               </a:spcAft>
-              <a:defRPr sz="1800" b="0">
+            </a:pPr>
+            <a:r>
+              <a:rPr sz="1800" b="0">
                 <a:solidFill>
                   <a:srgbClr val="FFFFFF"/>
                 </a:solidFill>
                 <a:latin typeface="Calibri"/>
-              </a:defRPr>
-            </a:pPr>
-            <a:r>
+              </a:rPr>
               <a:t>Public RPCs a browser can call: the panel needs no backend</a:t>
             </a:r>
           </a:p>
@@ -7446,14 +7794,14 @@
               <a:spcAft>
                 <a:spcPts val="630"/>
               </a:spcAft>
-              <a:defRPr sz="1800" b="0">
+            </a:pPr>
+            <a:r>
+              <a:rPr sz="1800" b="0">
                 <a:solidFill>
                   <a:srgbClr val="FFFFFF"/>
                 </a:solidFill>
                 <a:latin typeface="Calibri"/>
-              </a:defRPr>
-            </a:pPr>
-            <a:r>
+              </a:rPr>
               <a:t>Five smoke-test transactions within 132 blocks</a:t>
             </a:r>
           </a:p>
@@ -7462,15 +7810,33 @@
               <a:spcAft>
                 <a:spcPts val="630"/>
               </a:spcAft>
-              <a:defRPr sz="1800" b="0">
+            </a:pPr>
+            <a:r>
+              <a:rPr sz="1800" b="0">
                 <a:solidFill>
                   <a:srgbClr val="FFFFFF"/>
                 </a:solidFill>
                 <a:latin typeface="Calibri"/>
-              </a:defRPr>
-            </a:pPr>
-            <a:r>
-              <a:t>Mainnet (chain 56) is a config switch; not deployed there</a:t>
+              </a:rPr>
+              <a:t>Mainnet (chain </a:t>
+            </a:r>
+            <a:r>
+              <a:rPr sz="1800" b="0">
+                <a:solidFill>
+                  <a:srgbClr val="FFFFFF"/>
+                </a:solidFill>
+                <a:latin typeface="Consolas"/>
+              </a:rPr>
+              <a:t>56</a:t>
+            </a:r>
+            <a:r>
+              <a:rPr sz="1800" b="0">
+                <a:solidFill>
+                  <a:srgbClr val="FFFFFF"/>
+                </a:solidFill>
+                <a:latin typeface="Calibri"/>
+              </a:rPr>
+              <a:t>) is a config switch; not deployed there</a:t>
             </a:r>
           </a:p>
         </p:txBody>
@@ -7501,14 +7867,14 @@
               <a:spcAft>
                 <a:spcPts val="489"/>
               </a:spcAft>
-              <a:defRPr sz="1400" b="0">
+            </a:pPr>
+            <a:r>
+              <a:rPr sz="1400" b="0">
                 <a:solidFill>
                   <a:srgbClr val="AAAAAB"/>
                 </a:solidFill>
                 <a:latin typeface="Calibri"/>
-              </a:defRPr>
-            </a:pPr>
-            <a:r>
+              </a:rPr>
               <a:t>Testnet gas price, not a mainnet quote. Mainnet is on the roadmap, after an audit.</a:t>
             </a:r>
           </a:p>
@@ -7566,14 +7932,14 @@
               <a:spcAft>
                 <a:spcPts val="1260"/>
               </a:spcAft>
-              <a:defRPr sz="3600" b="1">
+            </a:pPr>
+            <a:r>
+              <a:rPr sz="3600" b="1">
                 <a:solidFill>
                   <a:srgbClr val="FFFFFF"/>
                 </a:solidFill>
                 <a:latin typeface="Calibri"/>
-              </a:defRPr>
-            </a:pPr>
-            <a:r>
+              </a:rPr>
               <a:t>Evidence and current limits</a:t>
             </a:r>
           </a:p>
@@ -7605,14 +7971,14 @@
               <a:spcAft>
                 <a:spcPts val="1189"/>
               </a:spcAft>
-              <a:defRPr sz="3400" b="1">
+            </a:pPr>
+            <a:r>
+              <a:rPr sz="3400" b="1">
                 <a:solidFill>
                   <a:srgbClr val="34D399"/>
                 </a:solidFill>
                 <a:latin typeface="Calibri"/>
-              </a:defRPr>
-            </a:pPr>
-            <a:r>
+              </a:rPr>
               <a:t>30 / 30</a:t>
             </a:r>
           </a:p>
@@ -7644,14 +8010,14 @@
               <a:spcAft>
                 <a:spcPts val="489"/>
               </a:spcAft>
-              <a:defRPr sz="1400" b="0">
+            </a:pPr>
+            <a:r>
+              <a:rPr sz="1400" b="0">
                 <a:solidFill>
                   <a:srgbClr val="FFFFFF"/>
                 </a:solidFill>
                 <a:latin typeface="Calibri"/>
-              </a:defRPr>
-            </a:pPr>
-            <a:r>
+              </a:rPr>
               <a:t>contract tests: unit, fuzz, invariant</a:t>
             </a:r>
           </a:p>
@@ -7660,14 +8026,14 @@
               <a:spcAft>
                 <a:spcPts val="489"/>
               </a:spcAft>
-              <a:defRPr sz="1400" b="0">
+            </a:pPr>
+            <a:r>
+              <a:rPr sz="1400" b="0">
                 <a:solidFill>
                   <a:srgbClr val="FFFFFF"/>
                 </a:solidFill>
                 <a:latin typeface="Calibri"/>
-              </a:defRPr>
-            </a:pPr>
-            <a:r>
+              </a:rPr>
               <a:t>100% coverage of MacroGuard.sol</a:t>
             </a:r>
           </a:p>
@@ -7699,15 +8065,15 @@
               <a:spcAft>
                 <a:spcPts val="1189"/>
               </a:spcAft>
-              <a:defRPr sz="3400" b="1">
+            </a:pPr>
+            <a:r>
+              <a:rPr sz="3400" b="1">
                 <a:solidFill>
                   <a:srgbClr val="34D399"/>
                 </a:solidFill>
                 <a:latin typeface="Calibri"/>
-              </a:defRPr>
-            </a:pPr>
-            <a:r>
-              <a:t>47</a:t>
+              </a:rPr>
+              <a:t>48</a:t>
             </a:r>
           </a:p>
         </p:txBody>
@@ -7738,14 +8104,14 @@
               <a:spcAft>
                 <a:spcPts val="489"/>
               </a:spcAft>
-              <a:defRPr sz="1400" b="0">
+            </a:pPr>
+            <a:r>
+              <a:rPr sz="1400" b="0">
                 <a:solidFill>
                   <a:srgbClr val="FFFFFF"/>
                 </a:solidFill>
                 <a:latin typeface="Calibri"/>
-              </a:defRPr>
-            </a:pPr>
-            <a:r>
+              </a:rPr>
               <a:t>offline engine tests;</a:t>
             </a:r>
           </a:p>
@@ -7754,14 +8120,14 @@
               <a:spcAft>
                 <a:spcPts val="489"/>
               </a:spcAft>
-              <a:defRPr sz="1400" b="0">
+            </a:pPr>
+            <a:r>
+              <a:rPr sz="1400" b="0">
                 <a:solidFill>
                   <a:srgbClr val="FFFFFF"/>
                 </a:solidFill>
                 <a:latin typeface="Calibri"/>
-              </a:defRPr>
-            </a:pPr>
-            <a:r>
+              </a:rPr>
               <a:t>no look-ahead tested as a property</a:t>
             </a:r>
           </a:p>
@@ -7793,14 +8159,14 @@
               <a:spcAft>
                 <a:spcPts val="1189"/>
               </a:spcAft>
-              <a:defRPr sz="3400" b="1">
+            </a:pPr>
+            <a:r>
+              <a:rPr sz="3400" b="1">
                 <a:solidFill>
                   <a:srgbClr val="34D399"/>
                 </a:solidFill>
                 <a:latin typeface="Calibri"/>
-              </a:defRPr>
-            </a:pPr>
-            <a:r>
+              </a:rPr>
               <a:t>15</a:t>
             </a:r>
           </a:p>
@@ -7832,14 +8198,14 @@
               <a:spcAft>
                 <a:spcPts val="489"/>
               </a:spcAft>
-              <a:defRPr sz="1400" b="0">
+            </a:pPr>
+            <a:r>
+              <a:rPr sz="1400" b="0">
                 <a:solidFill>
                   <a:srgbClr val="FFFFFF"/>
                 </a:solidFill>
                 <a:latin typeface="Calibri"/>
-              </a:defRPr>
-            </a:pPr>
-            <a:r>
+              </a:rPr>
               <a:t>web tests: contract reads and the</a:t>
             </a:r>
           </a:p>
@@ -7848,14 +8214,14 @@
               <a:spcAft>
                 <a:spcPts val="489"/>
               </a:spcAft>
-              <a:defRPr sz="1400" b="0">
+            </a:pPr>
+            <a:r>
+              <a:rPr sz="1400" b="0">
                 <a:solidFill>
                   <a:srgbClr val="FFFFFF"/>
                 </a:solidFill>
                 <a:latin typeface="Calibri"/>
-              </a:defRPr>
-            </a:pPr>
-            <a:r>
+              </a:rPr>
               <a:t>what-if encoder against cast</a:t>
             </a:r>
           </a:p>
@@ -7887,14 +8253,14 @@
               <a:spcAft>
                 <a:spcPts val="1189"/>
               </a:spcAft>
-              <a:defRPr sz="3400" b="1">
+            </a:pPr>
+            <a:r>
+              <a:rPr sz="3400" b="1">
                 <a:solidFill>
                   <a:srgbClr val="F0B90B"/>
                 </a:solidFill>
                 <a:latin typeface="Calibri"/>
-              </a:defRPr>
-            </a:pPr>
-            <a:r>
+              </a:rPr>
               <a:t>exact match</a:t>
             </a:r>
           </a:p>
@@ -7926,14 +8292,14 @@
               <a:spcAft>
                 <a:spcPts val="489"/>
               </a:spcAft>
-              <a:defRPr sz="1400" b="0">
+            </a:pPr>
+            <a:r>
+              <a:rPr sz="1400" b="0">
                 <a:solidFill>
                   <a:srgbClr val="FFFFFF"/>
                 </a:solidFill>
                 <a:latin typeface="Calibri"/>
-              </a:defRPr>
-            </a:pPr>
-            <a:r>
+              </a:rPr>
               <a:t>source verified on Sourcify</a:t>
             </a:r>
           </a:p>
@@ -7942,14 +8308,14 @@
               <a:spcAft>
                 <a:spcPts val="489"/>
               </a:spcAft>
-              <a:defRPr sz="1400" b="0">
+            </a:pPr>
+            <a:r>
+              <a:rPr sz="1400" b="0">
                 <a:solidFill>
                   <a:srgbClr val="FFFFFF"/>
                 </a:solidFill>
                 <a:latin typeface="Calibri"/>
-              </a:defRPr>
-            </a:pPr>
-            <a:r>
+              </a:rPr>
               <a:t>6 receipts, all status 1</a:t>
             </a:r>
           </a:p>
@@ -7981,14 +8347,14 @@
               <a:spcAft>
                 <a:spcPts val="769"/>
               </a:spcAft>
-              <a:defRPr sz="2200" b="1">
+            </a:pPr>
+            <a:r>
+              <a:rPr sz="2200" b="1">
                 <a:solidFill>
                   <a:srgbClr val="FBBF24"/>
                 </a:solidFill>
                 <a:latin typeface="Calibri"/>
-              </a:defRPr>
-            </a:pPr>
-            <a:r>
+              </a:rPr>
               <a:t>Limits, said plainly</a:t>
             </a:r>
           </a:p>
@@ -8020,15 +8386,33 @@
               <a:spcAft>
                 <a:spcPts val="560"/>
               </a:spcAft>
-              <a:defRPr sz="1600" b="0">
+            </a:pPr>
+            <a:r>
+              <a:rPr sz="1600" b="0">
                 <a:solidFill>
                   <a:srgbClr val="FFFFFF"/>
                 </a:solidFill>
                 <a:latin typeface="Calibri"/>
-              </a:defRPr>
-            </a:pPr>
-            <a:r>
-              <a:t>The contract never executes orders · the runner fails open if the RPC is down · the agent can resume() at once</a:t>
+              </a:rPr>
+              <a:t>The contract never executes orders · the runner fails open if the RPC is down · the agent can </a:t>
+            </a:r>
+            <a:r>
+              <a:rPr sz="1600" b="0">
+                <a:solidFill>
+                  <a:srgbClr val="FFFFFF"/>
+                </a:solidFill>
+                <a:latin typeface="Consolas"/>
+              </a:rPr>
+              <a:t>resume()</a:t>
+            </a:r>
+            <a:r>
+              <a:rPr sz="1600" b="0">
+                <a:solidFill>
+                  <a:srgbClr val="FFFFFF"/>
+                </a:solidFill>
+                <a:latin typeface="Calibri"/>
+              </a:rPr>
+              <a:t> at once</a:t>
             </a:r>
           </a:p>
           <a:p>
@@ -8036,14 +8420,14 @@
               <a:spcAft>
                 <a:spcPts val="560"/>
               </a:spcAft>
-              <a:defRPr sz="1600" b="0">
+            </a:pPr>
+            <a:r>
+              <a:rPr sz="1600" b="0">
                 <a:solidFill>
                   <a:srgbClr val="FFFFFF"/>
                 </a:solidFill>
                 <a:latin typeface="Calibri"/>
-              </a:defRPr>
-            </a:pPr>
-            <a:r>
+              </a:rPr>
               <a:t>The drawdown is reported by the agent · no live bot tick and no profit claimed; backtests are research</a:t>
             </a:r>
           </a:p>
@@ -8101,14 +8485,14 @@
               <a:spcAft>
                 <a:spcPts val="1260"/>
               </a:spcAft>
-              <a:defRPr sz="3600" b="1">
+            </a:pPr>
+            <a:r>
+              <a:rPr sz="3600" b="1">
                 <a:solidFill>
                   <a:srgbClr val="FFFFFF"/>
                 </a:solidFill>
                 <a:latin typeface="Calibri"/>
-              </a:defRPr>
-            </a:pPr>
-            <a:r>
+              </a:rPr>
               <a:t>What Dex added</a:t>
             </a:r>
           </a:p>
@@ -8140,14 +8524,14 @@
               <a:spcAft>
                 <a:spcPts val="839"/>
               </a:spcAft>
-              <a:defRPr sz="2400" b="1">
+            </a:pPr>
+            <a:r>
+              <a:rPr sz="2400" b="1">
                 <a:solidFill>
                   <a:srgbClr val="AAAAAB"/>
                 </a:solidFill>
                 <a:latin typeface="Calibri"/>
-              </a:defRPr>
-            </a:pPr>
-            <a:r>
+              </a:rPr>
               <a:t>Upstream DRIFT project</a:t>
             </a:r>
           </a:p>
@@ -8179,14 +8563,14 @@
               <a:spcAft>
                 <a:spcPts val="630"/>
               </a:spcAft>
-              <a:defRPr sz="1800" b="0">
+            </a:pPr>
+            <a:r>
+              <a:rPr sz="1800" b="0">
                 <a:solidFill>
                   <a:srgbClr val="FFFFFF"/>
                 </a:solidFill>
                 <a:latin typeface="Calibri"/>
-              </a:defRPr>
-            </a:pPr>
-            <a:r>
+              </a:rPr>
               <a:t>Quant engine, cockpit and MacroGuard.sol</a:t>
             </a:r>
           </a:p>
@@ -8195,14 +8579,14 @@
               <a:spcAft>
                 <a:spcPts val="630"/>
               </a:spcAft>
-              <a:defRPr sz="1800" b="0">
+            </a:pPr>
+            <a:r>
+              <a:rPr sz="1800" b="0">
                 <a:solidFill>
                   <a:srgbClr val="FFFFFF"/>
                 </a:solidFill>
                 <a:latin typeface="Calibri"/>
-              </a:defRPr>
-            </a:pPr>
-            <a:r>
+              </a:rPr>
               <a:t>7 contract tests</a:t>
             </a:r>
           </a:p>
@@ -8211,14 +8595,14 @@
               <a:spcAft>
                 <a:spcPts val="630"/>
               </a:spcAft>
-              <a:defRPr sz="1800" b="0">
+            </a:pPr>
+            <a:r>
+              <a:rPr sz="1800" b="0">
                 <a:solidFill>
                   <a:srgbClr val="FFFFFF"/>
                 </a:solidFill>
                 <a:latin typeface="Calibri"/>
-              </a:defRPr>
-            </a:pPr>
-            <a:r>
+              </a:rPr>
               <a:t>Built for a Mantle hackathon track (June 2026)</a:t>
             </a:r>
           </a:p>
@@ -8227,14 +8611,14 @@
               <a:spcAft>
                 <a:spcPts val="630"/>
               </a:spcAft>
-              <a:defRPr sz="1800" b="0">
+            </a:pPr>
+            <a:r>
+              <a:rPr sz="1800" b="0">
                 <a:solidFill>
                   <a:srgbClr val="FFFFFF"/>
                 </a:solidFill>
                 <a:latin typeface="Calibri"/>
-              </a:defRPr>
-            </a:pPr>
-            <a:r>
+              </a:rPr>
               <a:t>Migrated to BNB Chain in bcc-ukdw/seed-bnb</a:t>
             </a:r>
           </a:p>
@@ -8243,15 +8627,33 @@
               <a:spcAft>
                 <a:spcPts val="630"/>
               </a:spcAft>
-              <a:defRPr sz="1800" b="0">
+            </a:pPr>
+            <a:r>
+              <a:rPr sz="1800" b="0">
                 <a:solidFill>
                   <a:srgbClr val="FFFFFF"/>
                 </a:solidFill>
                 <a:latin typeface="Calibri"/>
-              </a:defRPr>
-            </a:pPr>
-            <a:r>
-              <a:t>(commit 52671ce, 29 Sep 2026)</a:t>
+              </a:rPr>
+              <a:t>(commit </a:t>
+            </a:r>
+            <a:r>
+              <a:rPr sz="1800" b="0">
+                <a:solidFill>
+                  <a:srgbClr val="FFFFFF"/>
+                </a:solidFill>
+                <a:latin typeface="Consolas"/>
+              </a:rPr>
+              <a:t>52671ce</a:t>
+            </a:r>
+            <a:r>
+              <a:rPr sz="1800" b="0">
+                <a:solidFill>
+                  <a:srgbClr val="FFFFFF"/>
+                </a:solidFill>
+                <a:latin typeface="Calibri"/>
+              </a:rPr>
+              <a:t>, 29 Sep 2026)</a:t>
             </a:r>
           </a:p>
         </p:txBody>
@@ -8282,14 +8684,14 @@
               <a:spcAft>
                 <a:spcPts val="839"/>
               </a:spcAft>
-              <a:defRPr sz="2400" b="1">
+            </a:pPr>
+            <a:r>
+              <a:rPr sz="2400" b="1">
                 <a:solidFill>
                   <a:srgbClr val="FFFFFF"/>
                 </a:solidFill>
                 <a:latin typeface="Calibri"/>
-              </a:defRPr>
-            </a:pPr>
-            <a:r>
+              </a:rPr>
               <a:t>Dex's work in this fork</a:t>
             </a:r>
           </a:p>
@@ -8321,14 +8723,14 @@
               <a:spcAft>
                 <a:spcPts val="594"/>
               </a:spcAft>
-              <a:defRPr sz="1700" b="0">
+            </a:pPr>
+            <a:r>
+              <a:rPr sz="1700" b="0">
                 <a:solidFill>
                   <a:srgbClr val="FFFFFF"/>
                 </a:solidFill>
                 <a:latin typeface="Calibri"/>
-              </a:defRPr>
-            </a:pPr>
-            <a:r>
+              </a:rPr>
               <a:t>Own BSC Testnet deploy + 5-tx smoke test (status 1)</a:t>
             </a:r>
           </a:p>
@@ -8337,14 +8739,14 @@
               <a:spcAft>
                 <a:spcPts val="594"/>
               </a:spcAft>
-              <a:defRPr sz="1700" b="0">
+            </a:pPr>
+            <a:r>
+              <a:rPr sz="1700" b="0">
                 <a:solidFill>
                   <a:srgbClr val="FFFFFF"/>
                 </a:solidFill>
                 <a:latin typeface="Calibri"/>
-              </a:defRPr>
-            </a:pPr>
-            <a:r>
+              </a:rPr>
               <a:t>Source verified on Sourcify (exact match)</a:t>
             </a:r>
           </a:p>
@@ -8353,14 +8755,14 @@
               <a:spcAft>
                 <a:spcPts val="594"/>
               </a:spcAft>
-              <a:defRPr sz="1700" b="0">
+            </a:pPr>
+            <a:r>
+              <a:rPr sz="1700" b="0">
                 <a:solidFill>
                   <a:srgbClr val="FFFFFF"/>
                 </a:solidFill>
                 <a:latin typeface="Calibri"/>
-              </a:defRPr>
-            </a:pPr>
-            <a:r>
+              </a:rPr>
               <a:t>Public panel: live browser reads, receipts, limits</a:t>
             </a:r>
           </a:p>
@@ -8369,15 +8771,33 @@
               <a:spcAft>
                 <a:spcPts val="594"/>
               </a:spcAft>
-              <a:defRPr sz="1700" b="0">
+            </a:pPr>
+            <a:r>
+              <a:rPr sz="1700" b="0">
                 <a:solidFill>
                   <a:srgbClr val="FFFFFF"/>
                 </a:solidFill>
                 <a:latin typeface="Calibri"/>
-              </a:defRPr>
-            </a:pPr>
-            <a:r>
-              <a:t>Ask the contract: eth_call what-if, nothing signed</a:t>
+              </a:rPr>
+              <a:t>Ask the contract: </a:t>
+            </a:r>
+            <a:r>
+              <a:rPr sz="1700" b="0">
+                <a:solidFill>
+                  <a:srgbClr val="FFFFFF"/>
+                </a:solidFill>
+                <a:latin typeface="Consolas"/>
+              </a:rPr>
+              <a:t>eth_call</a:t>
+            </a:r>
+            <a:r>
+              <a:rPr sz="1700" b="0">
+                <a:solidFill>
+                  <a:srgbClr val="FFFFFF"/>
+                </a:solidFill>
+                <a:latin typeface="Calibri"/>
+              </a:rPr>
+              <a:t> what-if, nothing signed</a:t>
             </a:r>
           </a:p>
           <a:p>
@@ -8385,15 +8805,15 @@
               <a:spcAft>
                 <a:spcPts val="594"/>
               </a:spcAft>
-              <a:defRPr sz="1700" b="0">
+            </a:pPr>
+            <a:r>
+              <a:rPr sz="1700" b="0">
                 <a:solidFill>
                   <a:srgbClr val="FFFFFF"/>
                 </a:solidFill>
                 <a:latin typeface="Calibri"/>
-              </a:defRPr>
-            </a:pPr>
-            <a:r>
-              <a:t>+23 contract tests, 47 engine tests, 15 web tests, CI</a:t>
+              </a:rPr>
+              <a:t>+23 contract tests, 48 engine tests, 15 web tests, CI</a:t>
             </a:r>
           </a:p>
           <a:p>
@@ -8401,14 +8821,14 @@
               <a:spcAft>
                 <a:spcPts val="594"/>
               </a:spcAft>
-              <a:defRPr sz="1700" b="0">
+            </a:pPr>
+            <a:r>
+              <a:rPr sz="1700" b="0">
                 <a:solidFill>
                   <a:srgbClr val="FFFFFF"/>
                 </a:solidFill>
                 <a:latin typeface="Calibri"/>
-              </a:defRPr>
-            </a:pPr>
-            <a:r>
+              </a:rPr>
               <a:t>Labelled Binance data fallback · threat model</a:t>
             </a:r>
           </a:p>
@@ -8417,14 +8837,14 @@
               <a:spcAft>
                 <a:spcPts val="594"/>
               </a:spcAft>
-              <a:defRPr sz="1700" b="0">
+            </a:pPr>
+            <a:r>
+              <a:rPr sz="1700" b="0">
                 <a:solidFill>
                   <a:srgbClr val="FFFFFF"/>
                 </a:solidFill>
                 <a:latin typeface="Calibri"/>
-              </a:defRPr>
-            </a:pPr>
-            <a:r>
+              </a:rPr>
               <a:t>Landing, visual system, PRD, this deck</a:t>
             </a:r>
           </a:p>
@@ -8456,15 +8876,24 @@
               <a:spcAft>
                 <a:spcPts val="560"/>
               </a:spcAft>
-              <a:defRPr sz="1600" b="0">
+            </a:pPr>
+            <a:r>
+              <a:rPr sz="1600" b="0">
                 <a:solidFill>
                   <a:srgbClr val="AAAAAB"/>
                 </a:solidFill>
+                <a:latin typeface="Calibri"/>
+              </a:rPr>
+              <a:t>Code: </a:t>
+            </a:r>
+            <a:r>
+              <a:rPr sz="1600" b="0">
+                <a:solidFill>
+                  <a:srgbClr val="AAAAAB"/>
+                </a:solidFill>
                 <a:latin typeface="Consolas"/>
-              </a:defRPr>
-            </a:pPr>
-            <a:r>
-              <a:t>Code: github.com/Stylenecy/seed-bnb/tree/dex/drift/drift</a:t>
+              </a:rPr>
+              <a:t>github.com/Stylenecy/seed-bnb/tree/dex/drift/drift</a:t>
             </a:r>
           </a:p>
         </p:txBody>
@@ -8512,10 +8941,10 @@
         <a:srgbClr val="F79646"/>
       </a:accent6>
       <a:hlink>
-        <a:srgbClr val="0000FF"/>
+        <a:srgbClr val="F0B90B"/>
       </a:hlink>
       <a:folHlink>
-        <a:srgbClr val="800080"/>
+        <a:srgbClr val="F0B90B"/>
       </a:folHlink>
     </a:clrScheme>
     <a:fontScheme name="Office">
@@ -8832,10 +9261,10 @@
         <a:srgbClr val="F79646"/>
       </a:accent6>
       <a:hlink>
-        <a:srgbClr val="0000FF"/>
+        <a:srgbClr val="F0B90B"/>
       </a:hlink>
       <a:folHlink>
-        <a:srgbClr val="800080"/>
+        <a:srgbClr val="F0B90B"/>
       </a:folHlink>
     </a:clrScheme>
     <a:fontScheme name="Office">

--- a/docs/submission/DRIFT-pitch.pptx
+++ b/docs/submission/DRIFT-pitch.pptx
@@ -581,7 +581,7 @@
           <a:lstStyle/>
           <a:p>
             <a:r>
-              <a:t>Roadmap items are not built yet. The links are live today and clickable in the deck.</a:t>
+              <a:t>Roadmap items are not built yet. The links are live today; the BscScan and Sourcify links are clickable.</a:t>
             </a:r>
           </a:p>
         </p:txBody>
@@ -6132,7 +6132,7 @@
         </p:nvPicPr>
         <p:blipFill>
           <a:blip r:embed="rId3"/>
-          <a:srcRect l="9700" t="9400" r="9700"/>
+          <a:srcRect l="9700" t="9400" r="9700" b="12000"/>
           <a:stretch>
             <a:fillRect/>
           </a:stretch>
@@ -6140,7 +6140,7 @@
         <p:spPr>
           <a:xfrm>
             <a:off x="457200" y="1280160"/>
-            <a:ext cx="5577840" cy="3918674"/>
+            <a:ext cx="5577840" cy="3399645"/>
           </a:xfrm>
           <a:prstGeom prst="rect">
             <a:avLst/>
@@ -6179,7 +6179,7 @@
         </p:nvSpPr>
         <p:spPr>
           <a:xfrm>
-            <a:off x="457200" y="5349240"/>
+            <a:off x="457200" y="4800600"/>
             <a:ext cx="5577840" cy="1097280"/>
           </a:xfrm>
           <a:prstGeom prst="rect">
@@ -6234,7 +6234,7 @@
         </p:nvSpPr>
         <p:spPr>
           <a:xfrm>
-            <a:off x="6217920" y="5349240"/>
+            <a:off x="6217920" y="4800600"/>
             <a:ext cx="5486400" cy="1097280"/>
           </a:xfrm>
           <a:prstGeom prst="rect">
